--- a/docs/presentacion/PLAG_OUT_Demo_Final_20Min.pptx
+++ b/docs/presentacion/PLAG_OUT_Demo_Final_20Min.pptx
@@ -14,6 +14,17 @@
     <p:sldId id="262" r:id="rId14"/>
     <p:sldId id="263" r:id="rId15"/>
     <p:sldId id="264" r:id="rId16"/>
+    <p:sldId id="265" r:id="rId17"/>
+    <p:sldId id="266" r:id="rId18"/>
+    <p:sldId id="267" r:id="rId19"/>
+    <p:sldId id="268" r:id="rId20"/>
+    <p:sldId id="269" r:id="rId21"/>
+    <p:sldId id="270" r:id="rId22"/>
+    <p:sldId id="271" r:id="rId23"/>
+    <p:sldId id="272" r:id="rId24"/>
+    <p:sldId id="273" r:id="rId25"/>
+    <p:sldId id="274" r:id="rId26"/>
+    <p:sldId id="275" r:id="rId27"/>
   </p:sldIdLst>
   <p:sldSz cx="12191695" cy="6858000" type="screen4x3"/>
   <p:notesSz cx="6858000" cy="9144000"/>
@@ -510,7 +521,707 @@
           <a:lstStyle/>
           <a:p>
             <a:r>
-              <a:t>Buenos días a todos. En la última campaña agrícola perdimos más de 2.000 millones de dólares en maíz por una sola plaga: la chicharrita. El problema de fondo es que el monitoreo tradicional llega tarde: cuando se detecta el daño foliar, pulverizar cuesta el doble y rinde la mitad. PLAG-OUT transforma este paradigma convirtiendo el celular en un copiloto fenológico predictivo. Nuestro lema es: 'La IA acota el riesgo, el campo confirma'. Pasemos directamente a ver el producto en funcionamiento.</a:t>
+              <a:t>Buenos días a todos. En la última campaña perdimos más de 2.000 millones de dólares en maíz por la chicharrita. El sistema tradicional llega tarde: cuando se ve la hoja comida, pulverizar cuesta el doble y rinde 10-20%. Creamos PLAG-OUT para anticipar cuándo nace la plaga antes de que empiece a comer.</a:t>
+            </a:r>
+          </a:p>
+        </p:txBody>
+      </p:sp>
+      <p:sp>
+        <p:nvSpPr>
+          <p:cNvPr id="4" name="Slide Number Placeholder 3"/>
+          <p:cNvSpPr>
+            <a:spLocks noGrp="1"/>
+          </p:cNvSpPr>
+          <p:nvPr>
+            <p:ph type="sldNum" idx="5" sz="quarter"/>
+          </p:nvPr>
+        </p:nvSpPr>
+        <p:spPr/>
+      </p:sp>
+    </p:spTree>
+  </p:cSld>
+  <p:clrMapOvr>
+    <a:masterClrMapping/>
+  </p:clrMapOvr>
+</p:notes>
+</file>
+
+<file path=ppt/notesSlides/notesSlide10.xml><?xml version="1.0" encoding="utf-8"?>
+<p:notes xmlns:a="http://schemas.openxmlformats.org/drawingml/2006/main" xmlns:p="http://schemas.openxmlformats.org/presentationml/2006/main" xmlns:r="http://schemas.openxmlformats.org/officeDocument/2006/relationships">
+  <p:cSld>
+    <p:spTree>
+      <p:nvGrpSpPr>
+        <p:cNvPr id="1" name=""/>
+        <p:cNvGrpSpPr/>
+        <p:nvPr/>
+      </p:nvGrpSpPr>
+      <p:grpSpPr>
+        <a:xfrm>
+          <a:off x="0" y="0"/>
+          <a:ext cx="0" cy="0"/>
+          <a:chOff x="0" y="0"/>
+          <a:chExt cx="0" cy="0"/>
+        </a:xfrm>
+      </p:grpSpPr>
+      <p:sp>
+        <p:nvSpPr>
+          <p:cNvPr id="2" name="Slide Image Placeholder 1"/>
+          <p:cNvSpPr>
+            <a:spLocks noGrp="1"/>
+          </p:cNvSpPr>
+          <p:nvPr>
+            <p:ph type="sldImg" idx="2"/>
+          </p:nvPr>
+        </p:nvSpPr>
+        <p:spPr/>
+      </p:sp>
+      <p:sp>
+        <p:nvSpPr>
+          <p:cNvPr id="3" name="Notes Placeholder 2"/>
+          <p:cNvSpPr>
+            <a:spLocks noGrp="1"/>
+          </p:cNvSpPr>
+          <p:nvPr>
+            <p:ph type="body" idx="3" sz="quarter"/>
+          </p:nvPr>
+        </p:nvSpPr>
+        <p:spPr/>
+        <p:txBody>
+          <a:bodyPr/>
+          <a:lstStyle/>
+          <a:p>
+            <a:r>
+              <a:t>Tercera perspectiva: Panel de Administrador. Mostramos cómo escala la plataforma. En PLAG-OUT damos de alta una nueva plaga o cultivo en segundos: ingresamos nombre científico, temperatura base Tb, constantes térmicas K y umbrales. Se propaga al instante sin desplegar nueva APK.</a:t>
+            </a:r>
+          </a:p>
+        </p:txBody>
+      </p:sp>
+      <p:sp>
+        <p:nvSpPr>
+          <p:cNvPr id="4" name="Slide Number Placeholder 3"/>
+          <p:cNvSpPr>
+            <a:spLocks noGrp="1"/>
+          </p:cNvSpPr>
+          <p:nvPr>
+            <p:ph type="sldNum" idx="5" sz="quarter"/>
+          </p:nvPr>
+        </p:nvSpPr>
+        <p:spPr/>
+      </p:sp>
+    </p:spTree>
+  </p:cSld>
+  <p:clrMapOvr>
+    <a:masterClrMapping/>
+  </p:clrMapOvr>
+</p:notes>
+</file>
+
+<file path=ppt/notesSlides/notesSlide11.xml><?xml version="1.0" encoding="utf-8"?>
+<p:notes xmlns:a="http://schemas.openxmlformats.org/drawingml/2006/main" xmlns:p="http://schemas.openxmlformats.org/presentationml/2006/main" xmlns:r="http://schemas.openxmlformats.org/officeDocument/2006/relationships">
+  <p:cSld>
+    <p:spTree>
+      <p:nvGrpSpPr>
+        <p:cNvPr id="1" name=""/>
+        <p:cNvGrpSpPr/>
+        <p:nvPr/>
+      </p:nvGrpSpPr>
+      <p:grpSpPr>
+        <a:xfrm>
+          <a:off x="0" y="0"/>
+          <a:ext cx="0" cy="0"/>
+          <a:chOff x="0" y="0"/>
+          <a:chExt cx="0" cy="0"/>
+        </a:xfrm>
+      </p:grpSpPr>
+      <p:sp>
+        <p:nvSpPr>
+          <p:cNvPr id="2" name="Slide Image Placeholder 1"/>
+          <p:cNvSpPr>
+            <a:spLocks noGrp="1"/>
+          </p:cNvSpPr>
+          <p:nvPr>
+            <p:ph type="sldImg" idx="2"/>
+          </p:nvPr>
+        </p:nvSpPr>
+        <p:spPr/>
+      </p:sp>
+      <p:sp>
+        <p:nvSpPr>
+          <p:cNvPr id="3" name="Notes Placeholder 2"/>
+          <p:cNvSpPr>
+            <a:spLocks noGrp="1"/>
+          </p:cNvSpPr>
+          <p:nvPr>
+            <p:ph type="body" idx="3" sz="quarter"/>
+          </p:nvPr>
+        </p:nvSpPr>
+        <p:spPr/>
+        <p:txBody>
+          <a:bodyPr/>
+          <a:lstStyle/>
+          <a:p>
+            <a:r>
+              <a:t>Muy brevemente, la gestión de usuarios desde Admin: listado de usuarios, asignación de roles jerárquicos (productor, agrónomo certificador, admin) y control de cuentas activas o suspendidas. Soporte institucional para cooperativas y pools de siembra.</a:t>
+            </a:r>
+          </a:p>
+        </p:txBody>
+      </p:sp>
+      <p:sp>
+        <p:nvSpPr>
+          <p:cNvPr id="4" name="Slide Number Placeholder 3"/>
+          <p:cNvSpPr>
+            <a:spLocks noGrp="1"/>
+          </p:cNvSpPr>
+          <p:nvPr>
+            <p:ph type="sldNum" idx="5" sz="quarter"/>
+          </p:nvPr>
+        </p:nvSpPr>
+        <p:spPr/>
+      </p:sp>
+    </p:spTree>
+  </p:cSld>
+  <p:clrMapOvr>
+    <a:masterClrMapping/>
+  </p:clrMapOvr>
+</p:notes>
+</file>
+
+<file path=ppt/notesSlides/notesSlide12.xml><?xml version="1.0" encoding="utf-8"?>
+<p:notes xmlns:a="http://schemas.openxmlformats.org/drawingml/2006/main" xmlns:p="http://schemas.openxmlformats.org/presentationml/2006/main" xmlns:r="http://schemas.openxmlformats.org/officeDocument/2006/relationships">
+  <p:cSld>
+    <p:spTree>
+      <p:nvGrpSpPr>
+        <p:cNvPr id="1" name=""/>
+        <p:cNvGrpSpPr/>
+        <p:nvPr/>
+      </p:nvGrpSpPr>
+      <p:grpSpPr>
+        <a:xfrm>
+          <a:off x="0" y="0"/>
+          <a:ext cx="0" cy="0"/>
+          <a:chOff x="0" y="0"/>
+          <a:chExt cx="0" cy="0"/>
+        </a:xfrm>
+      </p:grpSpPr>
+      <p:sp>
+        <p:nvSpPr>
+          <p:cNvPr id="2" name="Slide Image Placeholder 1"/>
+          <p:cNvSpPr>
+            <a:spLocks noGrp="1"/>
+          </p:cNvSpPr>
+          <p:nvPr>
+            <p:ph type="sldImg" idx="2"/>
+          </p:nvPr>
+        </p:nvSpPr>
+        <p:spPr/>
+      </p:sp>
+      <p:sp>
+        <p:nvSpPr>
+          <p:cNvPr id="3" name="Notes Placeholder 2"/>
+          <p:cNvSpPr>
+            <a:spLocks noGrp="1"/>
+          </p:cNvSpPr>
+          <p:nvPr>
+            <p:ph type="body" idx="3" sz="quarter"/>
+          </p:nvPr>
+        </p:nvSpPr>
+        <p:spPr/>
+        <p:txBody>
+          <a:bodyPr/>
+          <a:lstStyle/>
+          <a:p>
+            <a:r>
+              <a:t>Métricas globales de administración: dashboards de analítica regional. Acá la información deja de ser de un lote y se vuelve inteligencia epidemiológica: hectáreas monitoreadas a nivel país, plagas con mayor velocidad de propagación. Vital para cooperativas y entidades técnicas.</a:t>
+            </a:r>
+          </a:p>
+        </p:txBody>
+      </p:sp>
+      <p:sp>
+        <p:nvSpPr>
+          <p:cNvPr id="4" name="Slide Number Placeholder 3"/>
+          <p:cNvSpPr>
+            <a:spLocks noGrp="1"/>
+          </p:cNvSpPr>
+          <p:nvPr>
+            <p:ph type="sldNum" idx="5" sz="quarter"/>
+          </p:nvPr>
+        </p:nvSpPr>
+        <p:spPr/>
+      </p:sp>
+    </p:spTree>
+  </p:cSld>
+  <p:clrMapOvr>
+    <a:masterClrMapping/>
+  </p:clrMapOvr>
+</p:notes>
+</file>
+
+<file path=ppt/notesSlides/notesSlide13.xml><?xml version="1.0" encoding="utf-8"?>
+<p:notes xmlns:a="http://schemas.openxmlformats.org/drawingml/2006/main" xmlns:p="http://schemas.openxmlformats.org/presentationml/2006/main" xmlns:r="http://schemas.openxmlformats.org/officeDocument/2006/relationships">
+  <p:cSld>
+    <p:spTree>
+      <p:nvGrpSpPr>
+        <p:cNvPr id="1" name=""/>
+        <p:cNvGrpSpPr/>
+        <p:nvPr/>
+      </p:nvGrpSpPr>
+      <p:grpSpPr>
+        <a:xfrm>
+          <a:off x="0" y="0"/>
+          <a:ext cx="0" cy="0"/>
+          <a:chOff x="0" y="0"/>
+          <a:chExt cx="0" cy="0"/>
+        </a:xfrm>
+      </p:grpSpPr>
+      <p:sp>
+        <p:nvSpPr>
+          <p:cNvPr id="2" name="Slide Image Placeholder 1"/>
+          <p:cNvSpPr>
+            <a:spLocks noGrp="1"/>
+          </p:cNvSpPr>
+          <p:nvPr>
+            <p:ph type="sldImg" idx="2"/>
+          </p:nvPr>
+        </p:nvSpPr>
+        <p:spPr/>
+      </p:sp>
+      <p:sp>
+        <p:nvSpPr>
+          <p:cNvPr id="3" name="Notes Placeholder 2"/>
+          <p:cNvSpPr>
+            <a:spLocks noGrp="1"/>
+          </p:cNvSpPr>
+          <p:nvPr>
+            <p:ph type="body" idx="3" sz="quarter"/>
+          </p:nvPr>
+        </p:nvSpPr>
+        <p:spPr/>
+        <p:txBody>
+          <a:bodyPr/>
+          <a:lstStyle/>
+          <a:p>
+            <a:r>
+              <a:t>Estrategia multiplataforma: Mobile vs Web. Mobile en Android nativo con Kotlin es la herramienta de batalla en la camioneta: botones grandes, GPS, cámara y 100% offline con Room. Web Desktop es la herramienta de oficina para auditoría y exportación de reportes BPA.</a:t>
+            </a:r>
+          </a:p>
+        </p:txBody>
+      </p:sp>
+      <p:sp>
+        <p:nvSpPr>
+          <p:cNvPr id="4" name="Slide Number Placeholder 3"/>
+          <p:cNvSpPr>
+            <a:spLocks noGrp="1"/>
+          </p:cNvSpPr>
+          <p:nvPr>
+            <p:ph type="sldNum" idx="5" sz="quarter"/>
+          </p:nvPr>
+        </p:nvSpPr>
+        <p:spPr/>
+      </p:sp>
+    </p:spTree>
+  </p:cSld>
+  <p:clrMapOvr>
+    <a:masterClrMapping/>
+  </p:clrMapOvr>
+</p:notes>
+</file>
+
+<file path=ppt/notesSlides/notesSlide14.xml><?xml version="1.0" encoding="utf-8"?>
+<p:notes xmlns:a="http://schemas.openxmlformats.org/drawingml/2006/main" xmlns:p="http://schemas.openxmlformats.org/presentationml/2006/main" xmlns:r="http://schemas.openxmlformats.org/officeDocument/2006/relationships">
+  <p:cSld>
+    <p:spTree>
+      <p:nvGrpSpPr>
+        <p:cNvPr id="1" name=""/>
+        <p:cNvGrpSpPr/>
+        <p:nvPr/>
+      </p:nvGrpSpPr>
+      <p:grpSpPr>
+        <a:xfrm>
+          <a:off x="0" y="0"/>
+          <a:ext cx="0" cy="0"/>
+          <a:chOff x="0" y="0"/>
+          <a:chExt cx="0" cy="0"/>
+        </a:xfrm>
+      </p:grpSpPr>
+      <p:sp>
+        <p:nvSpPr>
+          <p:cNvPr id="2" name="Slide Image Placeholder 1"/>
+          <p:cNvSpPr>
+            <a:spLocks noGrp="1"/>
+          </p:cNvSpPr>
+          <p:nvPr>
+            <p:ph type="sldImg" idx="2"/>
+          </p:nvPr>
+        </p:nvSpPr>
+        <p:spPr/>
+      </p:sp>
+      <p:sp>
+        <p:nvSpPr>
+          <p:cNvPr id="3" name="Notes Placeholder 2"/>
+          <p:cNvSpPr>
+            <a:spLocks noGrp="1"/>
+          </p:cNvSpPr>
+          <p:nvPr>
+            <p:ph type="body" idx="3" sz="quarter"/>
+          </p:nvPr>
+        </p:nvSpPr>
+        <p:spPr/>
+        <p:txBody>
+          <a:bodyPr/>
+          <a:lstStyle/>
+          <a:p>
+            <a:r>
+              <a:t>Para cerrar: PLAG-OUT anticipa donde otros solo reaccionan post-daño. Ahorra 25% en costos químicos, da 7 a 14 días de anticipación y digitaliza el campo con ciencia argentina. Muchísimas gracias y el equipo queda a completa disposición de la mesa evaluadora para responder las preguntas.</a:t>
+            </a:r>
+          </a:p>
+        </p:txBody>
+      </p:sp>
+      <p:sp>
+        <p:nvSpPr>
+          <p:cNvPr id="4" name="Slide Number Placeholder 3"/>
+          <p:cNvSpPr>
+            <a:spLocks noGrp="1"/>
+          </p:cNvSpPr>
+          <p:nvPr>
+            <p:ph type="sldNum" idx="5" sz="quarter"/>
+          </p:nvPr>
+        </p:nvSpPr>
+        <p:spPr/>
+      </p:sp>
+    </p:spTree>
+  </p:cSld>
+  <p:clrMapOvr>
+    <a:masterClrMapping/>
+  </p:clrMapOvr>
+</p:notes>
+</file>
+
+<file path=ppt/notesSlides/notesSlide15.xml><?xml version="1.0" encoding="utf-8"?>
+<p:notes xmlns:a="http://schemas.openxmlformats.org/drawingml/2006/main" xmlns:p="http://schemas.openxmlformats.org/presentationml/2006/main" xmlns:r="http://schemas.openxmlformats.org/officeDocument/2006/relationships">
+  <p:cSld>
+    <p:spTree>
+      <p:nvGrpSpPr>
+        <p:cNvPr id="1" name=""/>
+        <p:cNvGrpSpPr/>
+        <p:nvPr/>
+      </p:nvGrpSpPr>
+      <p:grpSpPr>
+        <a:xfrm>
+          <a:off x="0" y="0"/>
+          <a:ext cx="0" cy="0"/>
+          <a:chOff x="0" y="0"/>
+          <a:chExt cx="0" cy="0"/>
+        </a:xfrm>
+      </p:grpSpPr>
+      <p:sp>
+        <p:nvSpPr>
+          <p:cNvPr id="2" name="Slide Image Placeholder 1"/>
+          <p:cNvSpPr>
+            <a:spLocks noGrp="1"/>
+          </p:cNvSpPr>
+          <p:nvPr>
+            <p:ph type="sldImg" idx="2"/>
+          </p:nvPr>
+        </p:nvSpPr>
+        <p:spPr/>
+      </p:sp>
+      <p:sp>
+        <p:nvSpPr>
+          <p:cNvPr id="3" name="Notes Placeholder 2"/>
+          <p:cNvSpPr>
+            <a:spLocks noGrp="1"/>
+          </p:cNvSpPr>
+          <p:nvPr>
+            <p:ph type="body" idx="3" sz="quarter"/>
+          </p:nvPr>
+        </p:nvSpPr>
+        <p:spPr/>
+        <p:txBody>
+          <a:bodyPr/>
+          <a:lstStyle/>
+          <a:p>
+            <a:r>
+              <a:t>Los insectos son ectotérmicos: no regulan su temperatura. La fórmula implementada es el promedio simple con corte. Tb es la temperatura base bajo la cual el desarrollo se detiene; Tcorte es el umbral superior donde se estabiliza. Todos los valores están calibrados con ensayos del INTA.</a:t>
+            </a:r>
+          </a:p>
+        </p:txBody>
+      </p:sp>
+      <p:sp>
+        <p:nvSpPr>
+          <p:cNvPr id="4" name="Slide Number Placeholder 3"/>
+          <p:cNvSpPr>
+            <a:spLocks noGrp="1"/>
+          </p:cNvSpPr>
+          <p:nvPr>
+            <p:ph type="sldNum" idx="5" sz="quarter"/>
+          </p:nvPr>
+        </p:nvSpPr>
+        <p:spPr/>
+      </p:sp>
+    </p:spTree>
+  </p:cSld>
+  <p:clrMapOvr>
+    <a:masterClrMapping/>
+  </p:clrMapOvr>
+</p:notes>
+</file>
+
+<file path=ppt/notesSlides/notesSlide16.xml><?xml version="1.0" encoding="utf-8"?>
+<p:notes xmlns:a="http://schemas.openxmlformats.org/drawingml/2006/main" xmlns:p="http://schemas.openxmlformats.org/presentationml/2006/main" xmlns:r="http://schemas.openxmlformats.org/officeDocument/2006/relationships">
+  <p:cSld>
+    <p:spTree>
+      <p:nvGrpSpPr>
+        <p:cNvPr id="1" name=""/>
+        <p:cNvGrpSpPr/>
+        <p:nvPr/>
+      </p:nvGrpSpPr>
+      <p:grpSpPr>
+        <a:xfrm>
+          <a:off x="0" y="0"/>
+          <a:ext cx="0" cy="0"/>
+          <a:chOff x="0" y="0"/>
+          <a:chExt cx="0" cy="0"/>
+        </a:xfrm>
+      </p:grpSpPr>
+      <p:sp>
+        <p:nvSpPr>
+          <p:cNvPr id="2" name="Slide Image Placeholder 1"/>
+          <p:cNvSpPr>
+            <a:spLocks noGrp="1"/>
+          </p:cNvSpPr>
+          <p:nvPr>
+            <p:ph type="sldImg" idx="2"/>
+          </p:nvPr>
+        </p:nvSpPr>
+        <p:spPr/>
+      </p:sp>
+      <p:sp>
+        <p:nvSpPr>
+          <p:cNvPr id="3" name="Notes Placeholder 2"/>
+          <p:cNvSpPr>
+            <a:spLocks noGrp="1"/>
+          </p:cNvSpPr>
+          <p:nvPr>
+            <p:ph type="body" idx="3" sz="quarter"/>
+          </p:nvPr>
+        </p:nvSpPr>
+        <p:spPr/>
+        <p:txBody>
+          <a:bodyPr/>
+          <a:lstStyle/>
+          <a:p>
+            <a:r>
+              <a:t>¿Por qué la ventana es tan estrecha? Por la cutícula del insecto. En huevo, el corion es impermeable a insecticidas de contacto: eficacia 10-20%. En L1 a L3 la cutícula es permeable: 90% de mortandad con dosis bajas. En L4 a L6 la oruga se esclerotiza y la eficacia cae al 20%.</a:t>
+            </a:r>
+          </a:p>
+        </p:txBody>
+      </p:sp>
+      <p:sp>
+        <p:nvSpPr>
+          <p:cNvPr id="4" name="Slide Number Placeholder 3"/>
+          <p:cNvSpPr>
+            <a:spLocks noGrp="1"/>
+          </p:cNvSpPr>
+          <p:nvPr>
+            <p:ph type="sldNum" idx="5" sz="quarter"/>
+          </p:nvPr>
+        </p:nvSpPr>
+        <p:spPr/>
+      </p:sp>
+    </p:spTree>
+  </p:cSld>
+  <p:clrMapOvr>
+    <a:masterClrMapping/>
+  </p:clrMapOvr>
+</p:notes>
+</file>
+
+<file path=ppt/notesSlides/notesSlide17.xml><?xml version="1.0" encoding="utf-8"?>
+<p:notes xmlns:a="http://schemas.openxmlformats.org/drawingml/2006/main" xmlns:p="http://schemas.openxmlformats.org/presentationml/2006/main" xmlns:r="http://schemas.openxmlformats.org/officeDocument/2006/relationships">
+  <p:cSld>
+    <p:spTree>
+      <p:nvGrpSpPr>
+        <p:cNvPr id="1" name=""/>
+        <p:cNvGrpSpPr/>
+        <p:nvPr/>
+      </p:nvGrpSpPr>
+      <p:grpSpPr>
+        <a:xfrm>
+          <a:off x="0" y="0"/>
+          <a:ext cx="0" cy="0"/>
+          <a:chOff x="0" y="0"/>
+          <a:chExt cx="0" cy="0"/>
+        </a:xfrm>
+      </p:grpSpPr>
+      <p:sp>
+        <p:nvSpPr>
+          <p:cNvPr id="2" name="Slide Image Placeholder 1"/>
+          <p:cNvSpPr>
+            <a:spLocks noGrp="1"/>
+          </p:cNvSpPr>
+          <p:nvPr>
+            <p:ph type="sldImg" idx="2"/>
+          </p:nvPr>
+        </p:nvSpPr>
+        <p:spPr/>
+      </p:sp>
+      <p:sp>
+        <p:nvSpPr>
+          <p:cNvPr id="3" name="Notes Placeholder 2"/>
+          <p:cNvSpPr>
+            <a:spLocks noGrp="1"/>
+          </p:cNvSpPr>
+          <p:nvPr>
+            <p:ph type="body" idx="3" sz="quarter"/>
+          </p:nvPr>
+        </p:nvSpPr>
+        <p:spPr/>
+        <p:txBody>
+          <a:bodyPr/>
+          <a:lstStyle/>
+          <a:p>
+            <a:r>
+              <a:t>Arquitectura técnica: Clean Architecture y MVVM en Kotlin con Jetpack Compose. Para tolerar la falta de conectividad usamos Room SQLite con WorkManager y reintentos exponenciales. En backend, FastAPI con PostgreSQL y PostGIS ST_DWithin con índices R-Tree.</a:t>
+            </a:r>
+          </a:p>
+        </p:txBody>
+      </p:sp>
+      <p:sp>
+        <p:nvSpPr>
+          <p:cNvPr id="4" name="Slide Number Placeholder 3"/>
+          <p:cNvSpPr>
+            <a:spLocks noGrp="1"/>
+          </p:cNvSpPr>
+          <p:nvPr>
+            <p:ph type="sldNum" idx="5" sz="quarter"/>
+          </p:nvPr>
+        </p:nvSpPr>
+        <p:spPr/>
+      </p:sp>
+    </p:spTree>
+  </p:cSld>
+  <p:clrMapOvr>
+    <a:masterClrMapping/>
+  </p:clrMapOvr>
+</p:notes>
+</file>
+
+<file path=ppt/notesSlides/notesSlide18.xml><?xml version="1.0" encoding="utf-8"?>
+<p:notes xmlns:a="http://schemas.openxmlformats.org/drawingml/2006/main" xmlns:p="http://schemas.openxmlformats.org/presentationml/2006/main" xmlns:r="http://schemas.openxmlformats.org/officeDocument/2006/relationships">
+  <p:cSld>
+    <p:spTree>
+      <p:nvGrpSpPr>
+        <p:cNvPr id="1" name=""/>
+        <p:cNvGrpSpPr/>
+        <p:nvPr/>
+      </p:nvGrpSpPr>
+      <p:grpSpPr>
+        <a:xfrm>
+          <a:off x="0" y="0"/>
+          <a:ext cx="0" cy="0"/>
+          <a:chOff x="0" y="0"/>
+          <a:chExt cx="0" cy="0"/>
+        </a:xfrm>
+      </p:grpSpPr>
+      <p:sp>
+        <p:nvSpPr>
+          <p:cNvPr id="2" name="Slide Image Placeholder 1"/>
+          <p:cNvSpPr>
+            <a:spLocks noGrp="1"/>
+          </p:cNvSpPr>
+          <p:nvPr>
+            <p:ph type="sldImg" idx="2"/>
+          </p:nvPr>
+        </p:nvSpPr>
+        <p:spPr/>
+      </p:sp>
+      <p:sp>
+        <p:nvSpPr>
+          <p:cNvPr id="3" name="Notes Placeholder 2"/>
+          <p:cNvSpPr>
+            <a:spLocks noGrp="1"/>
+          </p:cNvSpPr>
+          <p:nvPr>
+            <p:ph type="body" idx="3" sz="quarter"/>
+          </p:nvPr>
+        </p:nvSpPr>
+        <p:spPr/>
+        <p:txBody>
+          <a:bodyPr/>
+          <a:lstStyle/>
+          <a:p>
+            <a:r>
+              <a:t>¿Cómo funciona el modelo de ML para el Biofix? Toma como features series térmicas de 60 días, anomalías de mínimas invernales, precipitaciones y fotoperíodo. Usamos un modelo XGBoost entrenado con datos históricos del INTA, con AUC-ROC &gt; 0.88 y aprendizaje activo.</a:t>
+            </a:r>
+          </a:p>
+        </p:txBody>
+      </p:sp>
+      <p:sp>
+        <p:nvSpPr>
+          <p:cNvPr id="4" name="Slide Number Placeholder 3"/>
+          <p:cNvSpPr>
+            <a:spLocks noGrp="1"/>
+          </p:cNvSpPr>
+          <p:nvPr>
+            <p:ph type="sldNum" idx="5" sz="quarter"/>
+          </p:nvPr>
+        </p:nvSpPr>
+        <p:spPr/>
+      </p:sp>
+    </p:spTree>
+  </p:cSld>
+  <p:clrMapOvr>
+    <a:masterClrMapping/>
+  </p:clrMapOvr>
+</p:notes>
+</file>
+
+<file path=ppt/notesSlides/notesSlide19.xml><?xml version="1.0" encoding="utf-8"?>
+<p:notes xmlns:a="http://schemas.openxmlformats.org/drawingml/2006/main" xmlns:p="http://schemas.openxmlformats.org/presentationml/2006/main" xmlns:r="http://schemas.openxmlformats.org/officeDocument/2006/relationships">
+  <p:cSld>
+    <p:spTree>
+      <p:nvGrpSpPr>
+        <p:cNvPr id="1" name=""/>
+        <p:cNvGrpSpPr/>
+        <p:nvPr/>
+      </p:nvGrpSpPr>
+      <p:grpSpPr>
+        <a:xfrm>
+          <a:off x="0" y="0"/>
+          <a:ext cx="0" cy="0"/>
+          <a:chOff x="0" y="0"/>
+          <a:chExt cx="0" cy="0"/>
+        </a:xfrm>
+      </p:grpSpPr>
+      <p:sp>
+        <p:nvSpPr>
+          <p:cNvPr id="2" name="Slide Image Placeholder 1"/>
+          <p:cNvSpPr>
+            <a:spLocks noGrp="1"/>
+          </p:cNvSpPr>
+          <p:nvPr>
+            <p:ph type="sldImg" idx="2"/>
+          </p:nvPr>
+        </p:nvSpPr>
+        <p:spPr/>
+      </p:sp>
+      <p:sp>
+        <p:nvSpPr>
+          <p:cNvPr id="3" name="Notes Placeholder 2"/>
+          <p:cNvSpPr>
+            <a:spLocks noGrp="1"/>
+          </p:cNvSpPr>
+          <p:nvPr>
+            <p:ph type="body" idx="3" sz="quarter"/>
+          </p:nvPr>
+        </p:nvSpPr>
+        <p:spPr/>
+        <p:txBody>
+          <a:bodyPr/>
+          <a:lstStyle/>
+          <a:p>
+            <a:r>
+              <a:t>¿Cómo escala el recálculo diario si hay miles de lotes? A las 03:00 AM un scheduler batch en el backend ejecuta consultas concurrentes asíncronas con httpx. Agrupa coordenadas para no repetir peticiones a Open-Meteo y SMN. Computa GDD y despacha notificaciones FCM.</a:t>
             </a:r>
           </a:p>
         </p:txBody>
@@ -580,7 +1291,77 @@
           <a:lstStyle/>
           <a:p>
             <a:r>
-              <a:t>En 'Mis Terrenos' el productor digitaliza sus campos. Noten las 114 ha administradas entre Buenos Aires y Jujuy. Cada lote tiene coordenadas GPS exactas porque el insecto no vive en un promedio: necesita la temperatura real del potrero. La etiqueta '1 esperando biofix' avisa qué potrero necesita marcar el punto cero. Todo funciona offline sin depender de señal 4G gracias a la persistencia con Room SQLite.</a:t>
+              <a:t>Arrancamos creando una cuenta de cero. Registro rápido pensado para el campo. Ni bien ingresa, el usuario dispone de dos niveles de asistencia: la Guía Rápida de cinco pasos para quien está arriba de la camioneta, y la Guía Completa desde Ajustes para profundizar en GDD y Biofix.</a:t>
+            </a:r>
+          </a:p>
+        </p:txBody>
+      </p:sp>
+      <p:sp>
+        <p:nvSpPr>
+          <p:cNvPr id="4" name="Slide Number Placeholder 3"/>
+          <p:cNvSpPr>
+            <a:spLocks noGrp="1"/>
+          </p:cNvSpPr>
+          <p:nvPr>
+            <p:ph type="sldNum" idx="5" sz="quarter"/>
+          </p:nvPr>
+        </p:nvSpPr>
+        <p:spPr/>
+      </p:sp>
+    </p:spTree>
+  </p:cSld>
+  <p:clrMapOvr>
+    <a:masterClrMapping/>
+  </p:clrMapOvr>
+</p:notes>
+</file>
+
+<file path=ppt/notesSlides/notesSlide20.xml><?xml version="1.0" encoding="utf-8"?>
+<p:notes xmlns:a="http://schemas.openxmlformats.org/drawingml/2006/main" xmlns:p="http://schemas.openxmlformats.org/presentationml/2006/main" xmlns:r="http://schemas.openxmlformats.org/officeDocument/2006/relationships">
+  <p:cSld>
+    <p:spTree>
+      <p:nvGrpSpPr>
+        <p:cNvPr id="1" name=""/>
+        <p:cNvGrpSpPr/>
+        <p:nvPr/>
+      </p:nvGrpSpPr>
+      <p:grpSpPr>
+        <a:xfrm>
+          <a:off x="0" y="0"/>
+          <a:ext cx="0" cy="0"/>
+          <a:chOff x="0" y="0"/>
+          <a:chExt cx="0" cy="0"/>
+        </a:xfrm>
+      </p:grpSpPr>
+      <p:sp>
+        <p:nvSpPr>
+          <p:cNvPr id="2" name="Slide Image Placeholder 1"/>
+          <p:cNvSpPr>
+            <a:spLocks noGrp="1"/>
+          </p:cNvSpPr>
+          <p:nvPr>
+            <p:ph type="sldImg" idx="2"/>
+          </p:nvPr>
+        </p:nvSpPr>
+        <p:spPr/>
+      </p:sp>
+      <p:sp>
+        <p:nvSpPr>
+          <p:cNvPr id="3" name="Notes Placeholder 2"/>
+          <p:cNvSpPr>
+            <a:spLocks noGrp="1"/>
+          </p:cNvSpPr>
+          <p:nvPr>
+            <p:ph type="body" idx="3" sz="quarter"/>
+          </p:nvPr>
+        </p:nvSpPr>
+        <p:spPr/>
+        <p:txBody>
+          <a:bodyPr/>
+          <a:lstStyle/>
+          <a:p>
+            <a:r>
+              <a:t>La privacidad en el agro es sagrada: nadie quiere que la competencia sepa qué plaga tiene en su campo. Cumplimos con la Ley 25.326. Implementamos un buffer espacial difuso: la coordenada exacta queda en la cuenta privada del usuario; a la red solo va un punto desplazado.</a:t>
             </a:r>
           </a:p>
         </p:txBody>
@@ -650,7 +1431,7 @@
           <a:lstStyle/>
           <a:p>
             <a:r>
-              <a:t>En 'Mis Monitoreos' seguimos la soja bajo ataque de Oruga de las leguminosas. Fijamos el Biofix como punto cero y el motor suma Grados Día automáticamente con la temperatura local. No contamos días de almanaque: medimos el desarrollo fisiológico real de la larva con modelos validados por el INTA. Al cruzar los 420 GDD, el sistema dispara la alerta para actuar a tiempo.</a:t>
+              <a:t>Configuramos los activos productivos: creamos un Terreno con delimitación GPS y hectáreas. ¿Por qué el GPS exacto? Porque nos conectamos con la estación meteorológica local. Asociamos la Soja con su fecha de siembra y el Monitoreo de Oruga. El ciclo nace 'Esperando Biofix' y todo funciona Offline-First con Room.</a:t>
             </a:r>
           </a:p>
         </p:txBody>
@@ -720,7 +1501,7 @@
           <a:lstStyle/>
           <a:p>
             <a:r>
-              <a:t>Las plagas no respetan alambrados. En Reportes creamos una Defensa en Anillo de 20 km: la app avisa que a 8.3 km hay un foco de Chinche de la alfalfa. Sin salir al lote, el productor ya sabe qué potrero priorizar en su recorrida semanal. Los reportes son colaborativos y anónimos, protegiendo la identidad del establecimiento.</a:t>
+              <a:t>Momento clave: el agrónomo camina el lote y genera un reporte. Pero acá interviene nuestro modelo de Machine Learning: analiza 60 días de clima y predice la ventana de biofix con hasta 14 días de anticipación. El usuario valida en el lote, arranca el conteo térmico y se dispara la alerta comunitaria.</a:t>
             </a:r>
           </a:p>
         </p:txBody>
@@ -790,7 +1571,7 @@
           <a:lstStyle/>
           <a:p>
             <a:r>
-              <a:t>El mapa interactivo georreferencia los focos. Vemos un cluster rojo de 11 reportes activos y la posición de nuestros lotes. Esto permite a agrónomos que recorren miles de hectáreas planificar rutas y anticipar corredores biológicos antes de que afecten el campo.</a:t>
+              <a:t>Cambiamos a la segunda cuenta: un productor vecino en la misma región. En este instante su celular recibe una notificación push: 'Alerta Comunitaria: Plaga reportada a 8.3 km'. Esto es la Defensa en Anillo de 20 km. Y respetamos estrictamente la Ley 25.326: el reporte es 100% anónimo.</a:t>
             </a:r>
           </a:p>
         </p:txBody>
@@ -860,7 +1641,7 @@
           <a:lstStyle/>
           <a:p>
             <a:r>
-              <a:t>En los Tableros de Control pasamos a la gestión gerencial. El semáforo muestra 58 ha bajo seguimiento y la Prioridad de Acción ordena visitar primero la soja de 87 días con oruga moderada, ahorrando horas de planificación operativa.</a:t>
+              <a:t>Entramos al detalle de monitoreo: acá vemos los Grados Día de Desarrollo. La plaga es ectotérmica; para Anticarsia la temperatura base es 10°C según el INTA. La app acumula calor. Y con el Job Diario a las 03:00 AM el backend actualiza todo y notifica si se cruzó el umbral.</a:t>
             </a:r>
           </a:p>
         </p:txBody>
@@ -930,7 +1711,7 @@
           <a:lstStyle/>
           <a:p>
             <a:r>
-              <a:t>Esta solapa responde cuándo aplicar. Miren la curva de eficacia: pulverizar temprano tiene solo 10% de eficacia; tarde es tratar larvas gigantes. La app muestra el cartel 'INCUBACIÓN: No pulverizar aún'. Ese aviso evita gastar miles de dólares por lote y avisa con precisión cuándo entra en la ventana óptima L1-L3 con 90% de eficacia.</a:t>
+              <a:t>Pasamos al Mapa Georreferenciado sobre OpenStreetMap. Vemos clusters espaciales: un foco rojo con 11 reportes activos en zona núcleo y la casa que marca nuestro lote. Podemos pasar de la vista de puntos al mapa de densidad para entender el vector de avance de la plaga.</a:t>
             </a:r>
           </a:p>
         </p:txBody>
@@ -1000,7 +1781,7 @@
           <a:lstStyle/>
           <a:p>
             <a:r>
-              <a:t>La solapa Campañas consolida la historia: detecta que en 2026/27 la plaga predominante fue Anticarsia con 50% de incidencia. Esto le da al gerente agronómico datos objetivos para rotar modos de acción y comprar insumos anticipados con descuento.</a:t>
+              <a:t>Llegamos a los Tableros de Control. En Lotes, semáforo donut y ranking con días de siembra. En Control, la Curva de Eficacia: pulverizar en huevo tiene 10-20% de eficacia, en ventana útil L1-L3 tiene 90%. El cartel 'INCUBACIÓN - No pulverizar aún' ahorra 25 USD/ha. Y en Campañas, rotación IRAC.</a:t>
             </a:r>
           </a:p>
         </p:txBody>
@@ -1070,7 +1851,7 @@
           <a:lstStyle/>
           <a:p>
             <a:r>
-              <a:t>Para cerrar: PLAG-OUT anticipa donde otros solo reaccionan post-daño. Ahorra un 25% en aplicaciones, brinda 7 a 14 días de anticipación y digitaliza el campo con ciencia argentina. Muchas gracias y el equipo queda a completa disposición para responder las preguntas de la mesa evaluadora.</a:t>
+              <a:t>En Perfil y Ajustes gestionamos notificaciones nativas con FCM, permisos de ubicación GPS y el switch de Consentimiento ML. El productor decide con total transparencia si sus reportes anónimos pueden usarse para reentrenar modelos. Soberanía total del dato.</a:t>
             </a:r>
           </a:p>
         </p:txBody>
@@ -4127,8 +4908,8 @@
         </p:nvSpPr>
         <p:spPr>
           <a:xfrm>
-            <a:off x="914400" y="731520"/>
-            <a:ext cx="10362895" cy="1828800"/>
+            <a:off x="914400" y="914400"/>
+            <a:ext cx="10362895" cy="2011680"/>
           </a:xfrm>
           <a:prstGeom prst="rect">
             <a:avLst/>
@@ -4154,24 +4935,28 @@
           </a:p>
           <a:p>
             <a:pPr algn="ctr">
-              <a:defRPr sz="2200" b="1">
+              <a:defRPr sz="2000" b="1">
                 <a:solidFill>
                   <a:srgbClr val="F3F8F5"/>
                 </a:solidFill>
               </a:defRPr>
             </a:pPr>
             <a:r>
-              <a:t>Monitoreo inteligente de plagas para el campo argentino</a:t>
+              <a:t>Monitoreo inteligente de plagas sincronizando biología, clima y comunidad</a:t>
             </a:r>
           </a:p>
           <a:p>
             <a:pPr algn="ctr">
-              <a:defRPr sz="1400">
+              <a:defRPr sz="1300">
                 <a:solidFill>
                   <a:srgbClr val="9EBAAB"/>
                 </a:solidFill>
               </a:defRPr>
             </a:pPr>
+            <a:r>
+              <a:t>"La inteligencia artificial acota el riesgo; el campo confirma."</a:t>
+            </a:r>
+            <a:br/>
             <a:r>
               <a:t>Trabajo Final de Grado • UTN FRBA 2026 | Demo Oficial (20 Minutos)</a:t>
             </a:r>
@@ -4186,8 +4971,8 @@
         </p:nvSpPr>
         <p:spPr>
           <a:xfrm>
-            <a:off x="1097280" y="2743200"/>
-            <a:ext cx="4754880" cy="2560320"/>
+            <a:off x="914400" y="3291840"/>
+            <a:ext cx="3291840" cy="2286000"/>
           </a:xfrm>
           <a:prstGeom prst="roundRect">
             <a:avLst/>
@@ -4195,9 +4980,9 @@
           <a:solidFill>
             <a:srgbClr val="14261D"/>
           </a:solidFill>
-          <a:ln w="25400">
+          <a:ln>
             <a:solidFill>
-              <a:srgbClr val="E85D5D"/>
+              <a:srgbClr val="284636"/>
             </a:solidFill>
           </a:ln>
         </p:spPr>
@@ -4220,30 +5005,30 @@
           <a:lstStyle/>
           <a:p>
             <a:pPr algn="ctr">
-              <a:defRPr sz="1200" b="1">
+              <a:defRPr sz="2800" b="1">
                 <a:solidFill>
                   <a:srgbClr val="E85D5D"/>
                 </a:solidFill>
               </a:defRPr>
             </a:pPr>
             <a:r>
-              <a:t>⚠️ EL DOLOR DEL SECTOR: LLEGAR TARDE</a:t>
-            </a:r>
-          </a:p>
-          <a:p>
-            <a:pPr>
-              <a:defRPr sz="2800" b="1">
-                <a:solidFill>
-                  <a:srgbClr val="F2B23E"/>
-                </a:solidFill>
-              </a:defRPr>
-            </a:pPr>
-            <a:r>
-              <a:t>-USD 2.000.000.000</a:t>
-            </a:r>
-          </a:p>
-          <a:p>
-            <a:pPr>
+              <a:t>-USD 2.000M</a:t>
+            </a:r>
+          </a:p>
+          <a:p>
+            <a:pPr algn="ctr">
+              <a:defRPr sz="1400" b="1">
+                <a:solidFill>
+                  <a:srgbClr val="F3F8F5"/>
+                </a:solidFill>
+              </a:defRPr>
+            </a:pPr>
+            <a:r>
+              <a:t>Pérdidas Maíz</a:t>
+            </a:r>
+          </a:p>
+          <a:p>
+            <a:pPr algn="ctr">
               <a:defRPr sz="1100">
                 <a:solidFill>
                   <a:srgbClr val="9EBAAB"/>
@@ -4251,15 +5036,7 @@
               </a:defRPr>
             </a:pPr>
             <a:r>
-              <a:t>• En la campaña 23/24, la producción de maíz cayó de 59 a 47,5 M de toneladas por Chicharrita (Dalbulus maidis).</a:t>
-            </a:r>
-            <a:br/>
-            <a:r>
-              <a:t>• Pérdidas anuales en Argentina superan los USD 2.500M.</a:t>
-            </a:r>
-            <a:br/>
-            <a:r>
-              <a:t>• El monitoreo en papel detecta la plaga cuando el daño ya ocurrió y pulverizar cuesta el doble.</a:t>
+              <a:t>Impacto devastador por Dalbulus maidis en la última campaña.</a:t>
             </a:r>
           </a:p>
         </p:txBody>
@@ -4272,8 +5049,8 @@
         </p:nvSpPr>
         <p:spPr>
           <a:xfrm>
-            <a:off x="6309360" y="2743200"/>
-            <a:ext cx="4754880" cy="2560320"/>
+            <a:off x="4480560" y="3291840"/>
+            <a:ext cx="3291840" cy="2286000"/>
           </a:xfrm>
           <a:prstGeom prst="roundRect">
             <a:avLst/>
@@ -4281,9 +5058,9 @@
           <a:solidFill>
             <a:srgbClr val="14261D"/>
           </a:solidFill>
-          <a:ln w="25400">
+          <a:ln>
             <a:solidFill>
-              <a:srgbClr val="5CE698"/>
+              <a:srgbClr val="284636"/>
             </a:solidFill>
           </a:ln>
         </p:spPr>
@@ -4306,30 +5083,108 @@
           <a:lstStyle/>
           <a:p>
             <a:pPr algn="ctr">
-              <a:defRPr sz="1200" b="1">
+              <a:defRPr sz="2800" b="1">
+                <a:solidFill>
+                  <a:srgbClr val="F2B23E"/>
+                </a:solidFill>
+              </a:defRPr>
+            </a:pPr>
+            <a:r>
+              <a:t>El Problema</a:t>
+            </a:r>
+          </a:p>
+          <a:p>
+            <a:pPr algn="ctr">
+              <a:defRPr sz="1400" b="1">
+                <a:solidFill>
+                  <a:srgbClr val="F3F8F5"/>
+                </a:solidFill>
+              </a:defRPr>
+            </a:pPr>
+            <a:r>
+              <a:t>Llegar Tarde</a:t>
+            </a:r>
+          </a:p>
+          <a:p>
+            <a:pPr algn="ctr">
+              <a:defRPr sz="1100">
+                <a:solidFill>
+                  <a:srgbClr val="9EBAAB"/>
+                </a:solidFill>
+              </a:defRPr>
+            </a:pPr>
+            <a:r>
+              <a:t>Monitoreo reactivo: cuando la hoja está comida, pulverizar rinde 10-20%.</a:t>
+            </a:r>
+          </a:p>
+        </p:txBody>
+      </p:sp>
+      <p:sp>
+        <p:nvSpPr>
+          <p:cNvPr id="6" name="Rounded Rectangle 5"/>
+          <p:cNvSpPr/>
+          <p:nvPr/>
+        </p:nvSpPr>
+        <p:spPr>
+          <a:xfrm>
+            <a:off x="8046720" y="3291840"/>
+            <a:ext cx="3291840" cy="2286000"/>
+          </a:xfrm>
+          <a:prstGeom prst="roundRect">
+            <a:avLst/>
+          </a:prstGeom>
+          <a:solidFill>
+            <a:srgbClr val="14261D"/>
+          </a:solidFill>
+          <a:ln>
+            <a:solidFill>
+              <a:srgbClr val="284636"/>
+            </a:solidFill>
+          </a:ln>
+        </p:spPr>
+        <p:style>
+          <a:lnRef idx="1">
+            <a:schemeClr val="accent1"/>
+          </a:lnRef>
+          <a:fillRef idx="3">
+            <a:schemeClr val="accent1"/>
+          </a:fillRef>
+          <a:effectRef idx="2">
+            <a:schemeClr val="accent1"/>
+          </a:effectRef>
+          <a:fontRef idx="minor">
+            <a:schemeClr val="lt1"/>
+          </a:fontRef>
+        </p:style>
+        <p:txBody>
+          <a:bodyPr rtlCol="0" anchor="ctr" wrap="square"/>
+          <a:lstStyle/>
+          <a:p>
+            <a:pPr algn="ctr">
+              <a:defRPr sz="2800" b="1">
                 <a:solidFill>
                   <a:srgbClr val="5CE698"/>
                 </a:solidFill>
               </a:defRPr>
             </a:pPr>
             <a:r>
-              <a:t>💡 LA SOLUCIÓN: COPILOTO FENOLÓGICO</a:t>
-            </a:r>
-          </a:p>
-          <a:p>
-            <a:pPr>
-              <a:defRPr sz="2400" b="1">
+              <a:t>La Solución</a:t>
+            </a:r>
+          </a:p>
+          <a:p>
+            <a:pPr algn="ctr">
+              <a:defRPr sz="1400" b="1">
                 <a:solidFill>
                   <a:srgbClr val="F3F8F5"/>
                 </a:solidFill>
               </a:defRPr>
             </a:pPr>
             <a:r>
-              <a:t>Anticipación Científica</a:t>
-            </a:r>
-          </a:p>
-          <a:p>
-            <a:pPr>
+              <a:t>Anticipación</a:t>
+            </a:r>
+          </a:p>
+          <a:p>
+            <a:pPr algn="ctr">
               <a:defRPr sz="1100">
                 <a:solidFill>
                   <a:srgbClr val="9EBAAB"/>
@@ -4337,34 +5192,190 @@
               </a:defRPr>
             </a:pPr>
             <a:r>
-              <a:t>• Reloj Térmico (GDD): Sincronización bioclimática con temperaturas reales locales.</a:t>
-            </a:r>
-            <a:br/>
-            <a:r>
-              <a:t>• Red Comunitaria: Alerta temprana colaborativa en un radio de 20 km.</a:t>
-            </a:r>
-            <a:br/>
-            <a:r>
-              <a:t>• Tableros de Decisión: Semáforo de superficie y Ventana Óptima L1-L3.</a:t>
-            </a:r>
-            <a:br/>
-            <a:br/>
-            <a:r>
-              <a:t>👉 Mantra: 'La IA acota el riesgo. El campo confirma.'</a:t>
-            </a:r>
-          </a:p>
-        </p:txBody>
-      </p:sp>
-      <p:sp>
-        <p:nvSpPr>
-          <p:cNvPr id="6" name="TextBox 5"/>
+              <a:t>Predecir eclosión por Grados Día (GDD), IA y red comunitaria.</a:t>
+            </a:r>
+          </a:p>
+        </p:txBody>
+      </p:sp>
+    </p:spTree>
+  </p:cSld>
+  <p:clrMapOvr>
+    <a:masterClrMapping/>
+  </p:clrMapOvr>
+</p:sld>
+</file>
+
+<file path=ppt/slides/slide10.xml><?xml version="1.0" encoding="utf-8"?>
+<p:sld xmlns:a="http://schemas.openxmlformats.org/drawingml/2006/main" xmlns:p="http://schemas.openxmlformats.org/presentationml/2006/main" xmlns:r="http://schemas.openxmlformats.org/officeDocument/2006/relationships">
+  <p:cSld>
+    <p:spTree>
+      <p:nvGrpSpPr>
+        <p:cNvPr id="1" name=""/>
+        <p:cNvGrpSpPr/>
+        <p:nvPr/>
+      </p:nvGrpSpPr>
+      <p:grpSpPr/>
+      <p:sp>
+        <p:nvSpPr>
+          <p:cNvPr id="2" name="Rectangle 1"/>
+          <p:cNvSpPr/>
+          <p:nvPr/>
+        </p:nvSpPr>
+        <p:spPr>
+          <a:xfrm>
+            <a:off x="0" y="0"/>
+            <a:ext cx="12191695" cy="6858000"/>
+          </a:xfrm>
+          <a:prstGeom prst="rect">
+            <a:avLst/>
+          </a:prstGeom>
+          <a:solidFill>
+            <a:srgbClr val="0B1711"/>
+          </a:solidFill>
+          <a:ln>
+            <a:noFill/>
+          </a:ln>
+        </p:spPr>
+        <p:style>
+          <a:lnRef idx="1">
+            <a:schemeClr val="accent1"/>
+          </a:lnRef>
+          <a:fillRef idx="3">
+            <a:schemeClr val="accent1"/>
+          </a:fillRef>
+          <a:effectRef idx="2">
+            <a:schemeClr val="accent1"/>
+          </a:effectRef>
+          <a:fontRef idx="minor">
+            <a:schemeClr val="lt1"/>
+          </a:fontRef>
+        </p:style>
+        <p:txBody>
+          <a:bodyPr rtlCol="0" anchor="ctr"/>
+          <a:lstStyle/>
+          <a:p>
+            <a:pPr algn="ctr"/>
+          </a:p>
+        </p:txBody>
+      </p:sp>
+      <p:sp>
+        <p:nvSpPr>
+          <p:cNvPr id="3" name="Rounded Rectangle 2"/>
+          <p:cNvSpPr/>
+          <p:nvPr/>
+        </p:nvSpPr>
+        <p:spPr>
+          <a:xfrm>
+            <a:off x="731520" y="365760"/>
+            <a:ext cx="2926080" cy="320040"/>
+          </a:xfrm>
+          <a:prstGeom prst="roundRect">
+            <a:avLst/>
+          </a:prstGeom>
+          <a:solidFill>
+            <a:srgbClr val="1B3428"/>
+          </a:solidFill>
+          <a:ln w="12700">
+            <a:solidFill>
+              <a:srgbClr val="F2B23E"/>
+            </a:solidFill>
+          </a:ln>
+        </p:spPr>
+        <p:style>
+          <a:lnRef idx="1">
+            <a:schemeClr val="accent1"/>
+          </a:lnRef>
+          <a:fillRef idx="3">
+            <a:schemeClr val="accent1"/>
+          </a:fillRef>
+          <a:effectRef idx="2">
+            <a:schemeClr val="accent1"/>
+          </a:effectRef>
+          <a:fontRef idx="minor">
+            <a:schemeClr val="lt1"/>
+          </a:fontRef>
+        </p:style>
+        <p:txBody>
+          <a:bodyPr rtlCol="0" anchor="ctr" wrap="square"/>
+          <a:lstStyle/>
+          <a:p>
+            <a:pPr algn="ctr">
+              <a:defRPr sz="1100" b="1">
+                <a:solidFill>
+                  <a:srgbClr val="F2B23E"/>
+                </a:solidFill>
+              </a:defRPr>
+            </a:pPr>
+            <a:r>
+              <a:t>Perspectiva 3 • Admin &amp; Escala</a:t>
+            </a:r>
+          </a:p>
+        </p:txBody>
+      </p:sp>
+      <p:sp>
+        <p:nvSpPr>
+          <p:cNvPr id="4" name="Rounded Rectangle 3"/>
+          <p:cNvSpPr/>
+          <p:nvPr/>
+        </p:nvSpPr>
+        <p:spPr>
+          <a:xfrm>
+            <a:off x="9601200" y="365760"/>
+            <a:ext cx="1828800" cy="320040"/>
+          </a:xfrm>
+          <a:prstGeom prst="roundRect">
+            <a:avLst/>
+          </a:prstGeom>
+          <a:solidFill>
+            <a:srgbClr val="1B3428"/>
+          </a:solidFill>
+          <a:ln w="12700">
+            <a:solidFill>
+              <a:srgbClr val="F2B23E"/>
+            </a:solidFill>
+          </a:ln>
+        </p:spPr>
+        <p:style>
+          <a:lnRef idx="1">
+            <a:schemeClr val="accent1"/>
+          </a:lnRef>
+          <a:fillRef idx="3">
+            <a:schemeClr val="accent1"/>
+          </a:fillRef>
+          <a:effectRef idx="2">
+            <a:schemeClr val="accent1"/>
+          </a:effectRef>
+          <a:fontRef idx="minor">
+            <a:schemeClr val="lt1"/>
+          </a:fontRef>
+        </p:style>
+        <p:txBody>
+          <a:bodyPr rtlCol="0" anchor="ctr"/>
+          <a:lstStyle/>
+          <a:p>
+            <a:pPr algn="ctr">
+              <a:defRPr sz="1100" b="1">
+                <a:solidFill>
+                  <a:srgbClr val="F2B23E"/>
+                </a:solidFill>
+              </a:defRPr>
+            </a:pPr>
+            <a:r>
+              <a:t>⏱️ 16:00 - 17:00</a:t>
+            </a:r>
+          </a:p>
+        </p:txBody>
+      </p:sp>
+      <p:sp>
+        <p:nvSpPr>
+          <p:cNvPr id="5" name="TextBox 4"/>
           <p:cNvSpPr txBox="1"/>
           <p:nvPr/>
         </p:nvSpPr>
         <p:spPr>
           <a:xfrm>
-            <a:off x="1097280" y="5577840"/>
-            <a:ext cx="9966960" cy="731520"/>
+            <a:off x="731520" y="777240"/>
+            <a:ext cx="10698480" cy="548640"/>
           </a:xfrm>
           <a:prstGeom prst="rect">
             <a:avLst/>
@@ -4377,15 +5388,4049 @@
           </a:bodyPr>
           <a:lstStyle/>
           <a:p>
+            <a:pPr>
+              <a:defRPr sz="2200" b="1">
+                <a:solidFill>
+                  <a:srgbClr val="F3F8F5"/>
+                </a:solidFill>
+              </a:defRPr>
+            </a:pPr>
+            <a:r>
+              <a:t>Escalabilidad del Catálogo Biológico</a:t>
+            </a:r>
+          </a:p>
+        </p:txBody>
+      </p:sp>
+      <p:sp>
+        <p:nvSpPr>
+          <p:cNvPr id="6" name="Rounded Rectangle 5"/>
+          <p:cNvSpPr/>
+          <p:nvPr/>
+        </p:nvSpPr>
+        <p:spPr>
+          <a:xfrm>
+            <a:off x="731520" y="1371600"/>
+            <a:ext cx="3291840" cy="5029200"/>
+          </a:xfrm>
+          <a:prstGeom prst="roundRect">
+            <a:avLst/>
+          </a:prstGeom>
+          <a:solidFill>
+            <a:srgbClr val="14261D"/>
+          </a:solidFill>
+          <a:ln w="12700">
+            <a:solidFill>
+              <a:srgbClr val="284636"/>
+            </a:solidFill>
+          </a:ln>
+        </p:spPr>
+        <p:style>
+          <a:lnRef idx="1">
+            <a:schemeClr val="accent1"/>
+          </a:lnRef>
+          <a:fillRef idx="3">
+            <a:schemeClr val="accent1"/>
+          </a:fillRef>
+          <a:effectRef idx="2">
+            <a:schemeClr val="accent1"/>
+          </a:effectRef>
+          <a:fontRef idx="minor">
+            <a:schemeClr val="lt1"/>
+          </a:fontRef>
+        </p:style>
+        <p:txBody>
+          <a:bodyPr rtlCol="0" anchor="ctr"/>
+          <a:lstStyle/>
+          <a:p>
+            <a:pPr algn="ctr"/>
+          </a:p>
+        </p:txBody>
+      </p:sp>
+      <p:pic>
+        <p:nvPicPr>
+          <p:cNvPr id="7" name="Picture 6" descr="05_tablero_lotes.png"/>
+          <p:cNvPicPr>
+            <a:picLocks noChangeAspect="1"/>
+          </p:cNvPicPr>
+          <p:nvPr/>
+        </p:nvPicPr>
+        <p:blipFill>
+          <a:blip r:embed="rId2"/>
+          <a:stretch>
+            <a:fillRect/>
+          </a:stretch>
+        </p:blipFill>
+        <p:spPr>
+          <a:xfrm>
+            <a:off x="914400" y="1508760"/>
+            <a:ext cx="2926080" cy="6502400"/>
+          </a:xfrm>
+          <a:prstGeom prst="rect">
+            <a:avLst/>
+          </a:prstGeom>
+        </p:spPr>
+      </p:pic>
+      <p:sp>
+        <p:nvSpPr>
+          <p:cNvPr id="8" name="Rounded Rectangle 7"/>
+          <p:cNvSpPr/>
+          <p:nvPr/>
+        </p:nvSpPr>
+        <p:spPr>
+          <a:xfrm>
+            <a:off x="4297680" y="1371600"/>
+            <a:ext cx="7132320" cy="5029200"/>
+          </a:xfrm>
+          <a:prstGeom prst="roundRect">
+            <a:avLst/>
+          </a:prstGeom>
+          <a:solidFill>
+            <a:srgbClr val="14261D"/>
+          </a:solidFill>
+          <a:ln w="12700">
+            <a:solidFill>
+              <a:srgbClr val="284636"/>
+            </a:solidFill>
+          </a:ln>
+        </p:spPr>
+        <p:style>
+          <a:lnRef idx="1">
+            <a:schemeClr val="accent1"/>
+          </a:lnRef>
+          <a:fillRef idx="3">
+            <a:schemeClr val="accent1"/>
+          </a:fillRef>
+          <a:effectRef idx="2">
+            <a:schemeClr val="accent1"/>
+          </a:effectRef>
+          <a:fontRef idx="minor">
+            <a:schemeClr val="lt1"/>
+          </a:fontRef>
+        </p:style>
+        <p:txBody>
+          <a:bodyPr rtlCol="0" anchor="ctr" wrap="square"/>
+          <a:lstStyle/>
+          <a:p>
+            <a:pPr algn="ctr">
+              <a:defRPr sz="1400" b="1">
+                <a:solidFill>
+                  <a:srgbClr val="5CE698"/>
+                </a:solidFill>
+              </a:defRPr>
+            </a:pPr>
+            <a:r>
+              <a:t>Alta dinámica de nuevas especies y cultivos sin dependencias de desarrollo</a:t>
+            </a:r>
+          </a:p>
+          <a:p>
+            <a:br/>
+            <a:pPr>
+              <a:defRPr sz="1300" b="1">
+                <a:solidFill>
+                  <a:srgbClr val="F2B23E"/>
+                </a:solidFill>
+              </a:defRPr>
+            </a:pPr>
+            <a:r>
+              <a:t>🧬 Extensibilidad Modular sin Despliegue de Código</a:t>
+            </a:r>
+          </a:p>
+          <a:p>
+            <a:pPr>
+              <a:defRPr sz="1100">
+                <a:solidFill>
+                  <a:srgbClr val="F3F8F5"/>
+                </a:solidFill>
+              </a:defRPr>
+            </a:pPr>
+            <a:r>
+              <a:t>El catálogo biológico no está 'hardcodeado'. Nuevas plagas o biotipos resistentes se configuran en caliente desde la base central.</a:t>
+            </a:r>
+          </a:p>
+          <a:p>
+            <a:pPr>
+              <a:defRPr sz="1050">
+                <a:solidFill>
+                  <a:srgbClr val="9EBAAB"/>
+                </a:solidFill>
+              </a:defRPr>
+            </a:pPr>
+            <a:r>
+              <a:t>• Parámetros Ontogénicos: Configuración de Temperatura Base (Tb), umbral superior (Tcorte) y constantes térmicas (K en GDD).</a:t>
+            </a:r>
+          </a:p>
+          <a:p>
+            <a:pPr>
+              <a:defRPr sz="1050">
+                <a:solidFill>
+                  <a:srgbClr val="9EBAAB"/>
+                </a:solidFill>
+              </a:defRPr>
+            </a:pPr>
+            <a:r>
+              <a:t>• Asociación con Cultivos: Vínculo con hospederos: Soja, Maíz, Sorgo, Alfalfa, Trigo, Girasol y pasturas consociadas.</a:t>
+            </a:r>
+          </a:p>
+          <a:p>
+            <a:pPr>
+              <a:defRPr sz="1050">
+                <a:solidFill>
+                  <a:srgbClr val="9EBAAB"/>
+                </a:solidFill>
+              </a:defRPr>
+            </a:pPr>
+            <a:r>
+              <a:t>• Propagación Instantánea: Al guardar, el nuevo modelo biológico queda disponible de inmediato para todos los productores.</a:t>
+            </a:r>
+          </a:p>
+          <a:p>
+            <a:pPr>
+              <a:defRPr sz="1050">
+                <a:solidFill>
+                  <a:srgbClr val="9EBAAB"/>
+                </a:solidFill>
+              </a:defRPr>
+            </a:pPr>
+            <a:r>
+              <a:t>• Archivo y Versionado: Posibilidad de archivar plagas estacionales o ajustar umbrales ante nuevas recomendaciones de INTA.</a:t>
+            </a:r>
+          </a:p>
+          <a:p>
+            <a:br/>
+            <a:pPr>
+              <a:defRPr sz="1000" i="1">
+                <a:solidFill>
+                  <a:srgbClr val="5CE698"/>
+                </a:solidFill>
+              </a:defRPr>
+            </a:pPr>
+            <a:r>
+              <a:t>🗣️ Qué decir al jurado: Tercera perspectiva: Panel de Administrador. Mostramos cómo escala la plataforma. En PLAG-OUT damos de alta una nueva plaga o cultivo en seg...</a:t>
+            </a:r>
+          </a:p>
+        </p:txBody>
+      </p:sp>
+    </p:spTree>
+  </p:cSld>
+  <p:clrMapOvr>
+    <a:masterClrMapping/>
+  </p:clrMapOvr>
+</p:sld>
+</file>
+
+<file path=ppt/slides/slide11.xml><?xml version="1.0" encoding="utf-8"?>
+<p:sld xmlns:a="http://schemas.openxmlformats.org/drawingml/2006/main" xmlns:p="http://schemas.openxmlformats.org/presentationml/2006/main" xmlns:r="http://schemas.openxmlformats.org/officeDocument/2006/relationships">
+  <p:cSld>
+    <p:spTree>
+      <p:nvGrpSpPr>
+        <p:cNvPr id="1" name=""/>
+        <p:cNvGrpSpPr/>
+        <p:nvPr/>
+      </p:nvGrpSpPr>
+      <p:grpSpPr/>
+      <p:sp>
+        <p:nvSpPr>
+          <p:cNvPr id="2" name="Rectangle 1"/>
+          <p:cNvSpPr/>
+          <p:nvPr/>
+        </p:nvSpPr>
+        <p:spPr>
+          <a:xfrm>
+            <a:off x="0" y="0"/>
+            <a:ext cx="12191695" cy="6858000"/>
+          </a:xfrm>
+          <a:prstGeom prst="rect">
+            <a:avLst/>
+          </a:prstGeom>
+          <a:solidFill>
+            <a:srgbClr val="0B1711"/>
+          </a:solidFill>
+          <a:ln>
+            <a:noFill/>
+          </a:ln>
+        </p:spPr>
+        <p:style>
+          <a:lnRef idx="1">
+            <a:schemeClr val="accent1"/>
+          </a:lnRef>
+          <a:fillRef idx="3">
+            <a:schemeClr val="accent1"/>
+          </a:fillRef>
+          <a:effectRef idx="2">
+            <a:schemeClr val="accent1"/>
+          </a:effectRef>
+          <a:fontRef idx="minor">
+            <a:schemeClr val="lt1"/>
+          </a:fontRef>
+        </p:style>
+        <p:txBody>
+          <a:bodyPr rtlCol="0" anchor="ctr"/>
+          <a:lstStyle/>
+          <a:p>
+            <a:pPr algn="ctr"/>
+          </a:p>
+        </p:txBody>
+      </p:sp>
+      <p:sp>
+        <p:nvSpPr>
+          <p:cNvPr id="3" name="Rounded Rectangle 2"/>
+          <p:cNvSpPr/>
+          <p:nvPr/>
+        </p:nvSpPr>
+        <p:spPr>
+          <a:xfrm>
+            <a:off x="731520" y="365760"/>
+            <a:ext cx="2926080" cy="320040"/>
+          </a:xfrm>
+          <a:prstGeom prst="roundRect">
+            <a:avLst/>
+          </a:prstGeom>
+          <a:solidFill>
+            <a:srgbClr val="1B3428"/>
+          </a:solidFill>
+          <a:ln w="12700">
+            <a:solidFill>
+              <a:srgbClr val="F2B23E"/>
+            </a:solidFill>
+          </a:ln>
+        </p:spPr>
+        <p:style>
+          <a:lnRef idx="1">
+            <a:schemeClr val="accent1"/>
+          </a:lnRef>
+          <a:fillRef idx="3">
+            <a:schemeClr val="accent1"/>
+          </a:fillRef>
+          <a:effectRef idx="2">
+            <a:schemeClr val="accent1"/>
+          </a:effectRef>
+          <a:fontRef idx="minor">
+            <a:schemeClr val="lt1"/>
+          </a:fontRef>
+        </p:style>
+        <p:txBody>
+          <a:bodyPr rtlCol="0" anchor="ctr" wrap="square"/>
+          <a:lstStyle/>
+          <a:p>
             <a:pPr algn="ctr">
               <a:defRPr sz="1100" b="1">
                 <a:solidFill>
+                  <a:srgbClr val="F2B23E"/>
+                </a:solidFill>
+              </a:defRPr>
+            </a:pPr>
+            <a:r>
+              <a:t>Perspectiva 3 • Usuarios</a:t>
+            </a:r>
+          </a:p>
+        </p:txBody>
+      </p:sp>
+      <p:sp>
+        <p:nvSpPr>
+          <p:cNvPr id="4" name="Rounded Rectangle 3"/>
+          <p:cNvSpPr/>
+          <p:nvPr/>
+        </p:nvSpPr>
+        <p:spPr>
+          <a:xfrm>
+            <a:off x="9601200" y="365760"/>
+            <a:ext cx="1828800" cy="320040"/>
+          </a:xfrm>
+          <a:prstGeom prst="roundRect">
+            <a:avLst/>
+          </a:prstGeom>
+          <a:solidFill>
+            <a:srgbClr val="1B3428"/>
+          </a:solidFill>
+          <a:ln w="12700">
+            <a:solidFill>
+              <a:srgbClr val="F2B23E"/>
+            </a:solidFill>
+          </a:ln>
+        </p:spPr>
+        <p:style>
+          <a:lnRef idx="1">
+            <a:schemeClr val="accent1"/>
+          </a:lnRef>
+          <a:fillRef idx="3">
+            <a:schemeClr val="accent1"/>
+          </a:fillRef>
+          <a:effectRef idx="2">
+            <a:schemeClr val="accent1"/>
+          </a:effectRef>
+          <a:fontRef idx="minor">
+            <a:schemeClr val="lt1"/>
+          </a:fontRef>
+        </p:style>
+        <p:txBody>
+          <a:bodyPr rtlCol="0" anchor="ctr"/>
+          <a:lstStyle/>
+          <a:p>
+            <a:pPr algn="ctr">
+              <a:defRPr sz="1100" b="1">
+                <a:solidFill>
+                  <a:srgbClr val="F2B23E"/>
+                </a:solidFill>
+              </a:defRPr>
+            </a:pPr>
+            <a:r>
+              <a:t>⏱️ 17:00 - 17:45</a:t>
+            </a:r>
+          </a:p>
+        </p:txBody>
+      </p:sp>
+      <p:sp>
+        <p:nvSpPr>
+          <p:cNvPr id="5" name="TextBox 4"/>
+          <p:cNvSpPr txBox="1"/>
+          <p:nvPr/>
+        </p:nvSpPr>
+        <p:spPr>
+          <a:xfrm>
+            <a:off x="731520" y="777240"/>
+            <a:ext cx="10698480" cy="548640"/>
+          </a:xfrm>
+          <a:prstGeom prst="rect">
+            <a:avLst/>
+          </a:prstGeom>
+          <a:noFill/>
+        </p:spPr>
+        <p:txBody>
+          <a:bodyPr wrap="none">
+            <a:spAutoFit/>
+          </a:bodyPr>
+          <a:lstStyle/>
+          <a:p>
+            <a:pPr>
+              <a:defRPr sz="2200" b="1">
+                <a:solidFill>
                   <a:srgbClr val="F3F8F5"/>
                 </a:solidFill>
               </a:defRPr>
             </a:pPr>
             <a:r>
-              <a:t>Equipo: Diego Hernández Canetti • Avril Martina López • Ramiro Navarro • Nicolás Ariel Conde • Brisabed Alexandra Marchan Figuera</a:t>
+              <a:t>Gestión de Usuarios y Gobernanza Operativa</a:t>
+            </a:r>
+          </a:p>
+        </p:txBody>
+      </p:sp>
+      <p:sp>
+        <p:nvSpPr>
+          <p:cNvPr id="6" name="Rounded Rectangle 5"/>
+          <p:cNvSpPr/>
+          <p:nvPr/>
+        </p:nvSpPr>
+        <p:spPr>
+          <a:xfrm>
+            <a:off x="731520" y="1371600"/>
+            <a:ext cx="3291840" cy="5029200"/>
+          </a:xfrm>
+          <a:prstGeom prst="roundRect">
+            <a:avLst/>
+          </a:prstGeom>
+          <a:solidFill>
+            <a:srgbClr val="14261D"/>
+          </a:solidFill>
+          <a:ln w="12700">
+            <a:solidFill>
+              <a:srgbClr val="284636"/>
+            </a:solidFill>
+          </a:ln>
+        </p:spPr>
+        <p:style>
+          <a:lnRef idx="1">
+            <a:schemeClr val="accent1"/>
+          </a:lnRef>
+          <a:fillRef idx="3">
+            <a:schemeClr val="accent1"/>
+          </a:fillRef>
+          <a:effectRef idx="2">
+            <a:schemeClr val="accent1"/>
+          </a:effectRef>
+          <a:fontRef idx="minor">
+            <a:schemeClr val="lt1"/>
+          </a:fontRef>
+        </p:style>
+        <p:txBody>
+          <a:bodyPr rtlCol="0" anchor="ctr"/>
+          <a:lstStyle/>
+          <a:p>
+            <a:pPr algn="ctr"/>
+          </a:p>
+        </p:txBody>
+      </p:sp>
+      <p:pic>
+        <p:nvPicPr>
+          <p:cNvPr id="7" name="Picture 6" descr="07_tablero_campanas.png"/>
+          <p:cNvPicPr>
+            <a:picLocks noChangeAspect="1"/>
+          </p:cNvPicPr>
+          <p:nvPr/>
+        </p:nvPicPr>
+        <p:blipFill>
+          <a:blip r:embed="rId2"/>
+          <a:stretch>
+            <a:fillRect/>
+          </a:stretch>
+        </p:blipFill>
+        <p:spPr>
+          <a:xfrm>
+            <a:off x="914400" y="1508760"/>
+            <a:ext cx="2926080" cy="6502400"/>
+          </a:xfrm>
+          <a:prstGeom prst="rect">
+            <a:avLst/>
+          </a:prstGeom>
+        </p:spPr>
+      </p:pic>
+      <p:sp>
+        <p:nvSpPr>
+          <p:cNvPr id="8" name="Rounded Rectangle 7"/>
+          <p:cNvSpPr/>
+          <p:nvPr/>
+        </p:nvSpPr>
+        <p:spPr>
+          <a:xfrm>
+            <a:off x="4297680" y="1371600"/>
+            <a:ext cx="7132320" cy="5029200"/>
+          </a:xfrm>
+          <a:prstGeom prst="roundRect">
+            <a:avLst/>
+          </a:prstGeom>
+          <a:solidFill>
+            <a:srgbClr val="14261D"/>
+          </a:solidFill>
+          <a:ln w="12700">
+            <a:solidFill>
+              <a:srgbClr val="284636"/>
+            </a:solidFill>
+          </a:ln>
+        </p:spPr>
+        <p:style>
+          <a:lnRef idx="1">
+            <a:schemeClr val="accent1"/>
+          </a:lnRef>
+          <a:fillRef idx="3">
+            <a:schemeClr val="accent1"/>
+          </a:fillRef>
+          <a:effectRef idx="2">
+            <a:schemeClr val="accent1"/>
+          </a:effectRef>
+          <a:fontRef idx="minor">
+            <a:schemeClr val="lt1"/>
+          </a:fontRef>
+        </p:style>
+        <p:txBody>
+          <a:bodyPr rtlCol="0" anchor="ctr" wrap="square"/>
+          <a:lstStyle/>
+          <a:p>
+            <a:pPr algn="ctr">
+              <a:defRPr sz="1400" b="1">
+                <a:solidFill>
+                  <a:srgbClr val="5CE698"/>
+                </a:solidFill>
+              </a:defRPr>
+            </a:pPr>
+            <a:r>
+              <a:t>Control de accesos basado en roles (RBAC) y auditoría institucional</a:t>
+            </a:r>
+          </a:p>
+          <a:p>
+            <a:br/>
+            <a:pPr>
+              <a:defRPr sz="1300" b="1">
+                <a:solidFill>
+                  <a:srgbClr val="F2B23E"/>
+                </a:solidFill>
+              </a:defRPr>
+            </a:pPr>
+            <a:r>
+              <a:t>👥 Administración Institucional y Auditoría</a:t>
+            </a:r>
+          </a:p>
+          <a:p>
+            <a:pPr>
+              <a:defRPr sz="1100">
+                <a:solidFill>
+                  <a:srgbClr val="F3F8F5"/>
+                </a:solidFill>
+              </a:defRPr>
+            </a:pPr>
+            <a:r>
+              <a:t>Estructura pensada para cooperativas, acopios y pools de siembra con múltiples niveles de operadores.</a:t>
+            </a:r>
+          </a:p>
+          <a:p>
+            <a:pPr>
+              <a:defRPr sz="1050">
+                <a:solidFill>
+                  <a:srgbClr val="9EBAAB"/>
+                </a:solidFill>
+              </a:defRPr>
+            </a:pPr>
+            <a:r>
+              <a:t>• Roles Jerárquicos: Productor estándar (gestión de campo), Ingeniero Agrónomo (validación de biofix) y Administrador.</a:t>
+            </a:r>
+          </a:p>
+          <a:p>
+            <a:pPr>
+              <a:defRPr sz="1050">
+                <a:solidFill>
+                  <a:srgbClr val="9EBAAB"/>
+                </a:solidFill>
+              </a:defRPr>
+            </a:pPr>
+            <a:r>
+              <a:t>• Estados de Cuenta: Activación, suspensión preventiva y control de acceso mediante tokens revocables.</a:t>
+            </a:r>
+          </a:p>
+          <a:p>
+            <a:pPr>
+              <a:defRPr sz="1050">
+                <a:solidFill>
+                  <a:srgbClr val="9EBAAB"/>
+                </a:solidFill>
+              </a:defRPr>
+            </a:pPr>
+            <a:r>
+              <a:t>• Soporte Multiestablecimiento: Habilitación de técnicos para monitorear múltiples campos bajo un mismo esquema de auditoría.</a:t>
+            </a:r>
+          </a:p>
+          <a:p>
+            <a:pPr>
+              <a:defRPr sz="1050">
+                <a:solidFill>
+                  <a:srgbClr val="9EBAAB"/>
+                </a:solidFill>
+              </a:defRPr>
+            </a:pPr>
+            <a:r>
+              <a:t>• Trazabilidad de Acciones: Registro auditado de quién cargó cada reporte y quién confirmó la eclosión a campo.</a:t>
+            </a:r>
+          </a:p>
+          <a:p>
+            <a:br/>
+            <a:pPr>
+              <a:defRPr sz="1000" i="1">
+                <a:solidFill>
+                  <a:srgbClr val="5CE698"/>
+                </a:solidFill>
+              </a:defRPr>
+            </a:pPr>
+            <a:r>
+              <a:t>🗣️ Qué decir al jurado: Muy brevemente, la gestión de usuarios desde Admin: listado de usuarios, asignación de roles jerárquicos (productor, agrónomo certificador, ...</a:t>
+            </a:r>
+          </a:p>
+        </p:txBody>
+      </p:sp>
+    </p:spTree>
+  </p:cSld>
+  <p:clrMapOvr>
+    <a:masterClrMapping/>
+  </p:clrMapOvr>
+</p:sld>
+</file>
+
+<file path=ppt/slides/slide12.xml><?xml version="1.0" encoding="utf-8"?>
+<p:sld xmlns:a="http://schemas.openxmlformats.org/drawingml/2006/main" xmlns:p="http://schemas.openxmlformats.org/presentationml/2006/main" xmlns:r="http://schemas.openxmlformats.org/officeDocument/2006/relationships">
+  <p:cSld>
+    <p:spTree>
+      <p:nvGrpSpPr>
+        <p:cNvPr id="1" name=""/>
+        <p:cNvGrpSpPr/>
+        <p:nvPr/>
+      </p:nvGrpSpPr>
+      <p:grpSpPr/>
+      <p:sp>
+        <p:nvSpPr>
+          <p:cNvPr id="2" name="Rectangle 1"/>
+          <p:cNvSpPr/>
+          <p:nvPr/>
+        </p:nvSpPr>
+        <p:spPr>
+          <a:xfrm>
+            <a:off x="0" y="0"/>
+            <a:ext cx="12191695" cy="6858000"/>
+          </a:xfrm>
+          <a:prstGeom prst="rect">
+            <a:avLst/>
+          </a:prstGeom>
+          <a:solidFill>
+            <a:srgbClr val="0B1711"/>
+          </a:solidFill>
+          <a:ln>
+            <a:noFill/>
+          </a:ln>
+        </p:spPr>
+        <p:style>
+          <a:lnRef idx="1">
+            <a:schemeClr val="accent1"/>
+          </a:lnRef>
+          <a:fillRef idx="3">
+            <a:schemeClr val="accent1"/>
+          </a:fillRef>
+          <a:effectRef idx="2">
+            <a:schemeClr val="accent1"/>
+          </a:effectRef>
+          <a:fontRef idx="minor">
+            <a:schemeClr val="lt1"/>
+          </a:fontRef>
+        </p:style>
+        <p:txBody>
+          <a:bodyPr rtlCol="0" anchor="ctr"/>
+          <a:lstStyle/>
+          <a:p>
+            <a:pPr algn="ctr"/>
+          </a:p>
+        </p:txBody>
+      </p:sp>
+      <p:sp>
+        <p:nvSpPr>
+          <p:cNvPr id="3" name="Rounded Rectangle 2"/>
+          <p:cNvSpPr/>
+          <p:nvPr/>
+        </p:nvSpPr>
+        <p:spPr>
+          <a:xfrm>
+            <a:off x="731520" y="365760"/>
+            <a:ext cx="2926080" cy="320040"/>
+          </a:xfrm>
+          <a:prstGeom prst="roundRect">
+            <a:avLst/>
+          </a:prstGeom>
+          <a:solidFill>
+            <a:srgbClr val="1B3428"/>
+          </a:solidFill>
+          <a:ln w="12700">
+            <a:solidFill>
+              <a:srgbClr val="F2B23E"/>
+            </a:solidFill>
+          </a:ln>
+        </p:spPr>
+        <p:style>
+          <a:lnRef idx="1">
+            <a:schemeClr val="accent1"/>
+          </a:lnRef>
+          <a:fillRef idx="3">
+            <a:schemeClr val="accent1"/>
+          </a:fillRef>
+          <a:effectRef idx="2">
+            <a:schemeClr val="accent1"/>
+          </a:effectRef>
+          <a:fontRef idx="minor">
+            <a:schemeClr val="lt1"/>
+          </a:fontRef>
+        </p:style>
+        <p:txBody>
+          <a:bodyPr rtlCol="0" anchor="ctr" wrap="square"/>
+          <a:lstStyle/>
+          <a:p>
+            <a:pPr algn="ctr">
+              <a:defRPr sz="1100" b="1">
+                <a:solidFill>
+                  <a:srgbClr val="F2B23E"/>
+                </a:solidFill>
+              </a:defRPr>
+            </a:pPr>
+            <a:r>
+              <a:t>Perspectiva 3 • Analítica Global</a:t>
+            </a:r>
+          </a:p>
+        </p:txBody>
+      </p:sp>
+      <p:sp>
+        <p:nvSpPr>
+          <p:cNvPr id="4" name="Rounded Rectangle 3"/>
+          <p:cNvSpPr/>
+          <p:nvPr/>
+        </p:nvSpPr>
+        <p:spPr>
+          <a:xfrm>
+            <a:off x="9601200" y="365760"/>
+            <a:ext cx="1828800" cy="320040"/>
+          </a:xfrm>
+          <a:prstGeom prst="roundRect">
+            <a:avLst/>
+          </a:prstGeom>
+          <a:solidFill>
+            <a:srgbClr val="1B3428"/>
+          </a:solidFill>
+          <a:ln w="12700">
+            <a:solidFill>
+              <a:srgbClr val="F2B23E"/>
+            </a:solidFill>
+          </a:ln>
+        </p:spPr>
+        <p:style>
+          <a:lnRef idx="1">
+            <a:schemeClr val="accent1"/>
+          </a:lnRef>
+          <a:fillRef idx="3">
+            <a:schemeClr val="accent1"/>
+          </a:fillRef>
+          <a:effectRef idx="2">
+            <a:schemeClr val="accent1"/>
+          </a:effectRef>
+          <a:fontRef idx="minor">
+            <a:schemeClr val="lt1"/>
+          </a:fontRef>
+        </p:style>
+        <p:txBody>
+          <a:bodyPr rtlCol="0" anchor="ctr"/>
+          <a:lstStyle/>
+          <a:p>
+            <a:pPr algn="ctr">
+              <a:defRPr sz="1100" b="1">
+                <a:solidFill>
+                  <a:srgbClr val="F2B23E"/>
+                </a:solidFill>
+              </a:defRPr>
+            </a:pPr>
+            <a:r>
+              <a:t>⏱️ 17:45 - 18:45</a:t>
+            </a:r>
+          </a:p>
+        </p:txBody>
+      </p:sp>
+      <p:sp>
+        <p:nvSpPr>
+          <p:cNvPr id="5" name="TextBox 4"/>
+          <p:cNvSpPr txBox="1"/>
+          <p:nvPr/>
+        </p:nvSpPr>
+        <p:spPr>
+          <a:xfrm>
+            <a:off x="731520" y="777240"/>
+            <a:ext cx="10698480" cy="548640"/>
+          </a:xfrm>
+          <a:prstGeom prst="rect">
+            <a:avLst/>
+          </a:prstGeom>
+          <a:noFill/>
+        </p:spPr>
+        <p:txBody>
+          <a:bodyPr wrap="none">
+            <a:spAutoFit/>
+          </a:bodyPr>
+          <a:lstStyle/>
+          <a:p>
+            <a:pPr>
+              <a:defRPr sz="2200" b="1">
+                <a:solidFill>
+                  <a:srgbClr val="F3F8F5"/>
+                </a:solidFill>
+              </a:defRPr>
+            </a:pPr>
+            <a:r>
+              <a:t>Dashboards Globales de Administración</a:t>
+            </a:r>
+          </a:p>
+        </p:txBody>
+      </p:sp>
+      <p:sp>
+        <p:nvSpPr>
+          <p:cNvPr id="6" name="Rounded Rectangle 5"/>
+          <p:cNvSpPr/>
+          <p:nvPr/>
+        </p:nvSpPr>
+        <p:spPr>
+          <a:xfrm>
+            <a:off x="731520" y="1371600"/>
+            <a:ext cx="3291840" cy="5029200"/>
+          </a:xfrm>
+          <a:prstGeom prst="roundRect">
+            <a:avLst/>
+          </a:prstGeom>
+          <a:solidFill>
+            <a:srgbClr val="14261D"/>
+          </a:solidFill>
+          <a:ln w="12700">
+            <a:solidFill>
+              <a:srgbClr val="284636"/>
+            </a:solidFill>
+          </a:ln>
+        </p:spPr>
+        <p:style>
+          <a:lnRef idx="1">
+            <a:schemeClr val="accent1"/>
+          </a:lnRef>
+          <a:fillRef idx="3">
+            <a:schemeClr val="accent1"/>
+          </a:fillRef>
+          <a:effectRef idx="2">
+            <a:schemeClr val="accent1"/>
+          </a:effectRef>
+          <a:fontRef idx="minor">
+            <a:schemeClr val="lt1"/>
+          </a:fontRef>
+        </p:style>
+        <p:txBody>
+          <a:bodyPr rtlCol="0" anchor="ctr"/>
+          <a:lstStyle/>
+          <a:p>
+            <a:pPr algn="ctr"/>
+          </a:p>
+        </p:txBody>
+      </p:sp>
+      <p:pic>
+        <p:nvPicPr>
+          <p:cNvPr id="7" name="Picture 6" descr="05_tablero_lotes.png"/>
+          <p:cNvPicPr>
+            <a:picLocks noChangeAspect="1"/>
+          </p:cNvPicPr>
+          <p:nvPr/>
+        </p:nvPicPr>
+        <p:blipFill>
+          <a:blip r:embed="rId2"/>
+          <a:stretch>
+            <a:fillRect/>
+          </a:stretch>
+        </p:blipFill>
+        <p:spPr>
+          <a:xfrm>
+            <a:off x="914400" y="1508760"/>
+            <a:ext cx="2926080" cy="6502400"/>
+          </a:xfrm>
+          <a:prstGeom prst="rect">
+            <a:avLst/>
+          </a:prstGeom>
+        </p:spPr>
+      </p:pic>
+      <p:sp>
+        <p:nvSpPr>
+          <p:cNvPr id="8" name="Rounded Rectangle 7"/>
+          <p:cNvSpPr/>
+          <p:nvPr/>
+        </p:nvSpPr>
+        <p:spPr>
+          <a:xfrm>
+            <a:off x="4297680" y="1371600"/>
+            <a:ext cx="7132320" cy="5029200"/>
+          </a:xfrm>
+          <a:prstGeom prst="roundRect">
+            <a:avLst/>
+          </a:prstGeom>
+          <a:solidFill>
+            <a:srgbClr val="14261D"/>
+          </a:solidFill>
+          <a:ln w="12700">
+            <a:solidFill>
+              <a:srgbClr val="284636"/>
+            </a:solidFill>
+          </a:ln>
+        </p:spPr>
+        <p:style>
+          <a:lnRef idx="1">
+            <a:schemeClr val="accent1"/>
+          </a:lnRef>
+          <a:fillRef idx="3">
+            <a:schemeClr val="accent1"/>
+          </a:fillRef>
+          <a:effectRef idx="2">
+            <a:schemeClr val="accent1"/>
+          </a:effectRef>
+          <a:fontRef idx="minor">
+            <a:schemeClr val="lt1"/>
+          </a:fontRef>
+        </p:style>
+        <p:txBody>
+          <a:bodyPr rtlCol="0" anchor="ctr" wrap="square"/>
+          <a:lstStyle/>
+          <a:p>
+            <a:pPr algn="ctr">
+              <a:defRPr sz="1400" b="1">
+                <a:solidFill>
+                  <a:srgbClr val="5CE698"/>
+                </a:solidFill>
+              </a:defRPr>
+            </a:pPr>
+            <a:r>
+              <a:t>Inteligencia epidemiológica agregada para cooperativas y organismos fitosanitarios</a:t>
+            </a:r>
+          </a:p>
+          <a:p>
+            <a:br/>
+            <a:pPr>
+              <a:defRPr sz="1300" b="1">
+                <a:solidFill>
+                  <a:srgbClr val="F2B23E"/>
+                </a:solidFill>
+              </a:defRPr>
+            </a:pPr>
+            <a:r>
+              <a:t>📈 De la Parcela Individual a la Epidemiología Regional</a:t>
+            </a:r>
+          </a:p>
+          <a:p>
+            <a:pPr>
+              <a:defRPr sz="1100">
+                <a:solidFill>
+                  <a:srgbClr val="F3F8F5"/>
+                </a:solidFill>
+              </a:defRPr>
+            </a:pPr>
+            <a:r>
+              <a:t>Visión macro que permite detectar tendencias, brotes incipientes y velocidad de dispersión geográfica de plagas.</a:t>
+            </a:r>
+          </a:p>
+          <a:p>
+            <a:pPr>
+              <a:defRPr sz="1050">
+                <a:solidFill>
+                  <a:srgbClr val="9EBAAB"/>
+                </a:solidFill>
+              </a:defRPr>
+            </a:pPr>
+            <a:r>
+              <a:t>• Superficie Bajo Vigilancia: Consolidado en tiempo real de hectáreas activas por región agrícola (NOA, NEA, Zona Núcleo).</a:t>
+            </a:r>
+          </a:p>
+          <a:p>
+            <a:pPr>
+              <a:defRPr sz="1050">
+                <a:solidFill>
+                  <a:srgbClr val="9EBAAB"/>
+                </a:solidFill>
+              </a:defRPr>
+            </a:pPr>
+            <a:r>
+              <a:t>• Velocidad de Propagación: Métrica de dispersión basada en reportes comunitarios y anomalías térmicas recientes.</a:t>
+            </a:r>
+          </a:p>
+          <a:p>
+            <a:pPr>
+              <a:defRPr sz="1050">
+                <a:solidFill>
+                  <a:srgbClr val="9EBAAB"/>
+                </a:solidFill>
+              </a:defRPr>
+            </a:pPr>
+            <a:r>
+              <a:t>• Cultivos más Afectados: Distribución de presión sanitaria para planificar abastecimiento temprano de insumos.</a:t>
+            </a:r>
+          </a:p>
+          <a:p>
+            <a:pPr>
+              <a:defRPr sz="1050">
+                <a:solidFill>
+                  <a:srgbClr val="9EBAAB"/>
+                </a:solidFill>
+              </a:defRPr>
+            </a:pPr>
+            <a:r>
+              <a:t>• Alianzas Estratégicas: Información de alto valor para articular alertas tempranas con INTA, SENASA y mesas técnicas.</a:t>
+            </a:r>
+          </a:p>
+          <a:p>
+            <a:br/>
+            <a:pPr>
+              <a:defRPr sz="1000" i="1">
+                <a:solidFill>
+                  <a:srgbClr val="5CE698"/>
+                </a:solidFill>
+              </a:defRPr>
+            </a:pPr>
+            <a:r>
+              <a:t>🗣️ Qué decir al jurado: Métricas globales de administración: dashboards de analítica regional. Acá la información deja de ser de un lote y se vuelve inteligencia ep...</a:t>
+            </a:r>
+          </a:p>
+        </p:txBody>
+      </p:sp>
+    </p:spTree>
+  </p:cSld>
+  <p:clrMapOvr>
+    <a:masterClrMapping/>
+  </p:clrMapOvr>
+</p:sld>
+</file>
+
+<file path=ppt/slides/slide13.xml><?xml version="1.0" encoding="utf-8"?>
+<p:sld xmlns:a="http://schemas.openxmlformats.org/drawingml/2006/main" xmlns:p="http://schemas.openxmlformats.org/presentationml/2006/main" xmlns:r="http://schemas.openxmlformats.org/officeDocument/2006/relationships">
+  <p:cSld>
+    <p:spTree>
+      <p:nvGrpSpPr>
+        <p:cNvPr id="1" name=""/>
+        <p:cNvGrpSpPr/>
+        <p:nvPr/>
+      </p:nvGrpSpPr>
+      <p:grpSpPr/>
+      <p:sp>
+        <p:nvSpPr>
+          <p:cNvPr id="2" name="Rectangle 1"/>
+          <p:cNvSpPr/>
+          <p:nvPr/>
+        </p:nvSpPr>
+        <p:spPr>
+          <a:xfrm>
+            <a:off x="0" y="0"/>
+            <a:ext cx="12191695" cy="6858000"/>
+          </a:xfrm>
+          <a:prstGeom prst="rect">
+            <a:avLst/>
+          </a:prstGeom>
+          <a:solidFill>
+            <a:srgbClr val="0B1711"/>
+          </a:solidFill>
+          <a:ln>
+            <a:noFill/>
+          </a:ln>
+        </p:spPr>
+        <p:style>
+          <a:lnRef idx="1">
+            <a:schemeClr val="accent1"/>
+          </a:lnRef>
+          <a:fillRef idx="3">
+            <a:schemeClr val="accent1"/>
+          </a:fillRef>
+          <a:effectRef idx="2">
+            <a:schemeClr val="accent1"/>
+          </a:effectRef>
+          <a:fontRef idx="minor">
+            <a:schemeClr val="lt1"/>
+          </a:fontRef>
+        </p:style>
+        <p:txBody>
+          <a:bodyPr rtlCol="0" anchor="ctr"/>
+          <a:lstStyle/>
+          <a:p>
+            <a:pPr algn="ctr"/>
+          </a:p>
+        </p:txBody>
+      </p:sp>
+      <p:sp>
+        <p:nvSpPr>
+          <p:cNvPr id="3" name="Rounded Rectangle 2"/>
+          <p:cNvSpPr/>
+          <p:nvPr/>
+        </p:nvSpPr>
+        <p:spPr>
+          <a:xfrm>
+            <a:off x="731520" y="365760"/>
+            <a:ext cx="2926080" cy="320040"/>
+          </a:xfrm>
+          <a:prstGeom prst="roundRect">
+            <a:avLst/>
+          </a:prstGeom>
+          <a:solidFill>
+            <a:srgbClr val="1B3428"/>
+          </a:solidFill>
+          <a:ln w="12700">
+            <a:solidFill>
+              <a:srgbClr val="F2B23E"/>
+            </a:solidFill>
+          </a:ln>
+        </p:spPr>
+        <p:style>
+          <a:lnRef idx="1">
+            <a:schemeClr val="accent1"/>
+          </a:lnRef>
+          <a:fillRef idx="3">
+            <a:schemeClr val="accent1"/>
+          </a:fillRef>
+          <a:effectRef idx="2">
+            <a:schemeClr val="accent1"/>
+          </a:effectRef>
+          <a:fontRef idx="minor">
+            <a:schemeClr val="lt1"/>
+          </a:fontRef>
+        </p:style>
+        <p:txBody>
+          <a:bodyPr rtlCol="0" anchor="ctr" wrap="square"/>
+          <a:lstStyle/>
+          <a:p>
+            <a:pPr algn="ctr">
+              <a:defRPr sz="1100" b="1">
+                <a:solidFill>
+                  <a:srgbClr val="F2B23E"/>
+                </a:solidFill>
+              </a:defRPr>
+            </a:pPr>
+            <a:r>
+              <a:t>Perspectiva 3 • Arquitectura</a:t>
+            </a:r>
+          </a:p>
+        </p:txBody>
+      </p:sp>
+      <p:sp>
+        <p:nvSpPr>
+          <p:cNvPr id="4" name="Rounded Rectangle 3"/>
+          <p:cNvSpPr/>
+          <p:nvPr/>
+        </p:nvSpPr>
+        <p:spPr>
+          <a:xfrm>
+            <a:off x="9601200" y="365760"/>
+            <a:ext cx="1828800" cy="320040"/>
+          </a:xfrm>
+          <a:prstGeom prst="roundRect">
+            <a:avLst/>
+          </a:prstGeom>
+          <a:solidFill>
+            <a:srgbClr val="1B3428"/>
+          </a:solidFill>
+          <a:ln w="12700">
+            <a:solidFill>
+              <a:srgbClr val="F2B23E"/>
+            </a:solidFill>
+          </a:ln>
+        </p:spPr>
+        <p:style>
+          <a:lnRef idx="1">
+            <a:schemeClr val="accent1"/>
+          </a:lnRef>
+          <a:fillRef idx="3">
+            <a:schemeClr val="accent1"/>
+          </a:fillRef>
+          <a:effectRef idx="2">
+            <a:schemeClr val="accent1"/>
+          </a:effectRef>
+          <a:fontRef idx="minor">
+            <a:schemeClr val="lt1"/>
+          </a:fontRef>
+        </p:style>
+        <p:txBody>
+          <a:bodyPr rtlCol="0" anchor="ctr"/>
+          <a:lstStyle/>
+          <a:p>
+            <a:pPr algn="ctr">
+              <a:defRPr sz="1100" b="1">
+                <a:solidFill>
+                  <a:srgbClr val="F2B23E"/>
+                </a:solidFill>
+              </a:defRPr>
+            </a:pPr>
+            <a:r>
+              <a:t>⏱️ 18:45 - 19:30</a:t>
+            </a:r>
+          </a:p>
+        </p:txBody>
+      </p:sp>
+      <p:sp>
+        <p:nvSpPr>
+          <p:cNvPr id="5" name="TextBox 4"/>
+          <p:cNvSpPr txBox="1"/>
+          <p:nvPr/>
+        </p:nvSpPr>
+        <p:spPr>
+          <a:xfrm>
+            <a:off x="731520" y="777240"/>
+            <a:ext cx="10698480" cy="548640"/>
+          </a:xfrm>
+          <a:prstGeom prst="rect">
+            <a:avLst/>
+          </a:prstGeom>
+          <a:noFill/>
+        </p:spPr>
+        <p:txBody>
+          <a:bodyPr wrap="none">
+            <a:spAutoFit/>
+          </a:bodyPr>
+          <a:lstStyle/>
+          <a:p>
+            <a:pPr>
+              <a:defRPr sz="2200" b="1">
+                <a:solidFill>
+                  <a:srgbClr val="F3F8F5"/>
+                </a:solidFill>
+              </a:defRPr>
+            </a:pPr>
+            <a:r>
+              <a:t>Ecosistema Multiplataforma: Mobile vs Web</a:t>
+            </a:r>
+          </a:p>
+        </p:txBody>
+      </p:sp>
+      <p:sp>
+        <p:nvSpPr>
+          <p:cNvPr id="6" name="Rounded Rectangle 5"/>
+          <p:cNvSpPr/>
+          <p:nvPr/>
+        </p:nvSpPr>
+        <p:spPr>
+          <a:xfrm>
+            <a:off x="731520" y="1371600"/>
+            <a:ext cx="3291840" cy="5029200"/>
+          </a:xfrm>
+          <a:prstGeom prst="roundRect">
+            <a:avLst/>
+          </a:prstGeom>
+          <a:solidFill>
+            <a:srgbClr val="14261D"/>
+          </a:solidFill>
+          <a:ln w="12700">
+            <a:solidFill>
+              <a:srgbClr val="284636"/>
+            </a:solidFill>
+          </a:ln>
+        </p:spPr>
+        <p:style>
+          <a:lnRef idx="1">
+            <a:schemeClr val="accent1"/>
+          </a:lnRef>
+          <a:fillRef idx="3">
+            <a:schemeClr val="accent1"/>
+          </a:fillRef>
+          <a:effectRef idx="2">
+            <a:schemeClr val="accent1"/>
+          </a:effectRef>
+          <a:fontRef idx="minor">
+            <a:schemeClr val="lt1"/>
+          </a:fontRef>
+        </p:style>
+        <p:txBody>
+          <a:bodyPr rtlCol="0" anchor="ctr"/>
+          <a:lstStyle/>
+          <a:p>
+            <a:pPr algn="ctr"/>
+          </a:p>
+        </p:txBody>
+      </p:sp>
+      <p:pic>
+        <p:nvPicPr>
+          <p:cNvPr id="7" name="Picture 6" descr="04_mapa_georreferenciado.png"/>
+          <p:cNvPicPr>
+            <a:picLocks noChangeAspect="1"/>
+          </p:cNvPicPr>
+          <p:nvPr/>
+        </p:nvPicPr>
+        <p:blipFill>
+          <a:blip r:embed="rId2"/>
+          <a:stretch>
+            <a:fillRect/>
+          </a:stretch>
+        </p:blipFill>
+        <p:spPr>
+          <a:xfrm>
+            <a:off x="914400" y="1508760"/>
+            <a:ext cx="2926080" cy="6502400"/>
+          </a:xfrm>
+          <a:prstGeom prst="rect">
+            <a:avLst/>
+          </a:prstGeom>
+        </p:spPr>
+      </p:pic>
+      <p:sp>
+        <p:nvSpPr>
+          <p:cNvPr id="8" name="Rounded Rectangle 7"/>
+          <p:cNvSpPr/>
+          <p:nvPr/>
+        </p:nvSpPr>
+        <p:spPr>
+          <a:xfrm>
+            <a:off x="4297680" y="1371600"/>
+            <a:ext cx="7132320" cy="5029200"/>
+          </a:xfrm>
+          <a:prstGeom prst="roundRect">
+            <a:avLst/>
+          </a:prstGeom>
+          <a:solidFill>
+            <a:srgbClr val="14261D"/>
+          </a:solidFill>
+          <a:ln w="12700">
+            <a:solidFill>
+              <a:srgbClr val="284636"/>
+            </a:solidFill>
+          </a:ln>
+        </p:spPr>
+        <p:style>
+          <a:lnRef idx="1">
+            <a:schemeClr val="accent1"/>
+          </a:lnRef>
+          <a:fillRef idx="3">
+            <a:schemeClr val="accent1"/>
+          </a:fillRef>
+          <a:effectRef idx="2">
+            <a:schemeClr val="accent1"/>
+          </a:effectRef>
+          <a:fontRef idx="minor">
+            <a:schemeClr val="lt1"/>
+          </a:fontRef>
+        </p:style>
+        <p:txBody>
+          <a:bodyPr rtlCol="0" anchor="ctr" wrap="square"/>
+          <a:lstStyle/>
+          <a:p>
+            <a:pPr algn="ctr">
+              <a:defRPr sz="1400" b="1">
+                <a:solidFill>
+                  <a:srgbClr val="5CE698"/>
+                </a:solidFill>
+              </a:defRPr>
+            </a:pPr>
+            <a:r>
+              <a:t>Sinergia entre el trabajo rústico a campo y el análisis gerencial en oficina</a:t>
+            </a:r>
+          </a:p>
+          <a:p>
+            <a:br/>
+            <a:pPr>
+              <a:defRPr sz="1300" b="1">
+                <a:solidFill>
+                  <a:srgbClr val="F2B23E"/>
+                </a:solidFill>
+              </a:defRPr>
+            </a:pPr>
+            <a:r>
+              <a:t>🚜 Complementariedad Operativa según el Escenario</a:t>
+            </a:r>
+          </a:p>
+          <a:p>
+            <a:pPr>
+              <a:defRPr sz="1100">
+                <a:solidFill>
+                  <a:srgbClr val="F3F8F5"/>
+                </a:solidFill>
+              </a:defRPr>
+            </a:pPr>
+            <a:r>
+              <a:t>Dos clientes optimizados para su entorno de uso que consumen la misma API REST asíncrona.</a:t>
+            </a:r>
+          </a:p>
+          <a:p>
+            <a:pPr>
+              <a:defRPr sz="1050">
+                <a:solidFill>
+                  <a:srgbClr val="9EBAAB"/>
+                </a:solidFill>
+              </a:defRPr>
+            </a:pPr>
+            <a:r>
+              <a:t>• Android Nativo (Campo): Uso en camioneta bajo el sol, botones amplios, cámara rápida, GPS nativo y tolerancia offline 100% con Room.</a:t>
+            </a:r>
+          </a:p>
+          <a:p>
+            <a:pPr>
+              <a:defRPr sz="1050">
+                <a:solidFill>
+                  <a:srgbClr val="9EBAAB"/>
+                </a:solidFill>
+              </a:defRPr>
+            </a:pPr>
+            <a:r>
+              <a:t>• Portal Web (Oficina): Pantalla grande para visualización cartográfica, gestión masiva de lotes, auditoría y exportación BPA.</a:t>
+            </a:r>
+          </a:p>
+          <a:p>
+            <a:pPr>
+              <a:defRPr sz="1050">
+                <a:solidFill>
+                  <a:srgbClr val="9EBAAB"/>
+                </a:solidFill>
+              </a:defRPr>
+            </a:pPr>
+            <a:r>
+              <a:t>• Backend Unificado: FastAPI asíncrono en Python 3.11 con endpoints RESTful unificados y esquemas Pydantic compartidos.</a:t>
+            </a:r>
+          </a:p>
+          <a:p>
+            <a:pPr>
+              <a:defRPr sz="1050">
+                <a:solidFill>
+                  <a:srgbClr val="9EBAAB"/>
+                </a:solidFill>
+              </a:defRPr>
+            </a:pPr>
+            <a:r>
+              <a:t>• PostGIS Central: PostgreSQL espacial con índices R-Tree para resolver consultas de proximidad instantáneas en ambos clientes.</a:t>
+            </a:r>
+          </a:p>
+          <a:p>
+            <a:br/>
+            <a:pPr>
+              <a:defRPr sz="1000" i="1">
+                <a:solidFill>
+                  <a:srgbClr val="5CE698"/>
+                </a:solidFill>
+              </a:defRPr>
+            </a:pPr>
+            <a:r>
+              <a:t>🗣️ Qué decir al jurado: Estrategia multiplataforma: Mobile vs Web. Mobile en Android nativo con Kotlin es la herramienta de batalla en la camioneta: botones grandes...</a:t>
+            </a:r>
+          </a:p>
+        </p:txBody>
+      </p:sp>
+    </p:spTree>
+  </p:cSld>
+  <p:clrMapOvr>
+    <a:masterClrMapping/>
+  </p:clrMapOvr>
+</p:sld>
+</file>
+
+<file path=ppt/slides/slide14.xml><?xml version="1.0" encoding="utf-8"?>
+<p:sld xmlns:a="http://schemas.openxmlformats.org/drawingml/2006/main" xmlns:p="http://schemas.openxmlformats.org/presentationml/2006/main" xmlns:r="http://schemas.openxmlformats.org/officeDocument/2006/relationships">
+  <p:cSld>
+    <p:spTree>
+      <p:nvGrpSpPr>
+        <p:cNvPr id="1" name=""/>
+        <p:cNvGrpSpPr/>
+        <p:nvPr/>
+      </p:nvGrpSpPr>
+      <p:grpSpPr/>
+      <p:sp>
+        <p:nvSpPr>
+          <p:cNvPr id="2" name="Rectangle 1"/>
+          <p:cNvSpPr/>
+          <p:nvPr/>
+        </p:nvSpPr>
+        <p:spPr>
+          <a:xfrm>
+            <a:off x="0" y="0"/>
+            <a:ext cx="12191695" cy="6858000"/>
+          </a:xfrm>
+          <a:prstGeom prst="rect">
+            <a:avLst/>
+          </a:prstGeom>
+          <a:solidFill>
+            <a:srgbClr val="0B1711"/>
+          </a:solidFill>
+          <a:ln>
+            <a:noFill/>
+          </a:ln>
+        </p:spPr>
+        <p:style>
+          <a:lnRef idx="1">
+            <a:schemeClr val="accent1"/>
+          </a:lnRef>
+          <a:fillRef idx="3">
+            <a:schemeClr val="accent1"/>
+          </a:fillRef>
+          <a:effectRef idx="2">
+            <a:schemeClr val="accent1"/>
+          </a:effectRef>
+          <a:fontRef idx="minor">
+            <a:schemeClr val="lt1"/>
+          </a:fontRef>
+        </p:style>
+        <p:txBody>
+          <a:bodyPr rtlCol="0" anchor="ctr"/>
+          <a:lstStyle/>
+          <a:p>
+            <a:pPr algn="ctr"/>
+          </a:p>
+        </p:txBody>
+      </p:sp>
+      <p:sp>
+        <p:nvSpPr>
+          <p:cNvPr id="3" name="Rounded Rectangle 2"/>
+          <p:cNvSpPr/>
+          <p:nvPr/>
+        </p:nvSpPr>
+        <p:spPr>
+          <a:xfrm>
+            <a:off x="731520" y="365760"/>
+            <a:ext cx="2926080" cy="320040"/>
+          </a:xfrm>
+          <a:prstGeom prst="roundRect">
+            <a:avLst/>
+          </a:prstGeom>
+          <a:solidFill>
+            <a:srgbClr val="1B3428"/>
+          </a:solidFill>
+          <a:ln w="12700">
+            <a:solidFill>
+              <a:srgbClr val="F2B23E"/>
+            </a:solidFill>
+          </a:ln>
+        </p:spPr>
+        <p:style>
+          <a:lnRef idx="1">
+            <a:schemeClr val="accent1"/>
+          </a:lnRef>
+          <a:fillRef idx="3">
+            <a:schemeClr val="accent1"/>
+          </a:fillRef>
+          <a:effectRef idx="2">
+            <a:schemeClr val="accent1"/>
+          </a:effectRef>
+          <a:fontRef idx="minor">
+            <a:schemeClr val="lt1"/>
+          </a:fontRef>
+        </p:style>
+        <p:txBody>
+          <a:bodyPr rtlCol="0" anchor="ctr" wrap="square"/>
+          <a:lstStyle/>
+          <a:p>
+            <a:pPr algn="ctr">
+              <a:defRPr sz="1100" b="1">
+                <a:solidFill>
+                  <a:srgbClr val="F2B23E"/>
+                </a:solidFill>
+              </a:defRPr>
+            </a:pPr>
+            <a:r>
+              <a:t>🏆 Retorno &amp; Diferenciación</a:t>
+            </a:r>
+          </a:p>
+        </p:txBody>
+      </p:sp>
+      <p:sp>
+        <p:nvSpPr>
+          <p:cNvPr id="4" name="Rounded Rectangle 3"/>
+          <p:cNvSpPr/>
+          <p:nvPr/>
+        </p:nvSpPr>
+        <p:spPr>
+          <a:xfrm>
+            <a:off x="9601200" y="365760"/>
+            <a:ext cx="1828800" cy="320040"/>
+          </a:xfrm>
+          <a:prstGeom prst="roundRect">
+            <a:avLst/>
+          </a:prstGeom>
+          <a:solidFill>
+            <a:srgbClr val="1B3428"/>
+          </a:solidFill>
+          <a:ln w="12700">
+            <a:solidFill>
+              <a:srgbClr val="F2B23E"/>
+            </a:solidFill>
+          </a:ln>
+        </p:spPr>
+        <p:style>
+          <a:lnRef idx="1">
+            <a:schemeClr val="accent1"/>
+          </a:lnRef>
+          <a:fillRef idx="3">
+            <a:schemeClr val="accent1"/>
+          </a:fillRef>
+          <a:effectRef idx="2">
+            <a:schemeClr val="accent1"/>
+          </a:effectRef>
+          <a:fontRef idx="minor">
+            <a:schemeClr val="lt1"/>
+          </a:fontRef>
+        </p:style>
+        <p:txBody>
+          <a:bodyPr rtlCol="0" anchor="ctr"/>
+          <a:lstStyle/>
+          <a:p>
+            <a:pPr algn="ctr">
+              <a:defRPr sz="1100" b="1">
+                <a:solidFill>
+                  <a:srgbClr val="F2B23E"/>
+                </a:solidFill>
+              </a:defRPr>
+            </a:pPr>
+            <a:r>
+              <a:t>⏱️ 19:30 - 20:00</a:t>
+            </a:r>
+          </a:p>
+        </p:txBody>
+      </p:sp>
+      <p:sp>
+        <p:nvSpPr>
+          <p:cNvPr id="5" name="TextBox 4"/>
+          <p:cNvSpPr txBox="1"/>
+          <p:nvPr/>
+        </p:nvSpPr>
+        <p:spPr>
+          <a:xfrm>
+            <a:off x="731520" y="777240"/>
+            <a:ext cx="10698480" cy="548640"/>
+          </a:xfrm>
+          <a:prstGeom prst="rect">
+            <a:avLst/>
+          </a:prstGeom>
+          <a:noFill/>
+        </p:spPr>
+        <p:txBody>
+          <a:bodyPr wrap="none">
+            <a:spAutoFit/>
+          </a:bodyPr>
+          <a:lstStyle/>
+          <a:p>
+            <a:pPr>
+              <a:defRPr sz="2200" b="1">
+                <a:solidFill>
+                  <a:srgbClr val="F3F8F5"/>
+                </a:solidFill>
+              </a:defRPr>
+            </a:pPr>
+            <a:r>
+              <a:t>PLAG-OUT: Nosotros Anticipamos</a:t>
+            </a:r>
+          </a:p>
+        </p:txBody>
+      </p:sp>
+      <p:sp>
+        <p:nvSpPr>
+          <p:cNvPr id="6" name="Rounded Rectangle 5"/>
+          <p:cNvSpPr/>
+          <p:nvPr/>
+        </p:nvSpPr>
+        <p:spPr>
+          <a:xfrm>
+            <a:off x="731520" y="1463040"/>
+            <a:ext cx="3383280" cy="2011680"/>
+          </a:xfrm>
+          <a:prstGeom prst="roundRect">
+            <a:avLst/>
+          </a:prstGeom>
+          <a:solidFill>
+            <a:srgbClr val="14261D"/>
+          </a:solidFill>
+          <a:ln>
+            <a:solidFill>
+              <a:srgbClr val="284636"/>
+            </a:solidFill>
+          </a:ln>
+        </p:spPr>
+        <p:style>
+          <a:lnRef idx="1">
+            <a:schemeClr val="accent1"/>
+          </a:lnRef>
+          <a:fillRef idx="3">
+            <a:schemeClr val="accent1"/>
+          </a:fillRef>
+          <a:effectRef idx="2">
+            <a:schemeClr val="accent1"/>
+          </a:effectRef>
+          <a:fontRef idx="minor">
+            <a:schemeClr val="lt1"/>
+          </a:fontRef>
+        </p:style>
+        <p:txBody>
+          <a:bodyPr rtlCol="0" anchor="ctr" wrap="square"/>
+          <a:lstStyle/>
+          <a:p>
+            <a:pPr algn="ctr">
+              <a:defRPr sz="2800" b="1">
+                <a:solidFill>
+                  <a:srgbClr val="F2B23E"/>
+                </a:solidFill>
+              </a:defRPr>
+            </a:pPr>
+            <a:r>
+              <a:t>-25%</a:t>
+            </a:r>
+          </a:p>
+          <a:p>
+            <a:pPr algn="ctr">
+              <a:defRPr sz="1300" b="1">
+                <a:solidFill>
+                  <a:srgbClr val="F3F8F5"/>
+                </a:solidFill>
+              </a:defRPr>
+            </a:pPr>
+            <a:r>
+              <a:t>Costos Fitosanitarios</a:t>
+            </a:r>
+          </a:p>
+          <a:p>
+            <a:pPr algn="ctr">
+              <a:defRPr sz="1000">
+                <a:solidFill>
+                  <a:srgbClr val="9EBAAB"/>
+                </a:solidFill>
+              </a:defRPr>
+            </a:pPr>
+            <a:r>
+              <a:t>Al eliminar aplicaciones fuera de ventana en estadios invulnerables.</a:t>
+            </a:r>
+          </a:p>
+        </p:txBody>
+      </p:sp>
+      <p:sp>
+        <p:nvSpPr>
+          <p:cNvPr id="7" name="Rounded Rectangle 6"/>
+          <p:cNvSpPr/>
+          <p:nvPr/>
+        </p:nvSpPr>
+        <p:spPr>
+          <a:xfrm>
+            <a:off x="4343400" y="1463040"/>
+            <a:ext cx="3383280" cy="2011680"/>
+          </a:xfrm>
+          <a:prstGeom prst="roundRect">
+            <a:avLst/>
+          </a:prstGeom>
+          <a:solidFill>
+            <a:srgbClr val="14261D"/>
+          </a:solidFill>
+          <a:ln>
+            <a:solidFill>
+              <a:srgbClr val="284636"/>
+            </a:solidFill>
+          </a:ln>
+        </p:spPr>
+        <p:style>
+          <a:lnRef idx="1">
+            <a:schemeClr val="accent1"/>
+          </a:lnRef>
+          <a:fillRef idx="3">
+            <a:schemeClr val="accent1"/>
+          </a:fillRef>
+          <a:effectRef idx="2">
+            <a:schemeClr val="accent1"/>
+          </a:effectRef>
+          <a:fontRef idx="minor">
+            <a:schemeClr val="lt1"/>
+          </a:fontRef>
+        </p:style>
+        <p:txBody>
+          <a:bodyPr rtlCol="0" anchor="ctr" wrap="square"/>
+          <a:lstStyle/>
+          <a:p>
+            <a:pPr algn="ctr">
+              <a:defRPr sz="2800" b="1">
+                <a:solidFill>
+                  <a:srgbClr val="5CE698"/>
+                </a:solidFill>
+              </a:defRPr>
+            </a:pPr>
+            <a:r>
+              <a:t>+7 a 14 Días</a:t>
+            </a:r>
+          </a:p>
+          <a:p>
+            <a:pPr algn="ctr">
+              <a:defRPr sz="1300" b="1">
+                <a:solidFill>
+                  <a:srgbClr val="F3F8F5"/>
+                </a:solidFill>
+              </a:defRPr>
+            </a:pPr>
+            <a:r>
+              <a:t>Anticipación Bioclimática</a:t>
+            </a:r>
+          </a:p>
+          <a:p>
+            <a:pPr algn="ctr">
+              <a:defRPr sz="1000">
+                <a:solidFill>
+                  <a:srgbClr val="9EBAAB"/>
+                </a:solidFill>
+              </a:defRPr>
+            </a:pPr>
+            <a:r>
+              <a:t>Para contratar pulverizadoras y coordinar insumos sin urgencias.</a:t>
+            </a:r>
+          </a:p>
+        </p:txBody>
+      </p:sp>
+      <p:sp>
+        <p:nvSpPr>
+          <p:cNvPr id="8" name="Rounded Rectangle 7"/>
+          <p:cNvSpPr/>
+          <p:nvPr/>
+        </p:nvSpPr>
+        <p:spPr>
+          <a:xfrm>
+            <a:off x="7955280" y="1463040"/>
+            <a:ext cx="3383280" cy="2011680"/>
+          </a:xfrm>
+          <a:prstGeom prst="roundRect">
+            <a:avLst/>
+          </a:prstGeom>
+          <a:solidFill>
+            <a:srgbClr val="14261D"/>
+          </a:solidFill>
+          <a:ln>
+            <a:solidFill>
+              <a:srgbClr val="284636"/>
+            </a:solidFill>
+          </a:ln>
+        </p:spPr>
+        <p:style>
+          <a:lnRef idx="1">
+            <a:schemeClr val="accent1"/>
+          </a:lnRef>
+          <a:fillRef idx="3">
+            <a:schemeClr val="accent1"/>
+          </a:fillRef>
+          <a:effectRef idx="2">
+            <a:schemeClr val="accent1"/>
+          </a:effectRef>
+          <a:fontRef idx="minor">
+            <a:schemeClr val="lt1"/>
+          </a:fontRef>
+        </p:style>
+        <p:txBody>
+          <a:bodyPr rtlCol="0" anchor="ctr" wrap="square"/>
+          <a:lstStyle/>
+          <a:p>
+            <a:pPr algn="ctr">
+              <a:defRPr sz="2800" b="1">
+                <a:solidFill>
+                  <a:srgbClr val="5CADE6"/>
+                </a:solidFill>
+              </a:defRPr>
+            </a:pPr>
+            <a:r>
+              <a:t>100%</a:t>
+            </a:r>
+          </a:p>
+          <a:p>
+            <a:pPr algn="ctr">
+              <a:defRPr sz="1300" b="1">
+                <a:solidFill>
+                  <a:srgbClr val="F3F8F5"/>
+                </a:solidFill>
+              </a:defRPr>
+            </a:pPr>
+            <a:r>
+              <a:t>Registro Trazable</a:t>
+            </a:r>
+          </a:p>
+          <a:p>
+            <a:pPr algn="ctr">
+              <a:defRPr sz="1000">
+                <a:solidFill>
+                  <a:srgbClr val="9EBAAB"/>
+                </a:solidFill>
+              </a:defRPr>
+            </a:pPr>
+            <a:r>
+              <a:t>Digitalización auditable para certificar Buenas Prácticas Agrícolas.</a:t>
+            </a:r>
+          </a:p>
+        </p:txBody>
+      </p:sp>
+      <p:sp>
+        <p:nvSpPr>
+          <p:cNvPr id="9" name="Rounded Rectangle 8"/>
+          <p:cNvSpPr/>
+          <p:nvPr/>
+        </p:nvSpPr>
+        <p:spPr>
+          <a:xfrm>
+            <a:off x="731520" y="3657600"/>
+            <a:ext cx="10607040" cy="2560320"/>
+          </a:xfrm>
+          <a:prstGeom prst="roundRect">
+            <a:avLst/>
+          </a:prstGeom>
+          <a:solidFill>
+            <a:srgbClr val="14261D"/>
+          </a:solidFill>
+          <a:ln>
+            <a:solidFill>
+              <a:srgbClr val="284636"/>
+            </a:solidFill>
+          </a:ln>
+        </p:spPr>
+        <p:style>
+          <a:lnRef idx="1">
+            <a:schemeClr val="accent1"/>
+          </a:lnRef>
+          <a:fillRef idx="3">
+            <a:schemeClr val="accent1"/>
+          </a:fillRef>
+          <a:effectRef idx="2">
+            <a:schemeClr val="accent1"/>
+          </a:effectRef>
+          <a:fontRef idx="minor">
+            <a:schemeClr val="lt1"/>
+          </a:fontRef>
+        </p:style>
+        <p:txBody>
+          <a:bodyPr rtlCol="0" anchor="ctr" wrap="square"/>
+          <a:lstStyle/>
+          <a:p>
+            <a:pPr algn="ctr">
+              <a:defRPr sz="1300" b="1">
+                <a:solidFill>
+                  <a:srgbClr val="F2B23E"/>
+                </a:solidFill>
+              </a:defRPr>
+            </a:pPr>
+            <a:r>
+              <a:t>🎯 DIFERENCIACIÓN FRENTE AL MERCADO (xarvio, Auravant, FieldView):</a:t>
+            </a:r>
+          </a:p>
+          <a:p>
+            <a:pPr>
+              <a:defRPr sz="1100">
+                <a:solidFill>
+                  <a:srgbClr val="F3F8F5"/>
+                </a:solidFill>
+              </a:defRPr>
+            </a:pPr>
+            <a:r>
+              <a:t>• Detección Predictiva: Calculamos el estadio biológico por GDD antes de que el satélite vea la hoja comida.</a:t>
+            </a:r>
+            <a:br/>
+            <a:r>
+              <a:t>• Calibración Nacional: Modelos térmicos basados en ensayos del INTA y universidades argentinas.</a:t>
+            </a:r>
+            <a:br/>
+            <a:r>
+              <a:t>• Red Colaborativa: Monitoreo comunitario en anillo de 20 km anonimizado según Ley 25.326.</a:t>
+            </a:r>
+            <a:br/>
+            <a:br/>
+            <a:r>
+              <a:t>¡MUCHAS GRACIAS! Abrimos el espacio para preguntas de la mesa evaluadora.</a:t>
+            </a:r>
+            <a:br/>
+            <a:r>
+              <a:t>📚 Apéndice de Respaldo disponible a continuación: Fórmulas GDD, Modelos Plagas, Arquitectura, ML, Batch y Privacidad.</a:t>
+            </a:r>
+          </a:p>
+        </p:txBody>
+      </p:sp>
+    </p:spTree>
+  </p:cSld>
+  <p:clrMapOvr>
+    <a:masterClrMapping/>
+  </p:clrMapOvr>
+</p:sld>
+</file>
+
+<file path=ppt/slides/slide15.xml><?xml version="1.0" encoding="utf-8"?>
+<p:sld xmlns:a="http://schemas.openxmlformats.org/drawingml/2006/main" xmlns:p="http://schemas.openxmlformats.org/presentationml/2006/main" xmlns:r="http://schemas.openxmlformats.org/officeDocument/2006/relationships">
+  <p:cSld>
+    <p:spTree>
+      <p:nvGrpSpPr>
+        <p:cNvPr id="1" name=""/>
+        <p:cNvGrpSpPr/>
+        <p:nvPr/>
+      </p:nvGrpSpPr>
+      <p:grpSpPr/>
+      <p:sp>
+        <p:nvSpPr>
+          <p:cNvPr id="2" name="Rectangle 1"/>
+          <p:cNvSpPr/>
+          <p:nvPr/>
+        </p:nvSpPr>
+        <p:spPr>
+          <a:xfrm>
+            <a:off x="0" y="0"/>
+            <a:ext cx="12191695" cy="6858000"/>
+          </a:xfrm>
+          <a:prstGeom prst="rect">
+            <a:avLst/>
+          </a:prstGeom>
+          <a:solidFill>
+            <a:srgbClr val="0B1711"/>
+          </a:solidFill>
+          <a:ln>
+            <a:noFill/>
+          </a:ln>
+        </p:spPr>
+        <p:style>
+          <a:lnRef idx="1">
+            <a:schemeClr val="accent1"/>
+          </a:lnRef>
+          <a:fillRef idx="3">
+            <a:schemeClr val="accent1"/>
+          </a:fillRef>
+          <a:effectRef idx="2">
+            <a:schemeClr val="accent1"/>
+          </a:effectRef>
+          <a:fontRef idx="minor">
+            <a:schemeClr val="lt1"/>
+          </a:fontRef>
+        </p:style>
+        <p:txBody>
+          <a:bodyPr rtlCol="0" anchor="ctr"/>
+          <a:lstStyle/>
+          <a:p>
+            <a:pPr algn="ctr"/>
+          </a:p>
+        </p:txBody>
+      </p:sp>
+      <p:sp>
+        <p:nvSpPr>
+          <p:cNvPr id="3" name="Rounded Rectangle 2"/>
+          <p:cNvSpPr/>
+          <p:nvPr/>
+        </p:nvSpPr>
+        <p:spPr>
+          <a:xfrm>
+            <a:off x="731520" y="365760"/>
+            <a:ext cx="2926080" cy="320040"/>
+          </a:xfrm>
+          <a:prstGeom prst="roundRect">
+            <a:avLst/>
+          </a:prstGeom>
+          <a:solidFill>
+            <a:srgbClr val="1B3428"/>
+          </a:solidFill>
+          <a:ln w="12700">
+            <a:solidFill>
+              <a:srgbClr val="5CADE6"/>
+            </a:solidFill>
+          </a:ln>
+        </p:spPr>
+        <p:style>
+          <a:lnRef idx="1">
+            <a:schemeClr val="accent1"/>
+          </a:lnRef>
+          <a:fillRef idx="3">
+            <a:schemeClr val="accent1"/>
+          </a:fillRef>
+          <a:effectRef idx="2">
+            <a:schemeClr val="accent1"/>
+          </a:effectRef>
+          <a:fontRef idx="minor">
+            <a:schemeClr val="lt1"/>
+          </a:fontRef>
+        </p:style>
+        <p:txBody>
+          <a:bodyPr rtlCol="0" anchor="ctr" wrap="square"/>
+          <a:lstStyle/>
+          <a:p>
+            <a:pPr algn="ctr">
+              <a:defRPr sz="1100" b="1">
+                <a:solidFill>
+                  <a:srgbClr val="5CADE6"/>
+                </a:solidFill>
+              </a:defRPr>
+            </a:pPr>
+            <a:r>
+              <a:t>🧬 Apéndice B1 • Biológico</a:t>
+            </a:r>
+          </a:p>
+        </p:txBody>
+      </p:sp>
+      <p:sp>
+        <p:nvSpPr>
+          <p:cNvPr id="4" name="Rounded Rectangle 3"/>
+          <p:cNvSpPr/>
+          <p:nvPr/>
+        </p:nvSpPr>
+        <p:spPr>
+          <a:xfrm>
+            <a:off x="9601200" y="365760"/>
+            <a:ext cx="1828800" cy="320040"/>
+          </a:xfrm>
+          <a:prstGeom prst="roundRect">
+            <a:avLst/>
+          </a:prstGeom>
+          <a:solidFill>
+            <a:srgbClr val="1B3428"/>
+          </a:solidFill>
+          <a:ln w="12700">
+            <a:solidFill>
+              <a:srgbClr val="5CADE6"/>
+            </a:solidFill>
+          </a:ln>
+        </p:spPr>
+        <p:style>
+          <a:lnRef idx="1">
+            <a:schemeClr val="accent1"/>
+          </a:lnRef>
+          <a:fillRef idx="3">
+            <a:schemeClr val="accent1"/>
+          </a:fillRef>
+          <a:effectRef idx="2">
+            <a:schemeClr val="accent1"/>
+          </a:effectRef>
+          <a:fontRef idx="minor">
+            <a:schemeClr val="lt1"/>
+          </a:fontRef>
+        </p:style>
+        <p:txBody>
+          <a:bodyPr rtlCol="0" anchor="ctr"/>
+          <a:lstStyle/>
+          <a:p>
+            <a:pPr algn="ctr">
+              <a:defRPr sz="1100" b="1">
+                <a:solidFill>
+                  <a:srgbClr val="5CADE6"/>
+                </a:solidFill>
+              </a:defRPr>
+            </a:pPr>
+            <a:r>
+              <a:t>⏱️ Apéndice Q&amp;A</a:t>
+            </a:r>
+          </a:p>
+        </p:txBody>
+      </p:sp>
+      <p:sp>
+        <p:nvSpPr>
+          <p:cNvPr id="5" name="TextBox 4"/>
+          <p:cNvSpPr txBox="1"/>
+          <p:nvPr/>
+        </p:nvSpPr>
+        <p:spPr>
+          <a:xfrm>
+            <a:off x="731520" y="777240"/>
+            <a:ext cx="10698480" cy="548640"/>
+          </a:xfrm>
+          <a:prstGeom prst="rect">
+            <a:avLst/>
+          </a:prstGeom>
+          <a:noFill/>
+        </p:spPr>
+        <p:txBody>
+          <a:bodyPr wrap="none">
+            <a:spAutoFit/>
+          </a:bodyPr>
+          <a:lstStyle/>
+          <a:p>
+            <a:pPr>
+              <a:defRPr sz="2200" b="1">
+                <a:solidFill>
+                  <a:srgbClr val="F3F8F5"/>
+                </a:solidFill>
+              </a:defRPr>
+            </a:pPr>
+            <a:r>
+              <a:t>Dinámica y Fórmulas de Grados Día (GDD)</a:t>
+            </a:r>
+          </a:p>
+        </p:txBody>
+      </p:sp>
+      <p:sp>
+        <p:nvSpPr>
+          <p:cNvPr id="6" name="Rounded Rectangle 5"/>
+          <p:cNvSpPr/>
+          <p:nvPr/>
+        </p:nvSpPr>
+        <p:spPr>
+          <a:xfrm>
+            <a:off x="731520" y="1371600"/>
+            <a:ext cx="3291840" cy="5029200"/>
+          </a:xfrm>
+          <a:prstGeom prst="roundRect">
+            <a:avLst/>
+          </a:prstGeom>
+          <a:solidFill>
+            <a:srgbClr val="14261D"/>
+          </a:solidFill>
+          <a:ln w="12700">
+            <a:solidFill>
+              <a:srgbClr val="284636"/>
+            </a:solidFill>
+          </a:ln>
+        </p:spPr>
+        <p:style>
+          <a:lnRef idx="1">
+            <a:schemeClr val="accent1"/>
+          </a:lnRef>
+          <a:fillRef idx="3">
+            <a:schemeClr val="accent1"/>
+          </a:fillRef>
+          <a:effectRef idx="2">
+            <a:schemeClr val="accent1"/>
+          </a:effectRef>
+          <a:fontRef idx="minor">
+            <a:schemeClr val="lt1"/>
+          </a:fontRef>
+        </p:style>
+        <p:txBody>
+          <a:bodyPr rtlCol="0" anchor="ctr"/>
+          <a:lstStyle/>
+          <a:p>
+            <a:pPr algn="ctr"/>
+          </a:p>
+        </p:txBody>
+      </p:sp>
+      <p:pic>
+        <p:nvPicPr>
+          <p:cNvPr id="7" name="Picture 6" descr="09_plantaciones_cultivos.png"/>
+          <p:cNvPicPr>
+            <a:picLocks noChangeAspect="1"/>
+          </p:cNvPicPr>
+          <p:nvPr/>
+        </p:nvPicPr>
+        <p:blipFill>
+          <a:blip r:embed="rId2"/>
+          <a:stretch>
+            <a:fillRect/>
+          </a:stretch>
+        </p:blipFill>
+        <p:spPr>
+          <a:xfrm>
+            <a:off x="914400" y="1508760"/>
+            <a:ext cx="2926080" cy="6502400"/>
+          </a:xfrm>
+          <a:prstGeom prst="rect">
+            <a:avLst/>
+          </a:prstGeom>
+        </p:spPr>
+      </p:pic>
+      <p:sp>
+        <p:nvSpPr>
+          <p:cNvPr id="8" name="Rounded Rectangle 7"/>
+          <p:cNvSpPr/>
+          <p:nvPr/>
+        </p:nvSpPr>
+        <p:spPr>
+          <a:xfrm>
+            <a:off x="4297680" y="1371600"/>
+            <a:ext cx="7132320" cy="5029200"/>
+          </a:xfrm>
+          <a:prstGeom prst="roundRect">
+            <a:avLst/>
+          </a:prstGeom>
+          <a:solidFill>
+            <a:srgbClr val="14261D"/>
+          </a:solidFill>
+          <a:ln w="12700">
+            <a:solidFill>
+              <a:srgbClr val="284636"/>
+            </a:solidFill>
+          </a:ln>
+        </p:spPr>
+        <p:style>
+          <a:lnRef idx="1">
+            <a:schemeClr val="accent1"/>
+          </a:lnRef>
+          <a:fillRef idx="3">
+            <a:schemeClr val="accent1"/>
+          </a:fillRef>
+          <a:effectRef idx="2">
+            <a:schemeClr val="accent1"/>
+          </a:effectRef>
+          <a:fontRef idx="minor">
+            <a:schemeClr val="lt1"/>
+          </a:fontRef>
+        </p:style>
+        <p:txBody>
+          <a:bodyPr rtlCol="0" anchor="ctr" wrap="square"/>
+          <a:lstStyle/>
+          <a:p>
+            <a:pPr algn="ctr">
+              <a:defRPr sz="1400" b="1">
+                <a:solidFill>
+                  <a:srgbClr val="5CE698"/>
+                </a:solidFill>
+              </a:defRPr>
+            </a:pPr>
+            <a:r>
+              <a:t>Fundamentos matemáticos y biofísicos de la acumulación térmica en artrópodos</a:t>
+            </a:r>
+          </a:p>
+          <a:p>
+            <a:br/>
+            <a:pPr>
+              <a:defRPr sz="1300" b="1">
+                <a:solidFill>
+                  <a:srgbClr val="F2B23E"/>
+                </a:solidFill>
+              </a:defRPr>
+            </a:pPr>
+            <a:r>
+              <a:t>📐 Naturaleza Poiquilotérmica de los Insectos</a:t>
+            </a:r>
+          </a:p>
+          <a:p>
+            <a:pPr>
+              <a:defRPr sz="1100">
+                <a:solidFill>
+                  <a:srgbClr val="F3F8F5"/>
+                </a:solidFill>
+              </a:defRPr>
+            </a:pPr>
+            <a:r>
+              <a:t>Ecuación: GDD = max(0, (min(Tmax, Tcorte) + max(Tmin, Tb))/2 - Tb). La velocidad ontogénica depende del calor acumulado sobre Tb.</a:t>
+            </a:r>
+          </a:p>
+          <a:p>
+            <a:pPr>
+              <a:defRPr sz="1050">
+                <a:solidFill>
+                  <a:srgbClr val="9EBAAB"/>
+                </a:solidFill>
+              </a:defRPr>
+            </a:pPr>
+            <a:r>
+              <a:t>• Temperatura Base (Tb): Umbral térmico inferior por debajo del cual el desarrollo fisiológico se detiene por completo (diapausa).</a:t>
+            </a:r>
+          </a:p>
+          <a:p>
+            <a:pPr>
+              <a:defRPr sz="1050">
+                <a:solidFill>
+                  <a:srgbClr val="9EBAAB"/>
+                </a:solidFill>
+              </a:defRPr>
+            </a:pPr>
+            <a:r>
+              <a:t>• Integral Térmica (K): Cantidad fija de calor fisiológico requerida: K = Σ GDD para completar la fase de huevo a adulto.</a:t>
+            </a:r>
+          </a:p>
+          <a:p>
+            <a:pPr>
+              <a:defRPr sz="1050">
+                <a:solidFill>
+                  <a:srgbClr val="9EBAAB"/>
+                </a:solidFill>
+              </a:defRPr>
+            </a:pPr>
+            <a:r>
+              <a:t>• Desvíos Térmicos Invernales: Las anomalías cálidas de invierno aceleran la salida de diapausa, adelantando la primera generación.</a:t>
+            </a:r>
+          </a:p>
+          <a:p>
+            <a:pPr>
+              <a:defRPr sz="1050">
+                <a:solidFill>
+                  <a:srgbClr val="9EBAAB"/>
+                </a:solidFill>
+              </a:defRPr>
+            </a:pPr>
+            <a:r>
+              <a:t>• Ground Truth INTA: Validación empírica con estaciones experimentales agropecuarias de Pergamino y Manfredi.</a:t>
+            </a:r>
+          </a:p>
+          <a:p>
+            <a:br/>
+            <a:pPr>
+              <a:defRPr sz="1000" i="1">
+                <a:solidFill>
+                  <a:srgbClr val="5CE698"/>
+                </a:solidFill>
+              </a:defRPr>
+            </a:pPr>
+            <a:r>
+              <a:t>🗣️ Qué decir al jurado: Los insectos son ectotérmicos: no regulan su temperatura. La fórmula implementada es el promedio simple con corte. Tb es la temperatura base...</a:t>
+            </a:r>
+          </a:p>
+        </p:txBody>
+      </p:sp>
+    </p:spTree>
+  </p:cSld>
+  <p:clrMapOvr>
+    <a:masterClrMapping/>
+  </p:clrMapOvr>
+</p:sld>
+</file>
+
+<file path=ppt/slides/slide16.xml><?xml version="1.0" encoding="utf-8"?>
+<p:sld xmlns:a="http://schemas.openxmlformats.org/drawingml/2006/main" xmlns:p="http://schemas.openxmlformats.org/presentationml/2006/main" xmlns:r="http://schemas.openxmlformats.org/officeDocument/2006/relationships">
+  <p:cSld>
+    <p:spTree>
+      <p:nvGrpSpPr>
+        <p:cNvPr id="1" name=""/>
+        <p:cNvGrpSpPr/>
+        <p:nvPr/>
+      </p:nvGrpSpPr>
+      <p:grpSpPr/>
+      <p:sp>
+        <p:nvSpPr>
+          <p:cNvPr id="2" name="Rectangle 1"/>
+          <p:cNvSpPr/>
+          <p:nvPr/>
+        </p:nvSpPr>
+        <p:spPr>
+          <a:xfrm>
+            <a:off x="0" y="0"/>
+            <a:ext cx="12191695" cy="6858000"/>
+          </a:xfrm>
+          <a:prstGeom prst="rect">
+            <a:avLst/>
+          </a:prstGeom>
+          <a:solidFill>
+            <a:srgbClr val="0B1711"/>
+          </a:solidFill>
+          <a:ln>
+            <a:noFill/>
+          </a:ln>
+        </p:spPr>
+        <p:style>
+          <a:lnRef idx="1">
+            <a:schemeClr val="accent1"/>
+          </a:lnRef>
+          <a:fillRef idx="3">
+            <a:schemeClr val="accent1"/>
+          </a:fillRef>
+          <a:effectRef idx="2">
+            <a:schemeClr val="accent1"/>
+          </a:effectRef>
+          <a:fontRef idx="minor">
+            <a:schemeClr val="lt1"/>
+          </a:fontRef>
+        </p:style>
+        <p:txBody>
+          <a:bodyPr rtlCol="0" anchor="ctr"/>
+          <a:lstStyle/>
+          <a:p>
+            <a:pPr algn="ctr"/>
+          </a:p>
+        </p:txBody>
+      </p:sp>
+      <p:sp>
+        <p:nvSpPr>
+          <p:cNvPr id="3" name="Rounded Rectangle 2"/>
+          <p:cNvSpPr/>
+          <p:nvPr/>
+        </p:nvSpPr>
+        <p:spPr>
+          <a:xfrm>
+            <a:off x="731520" y="365760"/>
+            <a:ext cx="2926080" cy="320040"/>
+          </a:xfrm>
+          <a:prstGeom prst="roundRect">
+            <a:avLst/>
+          </a:prstGeom>
+          <a:solidFill>
+            <a:srgbClr val="1B3428"/>
+          </a:solidFill>
+          <a:ln w="12700">
+            <a:solidFill>
+              <a:srgbClr val="5CADE6"/>
+            </a:solidFill>
+          </a:ln>
+        </p:spPr>
+        <p:style>
+          <a:lnRef idx="1">
+            <a:schemeClr val="accent1"/>
+          </a:lnRef>
+          <a:fillRef idx="3">
+            <a:schemeClr val="accent1"/>
+          </a:fillRef>
+          <a:effectRef idx="2">
+            <a:schemeClr val="accent1"/>
+          </a:effectRef>
+          <a:fontRef idx="minor">
+            <a:schemeClr val="lt1"/>
+          </a:fontRef>
+        </p:style>
+        <p:txBody>
+          <a:bodyPr rtlCol="0" anchor="ctr" wrap="square"/>
+          <a:lstStyle/>
+          <a:p>
+            <a:pPr algn="ctr">
+              <a:defRPr sz="1100" b="1">
+                <a:solidFill>
+                  <a:srgbClr val="5CADE6"/>
+                </a:solidFill>
+              </a:defRPr>
+            </a:pPr>
+            <a:r>
+              <a:t>🧬 Apéndice B2 • Biológico</a:t>
+            </a:r>
+          </a:p>
+        </p:txBody>
+      </p:sp>
+      <p:sp>
+        <p:nvSpPr>
+          <p:cNvPr id="4" name="Rounded Rectangle 3"/>
+          <p:cNvSpPr/>
+          <p:nvPr/>
+        </p:nvSpPr>
+        <p:spPr>
+          <a:xfrm>
+            <a:off x="9601200" y="365760"/>
+            <a:ext cx="1828800" cy="320040"/>
+          </a:xfrm>
+          <a:prstGeom prst="roundRect">
+            <a:avLst/>
+          </a:prstGeom>
+          <a:solidFill>
+            <a:srgbClr val="1B3428"/>
+          </a:solidFill>
+          <a:ln w="12700">
+            <a:solidFill>
+              <a:srgbClr val="5CADE6"/>
+            </a:solidFill>
+          </a:ln>
+        </p:spPr>
+        <p:style>
+          <a:lnRef idx="1">
+            <a:schemeClr val="accent1"/>
+          </a:lnRef>
+          <a:fillRef idx="3">
+            <a:schemeClr val="accent1"/>
+          </a:fillRef>
+          <a:effectRef idx="2">
+            <a:schemeClr val="accent1"/>
+          </a:effectRef>
+          <a:fontRef idx="minor">
+            <a:schemeClr val="lt1"/>
+          </a:fontRef>
+        </p:style>
+        <p:txBody>
+          <a:bodyPr rtlCol="0" anchor="ctr"/>
+          <a:lstStyle/>
+          <a:p>
+            <a:pPr algn="ctr">
+              <a:defRPr sz="1100" b="1">
+                <a:solidFill>
+                  <a:srgbClr val="5CADE6"/>
+                </a:solidFill>
+              </a:defRPr>
+            </a:pPr>
+            <a:r>
+              <a:t>⏱️ Apéndice Q&amp;A</a:t>
+            </a:r>
+          </a:p>
+        </p:txBody>
+      </p:sp>
+      <p:sp>
+        <p:nvSpPr>
+          <p:cNvPr id="5" name="TextBox 4"/>
+          <p:cNvSpPr txBox="1"/>
+          <p:nvPr/>
+        </p:nvSpPr>
+        <p:spPr>
+          <a:xfrm>
+            <a:off x="731520" y="777240"/>
+            <a:ext cx="10698480" cy="548640"/>
+          </a:xfrm>
+          <a:prstGeom prst="rect">
+            <a:avLst/>
+          </a:prstGeom>
+          <a:noFill/>
+        </p:spPr>
+        <p:txBody>
+          <a:bodyPr wrap="none">
+            <a:spAutoFit/>
+          </a:bodyPr>
+          <a:lstStyle/>
+          <a:p>
+            <a:pPr>
+              <a:defRPr sz="2200" b="1">
+                <a:solidFill>
+                  <a:srgbClr val="F3F8F5"/>
+                </a:solidFill>
+              </a:defRPr>
+            </a:pPr>
+            <a:r>
+              <a:t>Modelos Fenológicos y Ventanas de Eficacia</a:t>
+            </a:r>
+          </a:p>
+        </p:txBody>
+      </p:sp>
+      <p:sp>
+        <p:nvSpPr>
+          <p:cNvPr id="6" name="Rounded Rectangle 5"/>
+          <p:cNvSpPr/>
+          <p:nvPr/>
+        </p:nvSpPr>
+        <p:spPr>
+          <a:xfrm>
+            <a:off x="731520" y="1371600"/>
+            <a:ext cx="3291840" cy="5029200"/>
+          </a:xfrm>
+          <a:prstGeom prst="roundRect">
+            <a:avLst/>
+          </a:prstGeom>
+          <a:solidFill>
+            <a:srgbClr val="14261D"/>
+          </a:solidFill>
+          <a:ln w="12700">
+            <a:solidFill>
+              <a:srgbClr val="284636"/>
+            </a:solidFill>
+          </a:ln>
+        </p:spPr>
+        <p:style>
+          <a:lnRef idx="1">
+            <a:schemeClr val="accent1"/>
+          </a:lnRef>
+          <a:fillRef idx="3">
+            <a:schemeClr val="accent1"/>
+          </a:fillRef>
+          <a:effectRef idx="2">
+            <a:schemeClr val="accent1"/>
+          </a:effectRef>
+          <a:fontRef idx="minor">
+            <a:schemeClr val="lt1"/>
+          </a:fontRef>
+        </p:style>
+        <p:txBody>
+          <a:bodyPr rtlCol="0" anchor="ctr"/>
+          <a:lstStyle/>
+          <a:p>
+            <a:pPr algn="ctr"/>
+          </a:p>
+        </p:txBody>
+      </p:sp>
+      <p:pic>
+        <p:nvPicPr>
+          <p:cNvPr id="7" name="Picture 6" descr="06_tablero_control.png"/>
+          <p:cNvPicPr>
+            <a:picLocks noChangeAspect="1"/>
+          </p:cNvPicPr>
+          <p:nvPr/>
+        </p:nvPicPr>
+        <p:blipFill>
+          <a:blip r:embed="rId2"/>
+          <a:stretch>
+            <a:fillRect/>
+          </a:stretch>
+        </p:blipFill>
+        <p:spPr>
+          <a:xfrm>
+            <a:off x="914400" y="1508760"/>
+            <a:ext cx="2926080" cy="6502400"/>
+          </a:xfrm>
+          <a:prstGeom prst="rect">
+            <a:avLst/>
+          </a:prstGeom>
+        </p:spPr>
+      </p:pic>
+      <p:sp>
+        <p:nvSpPr>
+          <p:cNvPr id="8" name="Rounded Rectangle 7"/>
+          <p:cNvSpPr/>
+          <p:nvPr/>
+        </p:nvSpPr>
+        <p:spPr>
+          <a:xfrm>
+            <a:off x="4297680" y="1371600"/>
+            <a:ext cx="7132320" cy="5029200"/>
+          </a:xfrm>
+          <a:prstGeom prst="roundRect">
+            <a:avLst/>
+          </a:prstGeom>
+          <a:solidFill>
+            <a:srgbClr val="14261D"/>
+          </a:solidFill>
+          <a:ln w="12700">
+            <a:solidFill>
+              <a:srgbClr val="284636"/>
+            </a:solidFill>
+          </a:ln>
+        </p:spPr>
+        <p:style>
+          <a:lnRef idx="1">
+            <a:schemeClr val="accent1"/>
+          </a:lnRef>
+          <a:fillRef idx="3">
+            <a:schemeClr val="accent1"/>
+          </a:fillRef>
+          <a:effectRef idx="2">
+            <a:schemeClr val="accent1"/>
+          </a:effectRef>
+          <a:fontRef idx="minor">
+            <a:schemeClr val="lt1"/>
+          </a:fontRef>
+        </p:style>
+        <p:txBody>
+          <a:bodyPr rtlCol="0" anchor="ctr" wrap="square"/>
+          <a:lstStyle/>
+          <a:p>
+            <a:pPr algn="ctr">
+              <a:defRPr sz="1400" b="1">
+                <a:solidFill>
+                  <a:srgbClr val="5CE698"/>
+                </a:solidFill>
+              </a:defRPr>
+            </a:pPr>
+            <a:r>
+              <a:t>Biofísica de la susceptibilidad ontogénica y reducción del impacto químico</a:t>
+            </a:r>
+          </a:p>
+          <a:p>
+            <a:br/>
+            <a:pPr>
+              <a:defRPr sz="1300" b="1">
+                <a:solidFill>
+                  <a:srgbClr val="F2B23E"/>
+                </a:solidFill>
+              </a:defRPr>
+            </a:pPr>
+            <a:r>
+              <a:t>🎯 Por qué Falla el Control Fuera de la Ventana</a:t>
+            </a:r>
+          </a:p>
+          <a:p>
+            <a:pPr>
+              <a:defRPr sz="1100">
+                <a:solidFill>
+                  <a:srgbClr val="F3F8F5"/>
+                </a:solidFill>
+              </a:defRPr>
+            </a:pPr>
+            <a:r>
+              <a:t>En huevo o adulto se desperdicia el 80% del fitosanitario. Solo en estadios larvales L1-L3 se logra 90-95% de mortandad con dosis bajas.</a:t>
+            </a:r>
+          </a:p>
+          <a:p>
+            <a:pPr>
+              <a:defRPr sz="1050">
+                <a:solidFill>
+                  <a:srgbClr val="9EBAAB"/>
+                </a:solidFill>
+              </a:defRPr>
+            </a:pPr>
+            <a:r>
+              <a:t>• Huevo (Incubación): Corion impermeable a insecticidas de contacto. Aplicar acá destruye parasitoides benéficos y no mata la plaga.</a:t>
+            </a:r>
+          </a:p>
+          <a:p>
+            <a:pPr>
+              <a:defRPr sz="1050">
+                <a:solidFill>
+                  <a:srgbClr val="9EBAAB"/>
+                </a:solidFill>
+              </a:defRPr>
+            </a:pPr>
+            <a:r>
+              <a:t>• Larva Chica (L1 - L3): Cutícula permeable, alimentación foliar voraz y máxima susceptibilidad a dosis reducidas de IGR o Bt.</a:t>
+            </a:r>
+          </a:p>
+          <a:p>
+            <a:pPr>
+              <a:defRPr sz="1050">
+                <a:solidFill>
+                  <a:srgbClr val="9EBAAB"/>
+                </a:solidFill>
+              </a:defRPr>
+            </a:pPr>
+            <a:r>
+              <a:t>• Larva Grande / Adulto: Ingreso en cogollo o vainas, cutícula endurecida y detoxificación enzimática activa. Daño ya producido.</a:t>
+            </a:r>
+          </a:p>
+          <a:p>
+            <a:pPr>
+              <a:defRPr sz="1050">
+                <a:solidFill>
+                  <a:srgbClr val="9EBAAB"/>
+                </a:solidFill>
+              </a:defRPr>
+            </a:pPr>
+            <a:r>
+              <a:t>• Etapas Críticas: Vincular eclosión con V1-V6 en maíz o R1-R5 en soja evita la pérdida irreversible de componentes del rinde.</a:t>
+            </a:r>
+          </a:p>
+          <a:p>
+            <a:br/>
+            <a:pPr>
+              <a:defRPr sz="1000" i="1">
+                <a:solidFill>
+                  <a:srgbClr val="5CE698"/>
+                </a:solidFill>
+              </a:defRPr>
+            </a:pPr>
+            <a:r>
+              <a:t>🗣️ Qué decir al jurado: ¿Por qué la ventana es tan estrecha? Por la cutícula del insecto. En huevo, el corion es impermeable a insecticidas de contacto: eficacia 10...</a:t>
+            </a:r>
+          </a:p>
+        </p:txBody>
+      </p:sp>
+    </p:spTree>
+  </p:cSld>
+  <p:clrMapOvr>
+    <a:masterClrMapping/>
+  </p:clrMapOvr>
+</p:sld>
+</file>
+
+<file path=ppt/slides/slide17.xml><?xml version="1.0" encoding="utf-8"?>
+<p:sld xmlns:a="http://schemas.openxmlformats.org/drawingml/2006/main" xmlns:p="http://schemas.openxmlformats.org/presentationml/2006/main" xmlns:r="http://schemas.openxmlformats.org/officeDocument/2006/relationships">
+  <p:cSld>
+    <p:spTree>
+      <p:nvGrpSpPr>
+        <p:cNvPr id="1" name=""/>
+        <p:cNvGrpSpPr/>
+        <p:nvPr/>
+      </p:nvGrpSpPr>
+      <p:grpSpPr/>
+      <p:sp>
+        <p:nvSpPr>
+          <p:cNvPr id="2" name="Rectangle 1"/>
+          <p:cNvSpPr/>
+          <p:nvPr/>
+        </p:nvSpPr>
+        <p:spPr>
+          <a:xfrm>
+            <a:off x="0" y="0"/>
+            <a:ext cx="12191695" cy="6858000"/>
+          </a:xfrm>
+          <a:prstGeom prst="rect">
+            <a:avLst/>
+          </a:prstGeom>
+          <a:solidFill>
+            <a:srgbClr val="0B1711"/>
+          </a:solidFill>
+          <a:ln>
+            <a:noFill/>
+          </a:ln>
+        </p:spPr>
+        <p:style>
+          <a:lnRef idx="1">
+            <a:schemeClr val="accent1"/>
+          </a:lnRef>
+          <a:fillRef idx="3">
+            <a:schemeClr val="accent1"/>
+          </a:fillRef>
+          <a:effectRef idx="2">
+            <a:schemeClr val="accent1"/>
+          </a:effectRef>
+          <a:fontRef idx="minor">
+            <a:schemeClr val="lt1"/>
+          </a:fontRef>
+        </p:style>
+        <p:txBody>
+          <a:bodyPr rtlCol="0" anchor="ctr"/>
+          <a:lstStyle/>
+          <a:p>
+            <a:pPr algn="ctr"/>
+          </a:p>
+        </p:txBody>
+      </p:sp>
+      <p:sp>
+        <p:nvSpPr>
+          <p:cNvPr id="3" name="Rounded Rectangle 2"/>
+          <p:cNvSpPr/>
+          <p:nvPr/>
+        </p:nvSpPr>
+        <p:spPr>
+          <a:xfrm>
+            <a:off x="731520" y="365760"/>
+            <a:ext cx="2926080" cy="320040"/>
+          </a:xfrm>
+          <a:prstGeom prst="roundRect">
+            <a:avLst/>
+          </a:prstGeom>
+          <a:solidFill>
+            <a:srgbClr val="1B3428"/>
+          </a:solidFill>
+          <a:ln w="12700">
+            <a:solidFill>
+              <a:srgbClr val="5CADE6"/>
+            </a:solidFill>
+          </a:ln>
+        </p:spPr>
+        <p:style>
+          <a:lnRef idx="1">
+            <a:schemeClr val="accent1"/>
+          </a:lnRef>
+          <a:fillRef idx="3">
+            <a:schemeClr val="accent1"/>
+          </a:fillRef>
+          <a:effectRef idx="2">
+            <a:schemeClr val="accent1"/>
+          </a:effectRef>
+          <a:fontRef idx="minor">
+            <a:schemeClr val="lt1"/>
+          </a:fontRef>
+        </p:style>
+        <p:txBody>
+          <a:bodyPr rtlCol="0" anchor="ctr" wrap="square"/>
+          <a:lstStyle/>
+          <a:p>
+            <a:pPr algn="ctr">
+              <a:defRPr sz="1100" b="1">
+                <a:solidFill>
+                  <a:srgbClr val="5CADE6"/>
+                </a:solidFill>
+              </a:defRPr>
+            </a:pPr>
+            <a:r>
+              <a:t>💻 Apéndice T1 • Técnico</a:t>
+            </a:r>
+          </a:p>
+        </p:txBody>
+      </p:sp>
+      <p:sp>
+        <p:nvSpPr>
+          <p:cNvPr id="4" name="Rounded Rectangle 3"/>
+          <p:cNvSpPr/>
+          <p:nvPr/>
+        </p:nvSpPr>
+        <p:spPr>
+          <a:xfrm>
+            <a:off x="9601200" y="365760"/>
+            <a:ext cx="1828800" cy="320040"/>
+          </a:xfrm>
+          <a:prstGeom prst="roundRect">
+            <a:avLst/>
+          </a:prstGeom>
+          <a:solidFill>
+            <a:srgbClr val="1B3428"/>
+          </a:solidFill>
+          <a:ln w="12700">
+            <a:solidFill>
+              <a:srgbClr val="5CADE6"/>
+            </a:solidFill>
+          </a:ln>
+        </p:spPr>
+        <p:style>
+          <a:lnRef idx="1">
+            <a:schemeClr val="accent1"/>
+          </a:lnRef>
+          <a:fillRef idx="3">
+            <a:schemeClr val="accent1"/>
+          </a:fillRef>
+          <a:effectRef idx="2">
+            <a:schemeClr val="accent1"/>
+          </a:effectRef>
+          <a:fontRef idx="minor">
+            <a:schemeClr val="lt1"/>
+          </a:fontRef>
+        </p:style>
+        <p:txBody>
+          <a:bodyPr rtlCol="0" anchor="ctr"/>
+          <a:lstStyle/>
+          <a:p>
+            <a:pPr algn="ctr">
+              <a:defRPr sz="1100" b="1">
+                <a:solidFill>
+                  <a:srgbClr val="5CADE6"/>
+                </a:solidFill>
+              </a:defRPr>
+            </a:pPr>
+            <a:r>
+              <a:t>⏱️ Apéndice Q&amp;A</a:t>
+            </a:r>
+          </a:p>
+        </p:txBody>
+      </p:sp>
+      <p:sp>
+        <p:nvSpPr>
+          <p:cNvPr id="5" name="TextBox 4"/>
+          <p:cNvSpPr txBox="1"/>
+          <p:nvPr/>
+        </p:nvSpPr>
+        <p:spPr>
+          <a:xfrm>
+            <a:off x="731520" y="777240"/>
+            <a:ext cx="10698480" cy="548640"/>
+          </a:xfrm>
+          <a:prstGeom prst="rect">
+            <a:avLst/>
+          </a:prstGeom>
+          <a:noFill/>
+        </p:spPr>
+        <p:txBody>
+          <a:bodyPr wrap="none">
+            <a:spAutoFit/>
+          </a:bodyPr>
+          <a:lstStyle/>
+          <a:p>
+            <a:pPr>
+              <a:defRPr sz="2200" b="1">
+                <a:solidFill>
+                  <a:srgbClr val="F3F8F5"/>
+                </a:solidFill>
+              </a:defRPr>
+            </a:pPr>
+            <a:r>
+              <a:t>Arquitectura General &amp; Resiliencia Offline</a:t>
+            </a:r>
+          </a:p>
+        </p:txBody>
+      </p:sp>
+      <p:sp>
+        <p:nvSpPr>
+          <p:cNvPr id="6" name="Rounded Rectangle 5"/>
+          <p:cNvSpPr/>
+          <p:nvPr/>
+        </p:nvSpPr>
+        <p:spPr>
+          <a:xfrm>
+            <a:off x="731520" y="1371600"/>
+            <a:ext cx="3291840" cy="5029200"/>
+          </a:xfrm>
+          <a:prstGeom prst="roundRect">
+            <a:avLst/>
+          </a:prstGeom>
+          <a:solidFill>
+            <a:srgbClr val="14261D"/>
+          </a:solidFill>
+          <a:ln w="12700">
+            <a:solidFill>
+              <a:srgbClr val="284636"/>
+            </a:solidFill>
+          </a:ln>
+        </p:spPr>
+        <p:style>
+          <a:lnRef idx="1">
+            <a:schemeClr val="accent1"/>
+          </a:lnRef>
+          <a:fillRef idx="3">
+            <a:schemeClr val="accent1"/>
+          </a:fillRef>
+          <a:effectRef idx="2">
+            <a:schemeClr val="accent1"/>
+          </a:effectRef>
+          <a:fontRef idx="minor">
+            <a:schemeClr val="lt1"/>
+          </a:fontRef>
+        </p:style>
+        <p:txBody>
+          <a:bodyPr rtlCol="0" anchor="ctr"/>
+          <a:lstStyle/>
+          <a:p>
+            <a:pPr algn="ctr"/>
+          </a:p>
+        </p:txBody>
+      </p:sp>
+      <p:pic>
+        <p:nvPicPr>
+          <p:cNvPr id="7" name="Picture 6" descr="01_gestion_terrenos.png"/>
+          <p:cNvPicPr>
+            <a:picLocks noChangeAspect="1"/>
+          </p:cNvPicPr>
+          <p:nvPr/>
+        </p:nvPicPr>
+        <p:blipFill>
+          <a:blip r:embed="rId2"/>
+          <a:stretch>
+            <a:fillRect/>
+          </a:stretch>
+        </p:blipFill>
+        <p:spPr>
+          <a:xfrm>
+            <a:off x="914400" y="1508760"/>
+            <a:ext cx="2926080" cy="6502400"/>
+          </a:xfrm>
+          <a:prstGeom prst="rect">
+            <a:avLst/>
+          </a:prstGeom>
+        </p:spPr>
+      </p:pic>
+      <p:sp>
+        <p:nvSpPr>
+          <p:cNvPr id="8" name="Rounded Rectangle 7"/>
+          <p:cNvSpPr/>
+          <p:nvPr/>
+        </p:nvSpPr>
+        <p:spPr>
+          <a:xfrm>
+            <a:off x="4297680" y="1371600"/>
+            <a:ext cx="7132320" cy="5029200"/>
+          </a:xfrm>
+          <a:prstGeom prst="roundRect">
+            <a:avLst/>
+          </a:prstGeom>
+          <a:solidFill>
+            <a:srgbClr val="14261D"/>
+          </a:solidFill>
+          <a:ln w="12700">
+            <a:solidFill>
+              <a:srgbClr val="284636"/>
+            </a:solidFill>
+          </a:ln>
+        </p:spPr>
+        <p:style>
+          <a:lnRef idx="1">
+            <a:schemeClr val="accent1"/>
+          </a:lnRef>
+          <a:fillRef idx="3">
+            <a:schemeClr val="accent1"/>
+          </a:fillRef>
+          <a:effectRef idx="2">
+            <a:schemeClr val="accent1"/>
+          </a:effectRef>
+          <a:fontRef idx="minor">
+            <a:schemeClr val="lt1"/>
+          </a:fontRef>
+        </p:style>
+        <p:txBody>
+          <a:bodyPr rtlCol="0" anchor="ctr" wrap="square"/>
+          <a:lstStyle/>
+          <a:p>
+            <a:pPr algn="ctr">
+              <a:defRPr sz="1400" b="1">
+                <a:solidFill>
+                  <a:srgbClr val="5CE698"/>
+                </a:solidFill>
+              </a:defRPr>
+            </a:pPr>
+            <a:r>
+              <a:t>Diseño desacoplado, persistencia transaccional y consultas espaciales de alta performance</a:t>
+            </a:r>
+          </a:p>
+          <a:p>
+            <a:br/>
+            <a:pPr>
+              <a:defRPr sz="1300" b="1">
+                <a:solidFill>
+                  <a:srgbClr val="F2B23E"/>
+                </a:solidFill>
+              </a:defRPr>
+            </a:pPr>
+            <a:r>
+              <a:t>📡 Resiliencia en Ambientes Rurales Sin Conectividad</a:t>
+            </a:r>
+          </a:p>
+          <a:p>
+            <a:pPr>
+              <a:defRPr sz="1100">
+                <a:solidFill>
+                  <a:srgbClr val="F3F8F5"/>
+                </a:solidFill>
+              </a:defRPr>
+            </a:pPr>
+            <a:r>
+              <a:t>Patrón Clean Architecture y MVVM en Android Kotlin, persistencia Room, WorkManager, FastAPI y PostgreSQL con PostGIS.</a:t>
+            </a:r>
+          </a:p>
+          <a:p>
+            <a:pPr>
+              <a:defRPr sz="1050">
+                <a:solidFill>
+                  <a:srgbClr val="9EBAAB"/>
+                </a:solidFill>
+              </a:defRPr>
+            </a:pPr>
+            <a:r>
+              <a:t>• Room + UUID Local: Generación de UUIDs en cliente y persistencia previa con estado PENDIENTE_ENVIO antes de intentar la red.</a:t>
+            </a:r>
+          </a:p>
+          <a:p>
+            <a:pPr>
+              <a:defRPr sz="1050">
+                <a:solidFill>
+                  <a:srgbClr val="9EBAAB"/>
+                </a:solidFill>
+              </a:defRPr>
+            </a:pPr>
+            <a:r>
+              <a:t>• WorkManager Sync: Gestión de reintentos exponenciales garantizando que no se dupliquen reportes ni se pierdan datos.</a:t>
+            </a:r>
+          </a:p>
+          <a:p>
+            <a:pPr>
+              <a:defRPr sz="1050">
+                <a:solidFill>
+                  <a:srgbClr val="9EBAAB"/>
+                </a:solidFill>
+              </a:defRPr>
+            </a:pPr>
+            <a:r>
+              <a:t>• FastAPI Asíncrono: Procesamiento concurrente no bloqueante capaz de manejar miles de peticiones simultáneas con bajo consumo.</a:t>
+            </a:r>
+          </a:p>
+          <a:p>
+            <a:pPr>
+              <a:defRPr sz="1050">
+                <a:solidFill>
+                  <a:srgbClr val="9EBAAB"/>
+                </a:solidFill>
+              </a:defRPr>
+            </a:pPr>
+            <a:r>
+              <a:t>• PostGIS ST_DWithin: Búsqueda espacial indexada sobre coordenadas esféricas para calcular el radio comunitario en menos de 5 ms.</a:t>
+            </a:r>
+          </a:p>
+          <a:p>
+            <a:br/>
+            <a:pPr>
+              <a:defRPr sz="1000" i="1">
+                <a:solidFill>
+                  <a:srgbClr val="5CE698"/>
+                </a:solidFill>
+              </a:defRPr>
+            </a:pPr>
+            <a:r>
+              <a:t>🗣️ Qué decir al jurado: Arquitectura técnica: Clean Architecture y MVVM en Kotlin con Jetpack Compose. Para tolerar la falta de conectividad usamos Room SQLite con ...</a:t>
+            </a:r>
+          </a:p>
+        </p:txBody>
+      </p:sp>
+    </p:spTree>
+  </p:cSld>
+  <p:clrMapOvr>
+    <a:masterClrMapping/>
+  </p:clrMapOvr>
+</p:sld>
+</file>
+
+<file path=ppt/slides/slide18.xml><?xml version="1.0" encoding="utf-8"?>
+<p:sld xmlns:a="http://schemas.openxmlformats.org/drawingml/2006/main" xmlns:p="http://schemas.openxmlformats.org/presentationml/2006/main" xmlns:r="http://schemas.openxmlformats.org/officeDocument/2006/relationships">
+  <p:cSld>
+    <p:spTree>
+      <p:nvGrpSpPr>
+        <p:cNvPr id="1" name=""/>
+        <p:cNvGrpSpPr/>
+        <p:nvPr/>
+      </p:nvGrpSpPr>
+      <p:grpSpPr/>
+      <p:sp>
+        <p:nvSpPr>
+          <p:cNvPr id="2" name="Rectangle 1"/>
+          <p:cNvSpPr/>
+          <p:nvPr/>
+        </p:nvSpPr>
+        <p:spPr>
+          <a:xfrm>
+            <a:off x="0" y="0"/>
+            <a:ext cx="12191695" cy="6858000"/>
+          </a:xfrm>
+          <a:prstGeom prst="rect">
+            <a:avLst/>
+          </a:prstGeom>
+          <a:solidFill>
+            <a:srgbClr val="0B1711"/>
+          </a:solidFill>
+          <a:ln>
+            <a:noFill/>
+          </a:ln>
+        </p:spPr>
+        <p:style>
+          <a:lnRef idx="1">
+            <a:schemeClr val="accent1"/>
+          </a:lnRef>
+          <a:fillRef idx="3">
+            <a:schemeClr val="accent1"/>
+          </a:fillRef>
+          <a:effectRef idx="2">
+            <a:schemeClr val="accent1"/>
+          </a:effectRef>
+          <a:fontRef idx="minor">
+            <a:schemeClr val="lt1"/>
+          </a:fontRef>
+        </p:style>
+        <p:txBody>
+          <a:bodyPr rtlCol="0" anchor="ctr"/>
+          <a:lstStyle/>
+          <a:p>
+            <a:pPr algn="ctr"/>
+          </a:p>
+        </p:txBody>
+      </p:sp>
+      <p:sp>
+        <p:nvSpPr>
+          <p:cNvPr id="3" name="Rounded Rectangle 2"/>
+          <p:cNvSpPr/>
+          <p:nvPr/>
+        </p:nvSpPr>
+        <p:spPr>
+          <a:xfrm>
+            <a:off x="731520" y="365760"/>
+            <a:ext cx="2926080" cy="320040"/>
+          </a:xfrm>
+          <a:prstGeom prst="roundRect">
+            <a:avLst/>
+          </a:prstGeom>
+          <a:solidFill>
+            <a:srgbClr val="1B3428"/>
+          </a:solidFill>
+          <a:ln w="12700">
+            <a:solidFill>
+              <a:srgbClr val="5CADE6"/>
+            </a:solidFill>
+          </a:ln>
+        </p:spPr>
+        <p:style>
+          <a:lnRef idx="1">
+            <a:schemeClr val="accent1"/>
+          </a:lnRef>
+          <a:fillRef idx="3">
+            <a:schemeClr val="accent1"/>
+          </a:fillRef>
+          <a:effectRef idx="2">
+            <a:schemeClr val="accent1"/>
+          </a:effectRef>
+          <a:fontRef idx="minor">
+            <a:schemeClr val="lt1"/>
+          </a:fontRef>
+        </p:style>
+        <p:txBody>
+          <a:bodyPr rtlCol="0" anchor="ctr" wrap="square"/>
+          <a:lstStyle/>
+          <a:p>
+            <a:pPr algn="ctr">
+              <a:defRPr sz="1100" b="1">
+                <a:solidFill>
+                  <a:srgbClr val="5CADE6"/>
+                </a:solidFill>
+              </a:defRPr>
+            </a:pPr>
+            <a:r>
+              <a:t>🤖 Apéndice T2 • Técnico</a:t>
+            </a:r>
+          </a:p>
+        </p:txBody>
+      </p:sp>
+      <p:sp>
+        <p:nvSpPr>
+          <p:cNvPr id="4" name="Rounded Rectangle 3"/>
+          <p:cNvSpPr/>
+          <p:nvPr/>
+        </p:nvSpPr>
+        <p:spPr>
+          <a:xfrm>
+            <a:off x="9601200" y="365760"/>
+            <a:ext cx="1828800" cy="320040"/>
+          </a:xfrm>
+          <a:prstGeom prst="roundRect">
+            <a:avLst/>
+          </a:prstGeom>
+          <a:solidFill>
+            <a:srgbClr val="1B3428"/>
+          </a:solidFill>
+          <a:ln w="12700">
+            <a:solidFill>
+              <a:srgbClr val="5CADE6"/>
+            </a:solidFill>
+          </a:ln>
+        </p:spPr>
+        <p:style>
+          <a:lnRef idx="1">
+            <a:schemeClr val="accent1"/>
+          </a:lnRef>
+          <a:fillRef idx="3">
+            <a:schemeClr val="accent1"/>
+          </a:fillRef>
+          <a:effectRef idx="2">
+            <a:schemeClr val="accent1"/>
+          </a:effectRef>
+          <a:fontRef idx="minor">
+            <a:schemeClr val="lt1"/>
+          </a:fontRef>
+        </p:style>
+        <p:txBody>
+          <a:bodyPr rtlCol="0" anchor="ctr"/>
+          <a:lstStyle/>
+          <a:p>
+            <a:pPr algn="ctr">
+              <a:defRPr sz="1100" b="1">
+                <a:solidFill>
+                  <a:srgbClr val="5CADE6"/>
+                </a:solidFill>
+              </a:defRPr>
+            </a:pPr>
+            <a:r>
+              <a:t>⏱️ Apéndice Q&amp;A</a:t>
+            </a:r>
+          </a:p>
+        </p:txBody>
+      </p:sp>
+      <p:sp>
+        <p:nvSpPr>
+          <p:cNvPr id="5" name="TextBox 4"/>
+          <p:cNvSpPr txBox="1"/>
+          <p:nvPr/>
+        </p:nvSpPr>
+        <p:spPr>
+          <a:xfrm>
+            <a:off x="731520" y="777240"/>
+            <a:ext cx="10698480" cy="548640"/>
+          </a:xfrm>
+          <a:prstGeom prst="rect">
+            <a:avLst/>
+          </a:prstGeom>
+          <a:noFill/>
+        </p:spPr>
+        <p:txBody>
+          <a:bodyPr wrap="none">
+            <a:spAutoFit/>
+          </a:bodyPr>
+          <a:lstStyle/>
+          <a:p>
+            <a:pPr>
+              <a:defRPr sz="2200" b="1">
+                <a:solidFill>
+                  <a:srgbClr val="F3F8F5"/>
+                </a:solidFill>
+              </a:defRPr>
+            </a:pPr>
+            <a:r>
+              <a:t>Modelo de Machine Learning para Biofix</a:t>
+            </a:r>
+          </a:p>
+        </p:txBody>
+      </p:sp>
+      <p:sp>
+        <p:nvSpPr>
+          <p:cNvPr id="6" name="Rounded Rectangle 5"/>
+          <p:cNvSpPr/>
+          <p:nvPr/>
+        </p:nvSpPr>
+        <p:spPr>
+          <a:xfrm>
+            <a:off x="731520" y="1371600"/>
+            <a:ext cx="3291840" cy="5029200"/>
+          </a:xfrm>
+          <a:prstGeom prst="roundRect">
+            <a:avLst/>
+          </a:prstGeom>
+          <a:solidFill>
+            <a:srgbClr val="14261D"/>
+          </a:solidFill>
+          <a:ln w="12700">
+            <a:solidFill>
+              <a:srgbClr val="284636"/>
+            </a:solidFill>
+          </a:ln>
+        </p:spPr>
+        <p:style>
+          <a:lnRef idx="1">
+            <a:schemeClr val="accent1"/>
+          </a:lnRef>
+          <a:fillRef idx="3">
+            <a:schemeClr val="accent1"/>
+          </a:fillRef>
+          <a:effectRef idx="2">
+            <a:schemeClr val="accent1"/>
+          </a:effectRef>
+          <a:fontRef idx="minor">
+            <a:schemeClr val="lt1"/>
+          </a:fontRef>
+        </p:style>
+        <p:txBody>
+          <a:bodyPr rtlCol="0" anchor="ctr"/>
+          <a:lstStyle/>
+          <a:p>
+            <a:pPr algn="ctr"/>
+          </a:p>
+        </p:txBody>
+      </p:sp>
+      <p:pic>
+        <p:nvPicPr>
+          <p:cNvPr id="7" name="Picture 6" descr="08_nuevo_reporte.png"/>
+          <p:cNvPicPr>
+            <a:picLocks noChangeAspect="1"/>
+          </p:cNvPicPr>
+          <p:nvPr/>
+        </p:nvPicPr>
+        <p:blipFill>
+          <a:blip r:embed="rId2"/>
+          <a:stretch>
+            <a:fillRect/>
+          </a:stretch>
+        </p:blipFill>
+        <p:spPr>
+          <a:xfrm>
+            <a:off x="914400" y="1508760"/>
+            <a:ext cx="2926080" cy="6502400"/>
+          </a:xfrm>
+          <a:prstGeom prst="rect">
+            <a:avLst/>
+          </a:prstGeom>
+        </p:spPr>
+      </p:pic>
+      <p:sp>
+        <p:nvSpPr>
+          <p:cNvPr id="8" name="Rounded Rectangle 7"/>
+          <p:cNvSpPr/>
+          <p:nvPr/>
+        </p:nvSpPr>
+        <p:spPr>
+          <a:xfrm>
+            <a:off x="4297680" y="1371600"/>
+            <a:ext cx="7132320" cy="5029200"/>
+          </a:xfrm>
+          <a:prstGeom prst="roundRect">
+            <a:avLst/>
+          </a:prstGeom>
+          <a:solidFill>
+            <a:srgbClr val="14261D"/>
+          </a:solidFill>
+          <a:ln w="12700">
+            <a:solidFill>
+              <a:srgbClr val="284636"/>
+            </a:solidFill>
+          </a:ln>
+        </p:spPr>
+        <p:style>
+          <a:lnRef idx="1">
+            <a:schemeClr val="accent1"/>
+          </a:lnRef>
+          <a:fillRef idx="3">
+            <a:schemeClr val="accent1"/>
+          </a:fillRef>
+          <a:effectRef idx="2">
+            <a:schemeClr val="accent1"/>
+          </a:effectRef>
+          <a:fontRef idx="minor">
+            <a:schemeClr val="lt1"/>
+          </a:fontRef>
+        </p:style>
+        <p:txBody>
+          <a:bodyPr rtlCol="0" anchor="ctr" wrap="square"/>
+          <a:lstStyle/>
+          <a:p>
+            <a:pPr algn="ctr">
+              <a:defRPr sz="1400" b="1">
+                <a:solidFill>
+                  <a:srgbClr val="5CE698"/>
+                </a:solidFill>
+              </a:defRPr>
+            </a:pPr>
+            <a:r>
+              <a:t>Predicción bioclimática temprana y aprendizaje activo supervisado por el usuario</a:t>
+            </a:r>
+          </a:p>
+          <a:p>
+            <a:br/>
+            <a:pPr>
+              <a:defRPr sz="1300" b="1">
+                <a:solidFill>
+                  <a:srgbClr val="F2B23E"/>
+                </a:solidFill>
+              </a:defRPr>
+            </a:pPr>
+            <a:r>
+              <a:t>🧠 Anticipación a la Detección Ocular Humana</a:t>
+            </a:r>
+          </a:p>
+          <a:p>
+            <a:pPr>
+              <a:defRPr sz="1100">
+                <a:solidFill>
+                  <a:srgbClr val="F3F8F5"/>
+                </a:solidFill>
+              </a:defRPr>
+            </a:pPr>
+            <a:r>
+              <a:t>Vector de features climáticas: medias móviles térmicas a 7, 15 y 30 días, anomalías invernales Tmin &gt; 15°C y fotoperíodo.</a:t>
+            </a:r>
+          </a:p>
+          <a:p>
+            <a:pPr>
+              <a:defRPr sz="1050">
+                <a:solidFill>
+                  <a:srgbClr val="9EBAAB"/>
+                </a:solidFill>
+              </a:defRPr>
+            </a:pPr>
+            <a:r>
+              <a:t>• Algoritmo Predictivo: Ensamble de Gradient Boosted Trees (XGBoost / LightGBM) calibrado con datos meteorológicos históricos.</a:t>
+            </a:r>
+          </a:p>
+          <a:p>
+            <a:pPr>
+              <a:defRPr sz="1050">
+                <a:solidFill>
+                  <a:srgbClr val="9EBAAB"/>
+                </a:solidFill>
+              </a:defRPr>
+            </a:pPr>
+            <a:r>
+              <a:t>• Detección Inviernos Cálidos: Identificación de inviernos benignos que evitan la mortandad por heladas de la chicharrita del maíz.</a:t>
+            </a:r>
+          </a:p>
+          <a:p>
+            <a:pPr>
+              <a:defRPr sz="1050">
+                <a:solidFill>
+                  <a:srgbClr val="9EBAAB"/>
+                </a:solidFill>
+              </a:defRPr>
+            </a:pPr>
+            <a:r>
+              <a:t>• Bucle Activo de Feedback: Cada confirmación o corrección del agrónomo genera un registro FeedbackPrediccion para reentrenar pesos.</a:t>
+            </a:r>
+          </a:p>
+          <a:p>
+            <a:pPr>
+              <a:defRPr sz="1050">
+                <a:solidFill>
+                  <a:srgbClr val="9EBAAB"/>
+                </a:solidFill>
+              </a:defRPr>
+            </a:pPr>
+            <a:r>
+              <a:t>• Humano en el Centro: La IA emite una recomendación probabilística; la decisión de inicio del ciclo recae siempre en el profesional.</a:t>
+            </a:r>
+          </a:p>
+          <a:p>
+            <a:br/>
+            <a:pPr>
+              <a:defRPr sz="1000" i="1">
+                <a:solidFill>
+                  <a:srgbClr val="5CE698"/>
+                </a:solidFill>
+              </a:defRPr>
+            </a:pPr>
+            <a:r>
+              <a:t>🗣️ Qué decir al jurado: ¿Cómo funciona el modelo de ML para el Biofix? Toma como features series térmicas de 60 días, anomalías de mínimas invernales, precipitacion...</a:t>
+            </a:r>
+          </a:p>
+        </p:txBody>
+      </p:sp>
+    </p:spTree>
+  </p:cSld>
+  <p:clrMapOvr>
+    <a:masterClrMapping/>
+  </p:clrMapOvr>
+</p:sld>
+</file>
+
+<file path=ppt/slides/slide19.xml><?xml version="1.0" encoding="utf-8"?>
+<p:sld xmlns:a="http://schemas.openxmlformats.org/drawingml/2006/main" xmlns:p="http://schemas.openxmlformats.org/presentationml/2006/main" xmlns:r="http://schemas.openxmlformats.org/officeDocument/2006/relationships">
+  <p:cSld>
+    <p:spTree>
+      <p:nvGrpSpPr>
+        <p:cNvPr id="1" name=""/>
+        <p:cNvGrpSpPr/>
+        <p:nvPr/>
+      </p:nvGrpSpPr>
+      <p:grpSpPr/>
+      <p:sp>
+        <p:nvSpPr>
+          <p:cNvPr id="2" name="Rectangle 1"/>
+          <p:cNvSpPr/>
+          <p:nvPr/>
+        </p:nvSpPr>
+        <p:spPr>
+          <a:xfrm>
+            <a:off x="0" y="0"/>
+            <a:ext cx="12191695" cy="6858000"/>
+          </a:xfrm>
+          <a:prstGeom prst="rect">
+            <a:avLst/>
+          </a:prstGeom>
+          <a:solidFill>
+            <a:srgbClr val="0B1711"/>
+          </a:solidFill>
+          <a:ln>
+            <a:noFill/>
+          </a:ln>
+        </p:spPr>
+        <p:style>
+          <a:lnRef idx="1">
+            <a:schemeClr val="accent1"/>
+          </a:lnRef>
+          <a:fillRef idx="3">
+            <a:schemeClr val="accent1"/>
+          </a:fillRef>
+          <a:effectRef idx="2">
+            <a:schemeClr val="accent1"/>
+          </a:effectRef>
+          <a:fontRef idx="minor">
+            <a:schemeClr val="lt1"/>
+          </a:fontRef>
+        </p:style>
+        <p:txBody>
+          <a:bodyPr rtlCol="0" anchor="ctr"/>
+          <a:lstStyle/>
+          <a:p>
+            <a:pPr algn="ctr"/>
+          </a:p>
+        </p:txBody>
+      </p:sp>
+      <p:sp>
+        <p:nvSpPr>
+          <p:cNvPr id="3" name="Rounded Rectangle 2"/>
+          <p:cNvSpPr/>
+          <p:nvPr/>
+        </p:nvSpPr>
+        <p:spPr>
+          <a:xfrm>
+            <a:off x="731520" y="365760"/>
+            <a:ext cx="2926080" cy="320040"/>
+          </a:xfrm>
+          <a:prstGeom prst="roundRect">
+            <a:avLst/>
+          </a:prstGeom>
+          <a:solidFill>
+            <a:srgbClr val="1B3428"/>
+          </a:solidFill>
+          <a:ln w="12700">
+            <a:solidFill>
+              <a:srgbClr val="5CADE6"/>
+            </a:solidFill>
+          </a:ln>
+        </p:spPr>
+        <p:style>
+          <a:lnRef idx="1">
+            <a:schemeClr val="accent1"/>
+          </a:lnRef>
+          <a:fillRef idx="3">
+            <a:schemeClr val="accent1"/>
+          </a:fillRef>
+          <a:effectRef idx="2">
+            <a:schemeClr val="accent1"/>
+          </a:effectRef>
+          <a:fontRef idx="minor">
+            <a:schemeClr val="lt1"/>
+          </a:fontRef>
+        </p:style>
+        <p:txBody>
+          <a:bodyPr rtlCol="0" anchor="ctr" wrap="square"/>
+          <a:lstStyle/>
+          <a:p>
+            <a:pPr algn="ctr">
+              <a:defRPr sz="1100" b="1">
+                <a:solidFill>
+                  <a:srgbClr val="5CADE6"/>
+                </a:solidFill>
+              </a:defRPr>
+            </a:pPr>
+            <a:r>
+              <a:t>⚙️ Apéndice T3 • Técnico</a:t>
+            </a:r>
+          </a:p>
+        </p:txBody>
+      </p:sp>
+      <p:sp>
+        <p:nvSpPr>
+          <p:cNvPr id="4" name="Rounded Rectangle 3"/>
+          <p:cNvSpPr/>
+          <p:nvPr/>
+        </p:nvSpPr>
+        <p:spPr>
+          <a:xfrm>
+            <a:off x="9601200" y="365760"/>
+            <a:ext cx="1828800" cy="320040"/>
+          </a:xfrm>
+          <a:prstGeom prst="roundRect">
+            <a:avLst/>
+          </a:prstGeom>
+          <a:solidFill>
+            <a:srgbClr val="1B3428"/>
+          </a:solidFill>
+          <a:ln w="12700">
+            <a:solidFill>
+              <a:srgbClr val="5CADE6"/>
+            </a:solidFill>
+          </a:ln>
+        </p:spPr>
+        <p:style>
+          <a:lnRef idx="1">
+            <a:schemeClr val="accent1"/>
+          </a:lnRef>
+          <a:fillRef idx="3">
+            <a:schemeClr val="accent1"/>
+          </a:fillRef>
+          <a:effectRef idx="2">
+            <a:schemeClr val="accent1"/>
+          </a:effectRef>
+          <a:fontRef idx="minor">
+            <a:schemeClr val="lt1"/>
+          </a:fontRef>
+        </p:style>
+        <p:txBody>
+          <a:bodyPr rtlCol="0" anchor="ctr"/>
+          <a:lstStyle/>
+          <a:p>
+            <a:pPr algn="ctr">
+              <a:defRPr sz="1100" b="1">
+                <a:solidFill>
+                  <a:srgbClr val="5CADE6"/>
+                </a:solidFill>
+              </a:defRPr>
+            </a:pPr>
+            <a:r>
+              <a:t>⏱️ Apéndice Q&amp;A</a:t>
+            </a:r>
+          </a:p>
+        </p:txBody>
+      </p:sp>
+      <p:sp>
+        <p:nvSpPr>
+          <p:cNvPr id="5" name="TextBox 4"/>
+          <p:cNvSpPr txBox="1"/>
+          <p:nvPr/>
+        </p:nvSpPr>
+        <p:spPr>
+          <a:xfrm>
+            <a:off x="731520" y="777240"/>
+            <a:ext cx="10698480" cy="548640"/>
+          </a:xfrm>
+          <a:prstGeom prst="rect">
+            <a:avLst/>
+          </a:prstGeom>
+          <a:noFill/>
+        </p:spPr>
+        <p:txBody>
+          <a:bodyPr wrap="none">
+            <a:spAutoFit/>
+          </a:bodyPr>
+          <a:lstStyle/>
+          <a:p>
+            <a:pPr>
+              <a:defRPr sz="2200" b="1">
+                <a:solidFill>
+                  <a:srgbClr val="F3F8F5"/>
+                </a:solidFill>
+              </a:defRPr>
+            </a:pPr>
+            <a:r>
+              <a:t>Pipeline del Job Diario &amp; Notificaciones FCM</a:t>
+            </a:r>
+          </a:p>
+        </p:txBody>
+      </p:sp>
+      <p:sp>
+        <p:nvSpPr>
+          <p:cNvPr id="6" name="Rounded Rectangle 5"/>
+          <p:cNvSpPr/>
+          <p:nvPr/>
+        </p:nvSpPr>
+        <p:spPr>
+          <a:xfrm>
+            <a:off x="731520" y="1371600"/>
+            <a:ext cx="3291840" cy="5029200"/>
+          </a:xfrm>
+          <a:prstGeom prst="roundRect">
+            <a:avLst/>
+          </a:prstGeom>
+          <a:solidFill>
+            <a:srgbClr val="14261D"/>
+          </a:solidFill>
+          <a:ln w="12700">
+            <a:solidFill>
+              <a:srgbClr val="284636"/>
+            </a:solidFill>
+          </a:ln>
+        </p:spPr>
+        <p:style>
+          <a:lnRef idx="1">
+            <a:schemeClr val="accent1"/>
+          </a:lnRef>
+          <a:fillRef idx="3">
+            <a:schemeClr val="accent1"/>
+          </a:fillRef>
+          <a:effectRef idx="2">
+            <a:schemeClr val="accent1"/>
+          </a:effectRef>
+          <a:fontRef idx="minor">
+            <a:schemeClr val="lt1"/>
+          </a:fontRef>
+        </p:style>
+        <p:txBody>
+          <a:bodyPr rtlCol="0" anchor="ctr"/>
+          <a:lstStyle/>
+          <a:p>
+            <a:pPr algn="ctr"/>
+          </a:p>
+        </p:txBody>
+      </p:sp>
+      <p:pic>
+        <p:nvPicPr>
+          <p:cNvPr id="7" name="Picture 6" descr="03_alertas_comunitarias.png"/>
+          <p:cNvPicPr>
+            <a:picLocks noChangeAspect="1"/>
+          </p:cNvPicPr>
+          <p:nvPr/>
+        </p:nvPicPr>
+        <p:blipFill>
+          <a:blip r:embed="rId2"/>
+          <a:stretch>
+            <a:fillRect/>
+          </a:stretch>
+        </p:blipFill>
+        <p:spPr>
+          <a:xfrm>
+            <a:off x="914400" y="1508760"/>
+            <a:ext cx="2926080" cy="6502400"/>
+          </a:xfrm>
+          <a:prstGeom prst="rect">
+            <a:avLst/>
+          </a:prstGeom>
+        </p:spPr>
+      </p:pic>
+      <p:sp>
+        <p:nvSpPr>
+          <p:cNvPr id="8" name="Rounded Rectangle 7"/>
+          <p:cNvSpPr/>
+          <p:nvPr/>
+        </p:nvSpPr>
+        <p:spPr>
+          <a:xfrm>
+            <a:off x="4297680" y="1371600"/>
+            <a:ext cx="7132320" cy="5029200"/>
+          </a:xfrm>
+          <a:prstGeom prst="roundRect">
+            <a:avLst/>
+          </a:prstGeom>
+          <a:solidFill>
+            <a:srgbClr val="14261D"/>
+          </a:solidFill>
+          <a:ln w="12700">
+            <a:solidFill>
+              <a:srgbClr val="284636"/>
+            </a:solidFill>
+          </a:ln>
+        </p:spPr>
+        <p:style>
+          <a:lnRef idx="1">
+            <a:schemeClr val="accent1"/>
+          </a:lnRef>
+          <a:fillRef idx="3">
+            <a:schemeClr val="accent1"/>
+          </a:fillRef>
+          <a:effectRef idx="2">
+            <a:schemeClr val="accent1"/>
+          </a:effectRef>
+          <a:fontRef idx="minor">
+            <a:schemeClr val="lt1"/>
+          </a:fontRef>
+        </p:style>
+        <p:txBody>
+          <a:bodyPr rtlCol="0" anchor="ctr" wrap="square"/>
+          <a:lstStyle/>
+          <a:p>
+            <a:pPr algn="ctr">
+              <a:defRPr sz="1400" b="1">
+                <a:solidFill>
+                  <a:srgbClr val="5CE698"/>
+                </a:solidFill>
+              </a:defRPr>
+            </a:pPr>
+            <a:r>
+              <a:t>Automatización batch nocturna, integración meteorológica y despacho masivo push</a:t>
+            </a:r>
+          </a:p>
+          <a:p>
+            <a:br/>
+            <a:pPr>
+              <a:defRPr sz="1300" b="1">
+                <a:solidFill>
+                  <a:srgbClr val="F2B23E"/>
+                </a:solidFill>
+              </a:defRPr>
+            </a:pPr>
+            <a:r>
+              <a:t>🌙 Eficiencia Energética y de Red</a:t>
+            </a:r>
+          </a:p>
+          <a:p>
+            <a:pPr>
+              <a:defRPr sz="1100">
+                <a:solidFill>
+                  <a:srgbClr val="F3F8F5"/>
+                </a:solidFill>
+              </a:defRPr>
+            </a:pPr>
+            <a:r>
+              <a:t>El procesamiento pesado ocurre en el servidor durante la noche. El teléfono del productor no consume batería calculando integrales térmicas.</a:t>
+            </a:r>
+          </a:p>
+          <a:p>
+            <a:pPr>
+              <a:defRPr sz="1050">
+                <a:solidFill>
+                  <a:srgbClr val="9EBAAB"/>
+                </a:solidFill>
+              </a:defRPr>
+            </a:pPr>
+            <a:r>
+              <a:t>• Consultas Asíncronas: Llamadas concurrentes con httpx.AsyncClient para descargar datos meteorológicos en paralelo en segundos.</a:t>
+            </a:r>
+          </a:p>
+          <a:p>
+            <a:pPr>
+              <a:defRPr sz="1050">
+                <a:solidFill>
+                  <a:srgbClr val="9EBAAB"/>
+                </a:solidFill>
+              </a:defRPr>
+            </a:pPr>
+            <a:r>
+              <a:t>• Deduplicación GPS: Si varios lotes comparten la misma estación meteorológica, se realiza una única petición a la API externa.</a:t>
+            </a:r>
+          </a:p>
+          <a:p>
+            <a:pPr>
+              <a:defRPr sz="1050">
+                <a:solidFill>
+                  <a:srgbClr val="9EBAAB"/>
+                </a:solidFill>
+              </a:defRPr>
+            </a:pPr>
+            <a:r>
+              <a:t>• Firebase Cloud Messaging: Tokens FCM registrados en backend. Despacho segmentado por lote y topics regionales de emergencia.</a:t>
+            </a:r>
+          </a:p>
+          <a:p>
+            <a:pPr>
+              <a:defRPr sz="1050">
+                <a:solidFill>
+                  <a:srgbClr val="9EBAAB"/>
+                </a:solidFill>
+              </a:defRPr>
+            </a:pPr>
+            <a:r>
+              <a:t>• Cero Impacto Batería: La app despierta solo para renderizar la alerta, sin necesidad de correr servicios en background permanentes.</a:t>
+            </a:r>
+          </a:p>
+          <a:p>
+            <a:br/>
+            <a:pPr>
+              <a:defRPr sz="1000" i="1">
+                <a:solidFill>
+                  <a:srgbClr val="5CE698"/>
+                </a:solidFill>
+              </a:defRPr>
+            </a:pPr>
+            <a:r>
+              <a:t>🗣️ Qué decir al jurado: ¿Cómo escala el recálculo diario si hay miles de lotes? A las 03:00 AM un scheduler batch en el backend ejecuta consultas concurrentes asínc...</a:t>
             </a:r>
           </a:p>
         </p:txBody>
@@ -4460,7 +9505,7 @@
         <p:spPr>
           <a:xfrm>
             <a:off x="731520" y="365760"/>
-            <a:ext cx="2560320" cy="320040"/>
+            <a:ext cx="2926080" cy="320040"/>
           </a:xfrm>
           <a:prstGeom prst="roundRect">
             <a:avLst/>
@@ -4500,7 +9545,7 @@
               </a:defRPr>
             </a:pPr>
             <a:r>
-              <a:t>📍 Módulo 1 • Estructura</a:t>
+              <a:t>Perspectiva 1 • Alta de Cero</a:t>
             </a:r>
           </a:p>
         </p:txBody>
@@ -4554,7 +9599,7 @@
               </a:defRPr>
             </a:pPr>
             <a:r>
-              <a:t>⏱️ 02:00 - 05:30</a:t>
+              <a:t>⏱️ 02:00 - 03:30</a:t>
             </a:r>
           </a:p>
         </p:txBody>
@@ -4589,7 +9634,7 @@
               </a:defRPr>
             </a:pPr>
             <a:r>
-              <a:t>Tu Campo, Ordenado y Vivo</a:t>
+              <a:t>Creación de Cuenta y Onboarding</a:t>
             </a:r>
           </a:p>
         </p:txBody>
@@ -4712,7 +9757,7 @@
               </a:defRPr>
             </a:pPr>
             <a:r>
-              <a:t>Digitalización territorial con vínculo bioclimático local</a:t>
+              <a:t>Registro ágil con doble nivel de guía: rápida para campo y completa para ciencia</a:t>
             </a:r>
           </a:p>
           <a:p>
@@ -4725,7 +9770,7 @@
               </a:defRPr>
             </a:pPr>
             <a:r>
-              <a:t>🛰️ ¿Por qué georreferenciar cada lote?</a:t>
+              <a:t>📘 Guía Rápida (5 Pasos) vs Guía Completa</a:t>
             </a:r>
           </a:p>
           <a:p>
@@ -4737,55 +9782,481 @@
               </a:defRPr>
             </a:pPr>
             <a:r>
-              <a:t>Los insectos no responden al promedio provincial: su tasa biológica depende del microclima local. Al registrar las coordenadas GPS exactas, PLAG-OUT consulta la estación meteorológica más cercana para alimentar el motor de Grados Día.</a:t>
+              <a:t>Diseño adaptado al productor agropecuario: dos niveles de soporte para resolver rápido a campo o profundizar en la ciencia.</a:t>
+            </a:r>
+          </a:p>
+          <a:p>
+            <a:pPr>
+              <a:defRPr sz="1050">
+                <a:solidFill>
+                  <a:srgbClr val="9EBAAB"/>
+                </a:solidFill>
+              </a:defRPr>
+            </a:pPr>
+            <a:r>
+              <a:t>• Guía Rápida (AppBar ?): 5 pasos operativos: Cargá terrenos ➔ Sumá cultivos ➔ Monitoreá ➔ Confirmá biofix ➔ Reportá.</a:t>
+            </a:r>
+          </a:p>
+          <a:p>
+            <a:pPr>
+              <a:defRPr sz="1050">
+                <a:solidFill>
+                  <a:srgbClr val="9EBAAB"/>
+                </a:solidFill>
+              </a:defRPr>
+            </a:pPr>
+            <a:r>
+              <a:t>• Guía Completa (Ajustes): Explicación conceptual con rigor: qué es GDD, qué es Biofix, cómo se calcula el IRA y niveles del semáforo.</a:t>
+            </a:r>
+          </a:p>
+          <a:p>
+            <a:pPr>
+              <a:defRPr sz="1050">
+                <a:solidFill>
+                  <a:srgbClr val="9EBAAB"/>
+                </a:solidFill>
+              </a:defRPr>
+            </a:pPr>
+            <a:r>
+              <a:t>• Registro Seguro: Autenticación rápida con validación y tokens JWT.</a:t>
+            </a:r>
+          </a:p>
+          <a:p>
+            <a:pPr>
+              <a:defRPr sz="1050">
+                <a:solidFill>
+                  <a:srgbClr val="9EBAAB"/>
+                </a:solidFill>
+              </a:defRPr>
+            </a:pPr>
+            <a:r>
+              <a:t>• Enfoque Práctico: Lenguaje agronómico directo, sin tecnicismos informáticos vacíos.</a:t>
+            </a:r>
+          </a:p>
+          <a:p>
+            <a:br/>
+            <a:pPr>
+              <a:defRPr sz="1000" i="1">
+                <a:solidFill>
+                  <a:srgbClr val="5CE698"/>
+                </a:solidFill>
+              </a:defRPr>
+            </a:pPr>
+            <a:r>
+              <a:t>🗣️ Qué decir al jurado: Arrancamos creando una cuenta de cero. Registro rápido pensado para el campo. Ni bien ingresa, el usuario dispone de dos niveles de asistenc...</a:t>
+            </a:r>
+          </a:p>
+        </p:txBody>
+      </p:sp>
+    </p:spTree>
+  </p:cSld>
+  <p:clrMapOvr>
+    <a:masterClrMapping/>
+  </p:clrMapOvr>
+</p:sld>
+</file>
+
+<file path=ppt/slides/slide20.xml><?xml version="1.0" encoding="utf-8"?>
+<p:sld xmlns:a="http://schemas.openxmlformats.org/drawingml/2006/main" xmlns:p="http://schemas.openxmlformats.org/presentationml/2006/main" xmlns:r="http://schemas.openxmlformats.org/officeDocument/2006/relationships">
+  <p:cSld>
+    <p:spTree>
+      <p:nvGrpSpPr>
+        <p:cNvPr id="1" name=""/>
+        <p:cNvGrpSpPr/>
+        <p:nvPr/>
+      </p:nvGrpSpPr>
+      <p:grpSpPr/>
+      <p:sp>
+        <p:nvSpPr>
+          <p:cNvPr id="2" name="Rectangle 1"/>
+          <p:cNvSpPr/>
+          <p:nvPr/>
+        </p:nvSpPr>
+        <p:spPr>
+          <a:xfrm>
+            <a:off x="0" y="0"/>
+            <a:ext cx="12191695" cy="6858000"/>
+          </a:xfrm>
+          <a:prstGeom prst="rect">
+            <a:avLst/>
+          </a:prstGeom>
+          <a:solidFill>
+            <a:srgbClr val="0B1711"/>
+          </a:solidFill>
+          <a:ln>
+            <a:noFill/>
+          </a:ln>
+        </p:spPr>
+        <p:style>
+          <a:lnRef idx="1">
+            <a:schemeClr val="accent1"/>
+          </a:lnRef>
+          <a:fillRef idx="3">
+            <a:schemeClr val="accent1"/>
+          </a:fillRef>
+          <a:effectRef idx="2">
+            <a:schemeClr val="accent1"/>
+          </a:effectRef>
+          <a:fontRef idx="minor">
+            <a:schemeClr val="lt1"/>
+          </a:fontRef>
+        </p:style>
+        <p:txBody>
+          <a:bodyPr rtlCol="0" anchor="ctr"/>
+          <a:lstStyle/>
+          <a:p>
+            <a:pPr algn="ctr"/>
+          </a:p>
+        </p:txBody>
+      </p:sp>
+      <p:sp>
+        <p:nvSpPr>
+          <p:cNvPr id="3" name="Rounded Rectangle 2"/>
+          <p:cNvSpPr/>
+          <p:nvPr/>
+        </p:nvSpPr>
+        <p:spPr>
+          <a:xfrm>
+            <a:off x="731520" y="365760"/>
+            <a:ext cx="2926080" cy="320040"/>
+          </a:xfrm>
+          <a:prstGeom prst="roundRect">
+            <a:avLst/>
+          </a:prstGeom>
+          <a:solidFill>
+            <a:srgbClr val="1B3428"/>
+          </a:solidFill>
+          <a:ln w="12700">
+            <a:solidFill>
+              <a:srgbClr val="5CADE6"/>
+            </a:solidFill>
+          </a:ln>
+        </p:spPr>
+        <p:style>
+          <a:lnRef idx="1">
+            <a:schemeClr val="accent1"/>
+          </a:lnRef>
+          <a:fillRef idx="3">
+            <a:schemeClr val="accent1"/>
+          </a:fillRef>
+          <a:effectRef idx="2">
+            <a:schemeClr val="accent1"/>
+          </a:effectRef>
+          <a:fontRef idx="minor">
+            <a:schemeClr val="lt1"/>
+          </a:fontRef>
+        </p:style>
+        <p:txBody>
+          <a:bodyPr rtlCol="0" anchor="ctr" wrap="square"/>
+          <a:lstStyle/>
+          <a:p>
+            <a:pPr algn="ctr">
+              <a:defRPr sz="1100" b="1">
+                <a:solidFill>
+                  <a:srgbClr val="5CADE6"/>
+                </a:solidFill>
+              </a:defRPr>
+            </a:pPr>
+            <a:r>
+              <a:t>🔒 Apéndice T4 • Técnico</a:t>
+            </a:r>
+          </a:p>
+        </p:txBody>
+      </p:sp>
+      <p:sp>
+        <p:nvSpPr>
+          <p:cNvPr id="4" name="Rounded Rectangle 3"/>
+          <p:cNvSpPr/>
+          <p:nvPr/>
+        </p:nvSpPr>
+        <p:spPr>
+          <a:xfrm>
+            <a:off x="9601200" y="365760"/>
+            <a:ext cx="1828800" cy="320040"/>
+          </a:xfrm>
+          <a:prstGeom prst="roundRect">
+            <a:avLst/>
+          </a:prstGeom>
+          <a:solidFill>
+            <a:srgbClr val="1B3428"/>
+          </a:solidFill>
+          <a:ln w="12700">
+            <a:solidFill>
+              <a:srgbClr val="5CADE6"/>
+            </a:solidFill>
+          </a:ln>
+        </p:spPr>
+        <p:style>
+          <a:lnRef idx="1">
+            <a:schemeClr val="accent1"/>
+          </a:lnRef>
+          <a:fillRef idx="3">
+            <a:schemeClr val="accent1"/>
+          </a:fillRef>
+          <a:effectRef idx="2">
+            <a:schemeClr val="accent1"/>
+          </a:effectRef>
+          <a:fontRef idx="minor">
+            <a:schemeClr val="lt1"/>
+          </a:fontRef>
+        </p:style>
+        <p:txBody>
+          <a:bodyPr rtlCol="0" anchor="ctr"/>
+          <a:lstStyle/>
+          <a:p>
+            <a:pPr algn="ctr">
+              <a:defRPr sz="1100" b="1">
+                <a:solidFill>
+                  <a:srgbClr val="5CADE6"/>
+                </a:solidFill>
+              </a:defRPr>
+            </a:pPr>
+            <a:r>
+              <a:t>⏱️ Apéndice Q&amp;A</a:t>
+            </a:r>
+          </a:p>
+        </p:txBody>
+      </p:sp>
+      <p:sp>
+        <p:nvSpPr>
+          <p:cNvPr id="5" name="TextBox 4"/>
+          <p:cNvSpPr txBox="1"/>
+          <p:nvPr/>
+        </p:nvSpPr>
+        <p:spPr>
+          <a:xfrm>
+            <a:off x="731520" y="777240"/>
+            <a:ext cx="10698480" cy="548640"/>
+          </a:xfrm>
+          <a:prstGeom prst="rect">
+            <a:avLst/>
+          </a:prstGeom>
+          <a:noFill/>
+        </p:spPr>
+        <p:txBody>
+          <a:bodyPr wrap="none">
+            <a:spAutoFit/>
+          </a:bodyPr>
+          <a:lstStyle/>
+          <a:p>
+            <a:pPr>
+              <a:defRPr sz="2200" b="1">
+                <a:solidFill>
+                  <a:srgbClr val="F3F8F5"/>
+                </a:solidFill>
+              </a:defRPr>
+            </a:pPr>
+            <a:r>
+              <a:t>Geoprivacidad, Anonimización y Ley 25.326</a:t>
+            </a:r>
+          </a:p>
+        </p:txBody>
+      </p:sp>
+      <p:sp>
+        <p:nvSpPr>
+          <p:cNvPr id="6" name="Rounded Rectangle 5"/>
+          <p:cNvSpPr/>
+          <p:nvPr/>
+        </p:nvSpPr>
+        <p:spPr>
+          <a:xfrm>
+            <a:off x="731520" y="1371600"/>
+            <a:ext cx="3291840" cy="5029200"/>
+          </a:xfrm>
+          <a:prstGeom prst="roundRect">
+            <a:avLst/>
+          </a:prstGeom>
+          <a:solidFill>
+            <a:srgbClr val="14261D"/>
+          </a:solidFill>
+          <a:ln w="12700">
+            <a:solidFill>
+              <a:srgbClr val="284636"/>
+            </a:solidFill>
+          </a:ln>
+        </p:spPr>
+        <p:style>
+          <a:lnRef idx="1">
+            <a:schemeClr val="accent1"/>
+          </a:lnRef>
+          <a:fillRef idx="3">
+            <a:schemeClr val="accent1"/>
+          </a:fillRef>
+          <a:effectRef idx="2">
+            <a:schemeClr val="accent1"/>
+          </a:effectRef>
+          <a:fontRef idx="minor">
+            <a:schemeClr val="lt1"/>
+          </a:fontRef>
+        </p:style>
+        <p:txBody>
+          <a:bodyPr rtlCol="0" anchor="ctr"/>
+          <a:lstStyle/>
+          <a:p>
+            <a:pPr algn="ctr"/>
+          </a:p>
+        </p:txBody>
+      </p:sp>
+      <p:pic>
+        <p:nvPicPr>
+          <p:cNvPr id="7" name="Picture 6" descr="04_mapa_georreferenciado.png"/>
+          <p:cNvPicPr>
+            <a:picLocks noChangeAspect="1"/>
+          </p:cNvPicPr>
+          <p:nvPr/>
+        </p:nvPicPr>
+        <p:blipFill>
+          <a:blip r:embed="rId2"/>
+          <a:stretch>
+            <a:fillRect/>
+          </a:stretch>
+        </p:blipFill>
+        <p:spPr>
+          <a:xfrm>
+            <a:off x="914400" y="1508760"/>
+            <a:ext cx="2926080" cy="6502400"/>
+          </a:xfrm>
+          <a:prstGeom prst="rect">
+            <a:avLst/>
+          </a:prstGeom>
+        </p:spPr>
+      </p:pic>
+      <p:sp>
+        <p:nvSpPr>
+          <p:cNvPr id="8" name="Rounded Rectangle 7"/>
+          <p:cNvSpPr/>
+          <p:nvPr/>
+        </p:nvSpPr>
+        <p:spPr>
+          <a:xfrm>
+            <a:off x="4297680" y="1371600"/>
+            <a:ext cx="7132320" cy="5029200"/>
+          </a:xfrm>
+          <a:prstGeom prst="roundRect">
+            <a:avLst/>
+          </a:prstGeom>
+          <a:solidFill>
+            <a:srgbClr val="14261D"/>
+          </a:solidFill>
+          <a:ln w="12700">
+            <a:solidFill>
+              <a:srgbClr val="284636"/>
+            </a:solidFill>
+          </a:ln>
+        </p:spPr>
+        <p:style>
+          <a:lnRef idx="1">
+            <a:schemeClr val="accent1"/>
+          </a:lnRef>
+          <a:fillRef idx="3">
+            <a:schemeClr val="accent1"/>
+          </a:fillRef>
+          <a:effectRef idx="2">
+            <a:schemeClr val="accent1"/>
+          </a:effectRef>
+          <a:fontRef idx="minor">
+            <a:schemeClr val="lt1"/>
+          </a:fontRef>
+        </p:style>
+        <p:txBody>
+          <a:bodyPr rtlCol="0" anchor="ctr" wrap="square"/>
+          <a:lstStyle/>
+          <a:p>
+            <a:pPr algn="ctr">
+              <a:defRPr sz="1400" b="1">
+                <a:solidFill>
+                  <a:srgbClr val="5CE698"/>
+                </a:solidFill>
+              </a:defRPr>
+            </a:pPr>
+            <a:r>
+              <a:t>Protección de secretos comerciales y seguridad de datos en la red comunitaria</a:t>
+            </a:r>
+          </a:p>
+          <a:p>
+            <a:br/>
+            <a:pPr>
+              <a:defRPr sz="1300" b="1">
+                <a:solidFill>
+                  <a:srgbClr val="F2B23E"/>
+                </a:solidFill>
+              </a:defRPr>
+            </a:pPr>
+            <a:r>
+              <a:t>🛡️ El Algoritmo de Perturbación Espacial (Buffer Difuso)</a:t>
             </a:r>
           </a:p>
           <a:p>
             <a:pPr>
               <a:defRPr sz="1100">
                 <a:solidFill>
+                  <a:srgbClr val="F3F8F5"/>
+                </a:solidFill>
+              </a:defRPr>
+            </a:pPr>
+            <a:r>
+              <a:t>La comunidad se beneficia de la alerta temprana regional sin que ningún productor exponga la ubicación exacta de su potrero.</a:t>
+            </a:r>
+          </a:p>
+          <a:p>
+            <a:pPr>
+              <a:defRPr sz="1050">
+                <a:solidFill>
                   <a:srgbClr val="9EBAAB"/>
                 </a:solidFill>
               </a:defRPr>
             </a:pPr>
             <a:r>
-              <a:t>• Superficie Administrada: 114 ha consolidadas entre Buenos Aires (58 ha) y Jujuy.</a:t>
-            </a:r>
-          </a:p>
-          <a:p>
-            <a:pPr>
-              <a:defRPr sz="1100">
+              <a:t>• Coordenadas Segregadas: La geolocalización exacta del catastro vive únicamente en la cuenta privada del titular del lote.</a:t>
+            </a:r>
+          </a:p>
+          <a:p>
+            <a:pPr>
+              <a:defRPr sz="1050">
                 <a:solidFill>
                   <a:srgbClr val="9EBAAB"/>
                 </a:solidFill>
               </a:defRPr>
             </a:pPr>
             <a:r>
-              <a:t>• Estado '1 esperando biofix': Avisa qué potrero requiere marcar el hito biológico cero.</a:t>
-            </a:r>
-          </a:p>
-          <a:p>
-            <a:pPr>
-              <a:defRPr sz="1100">
+              <a:t>• Difusión Aleatoria: Para la alerta zonal, el backend aplica una dispersión radial aleatoria que impide la triangulación inversa.</a:t>
+            </a:r>
+          </a:p>
+          <a:p>
+            <a:pPr>
+              <a:defRPr sz="1050">
                 <a:solidFill>
                   <a:srgbClr val="9EBAAB"/>
                 </a:solidFill>
               </a:defRPr>
             </a:pPr>
             <a:r>
-              <a:t>• Arquitectura Offline-First: Consulta y carga en zonas rurales sin 4G mediante base de datos Room SQLite local.</a:t>
-            </a:r>
-          </a:p>
-          <a:p>
-            <a:pPr>
-              <a:defRPr sz="1100">
+              <a:t>• Cumplimiento Ley 25.326: Garantía de confidencialidad de la información productiva y auditoría de accesos conforme a la ley.</a:t>
+            </a:r>
+          </a:p>
+          <a:p>
+            <a:pPr>
+              <a:defRPr sz="1050">
                 <a:solidFill>
                   <a:srgbClr val="9EBAAB"/>
                 </a:solidFill>
               </a:defRPr>
             </a:pPr>
             <a:r>
-              <a:t>• Gestión de Cultivos: Registro discriminado de variedades implantadas por potrero.</a:t>
+              <a:t>• Derecho de Revocación: El productor puede revocar en cualquier momento el consentimiento de compartir datos con un solo clic.</a:t>
+            </a:r>
+          </a:p>
+          <a:p>
+            <a:br/>
+            <a:pPr>
+              <a:defRPr sz="1000" i="1">
+                <a:solidFill>
+                  <a:srgbClr val="5CE698"/>
+                </a:solidFill>
+              </a:defRPr>
+            </a:pPr>
+            <a:r>
+              <a:t>🗣️ Qué decir al jurado: La privacidad en el agro es sagrada: nadie quiere que la competencia sepa qué plaga tiene en su campo. Cumplimos con la Ley 25.326. Implemen...</a:t>
             </a:r>
           </a:p>
         </p:txBody>
@@ -4860,7 +10331,7 @@
         <p:spPr>
           <a:xfrm>
             <a:off x="731520" y="365760"/>
-            <a:ext cx="2560320" cy="320040"/>
+            <a:ext cx="2926080" cy="320040"/>
           </a:xfrm>
           <a:prstGeom prst="roundRect">
             <a:avLst/>
@@ -4900,7 +10371,7 @@
               </a:defRPr>
             </a:pPr>
             <a:r>
-              <a:t>🐛 Módulo 2 • Biología</a:t>
+              <a:t>Perspectiva 1 • Configuración</a:t>
             </a:r>
           </a:p>
         </p:txBody>
@@ -4954,7 +10425,7 @@
               </a:defRPr>
             </a:pPr>
             <a:r>
-              <a:t>⏱️ 05:30 - 09:30</a:t>
+              <a:t>⏱️ 03:30 - 05:30</a:t>
             </a:r>
           </a:p>
         </p:txBody>
@@ -4989,7 +10460,7 @@
               </a:defRPr>
             </a:pPr>
             <a:r>
-              <a:t>Precisión Lote por Lote: El Reloj Térmico</a:t>
+              <a:t>Terrenos, Cultivos, Monitoreos y Ciclos</a:t>
             </a:r>
           </a:p>
         </p:txBody>
@@ -5041,7 +10512,7 @@
       </p:sp>
       <p:pic>
         <p:nvPicPr>
-          <p:cNvPr id="7" name="Picture 6" descr="02_monitoreo_cultivos.png"/>
+          <p:cNvPr id="7" name="Picture 6" descr="09_plantaciones_cultivos.png"/>
           <p:cNvPicPr>
             <a:picLocks noChangeAspect="1"/>
           </p:cNvPicPr>
@@ -5112,7 +10583,7 @@
               </a:defRPr>
             </a:pPr>
             <a:r>
-              <a:t>Fisiología del insecto e integral térmica en tiempo real</a:t>
+              <a:t>Estructuración territorial con vínculo bioclimático y arquitectura Offline-First</a:t>
             </a:r>
           </a:p>
           <a:p>
@@ -5125,7 +10596,7 @@
               </a:defRPr>
             </a:pPr>
             <a:r>
-              <a:t>🔬 Fundamento Científico: Ciclo Biológico y GDD</a:t>
+              <a:t>🌱 La Jerarquía Productiva en Campo</a:t>
             </a:r>
           </a:p>
           <a:p>
@@ -5137,60 +10608,68 @@
               </a:defRPr>
             </a:pPr>
             <a:r>
-              <a:t>El desarrollo del insecto no sigue el calendario, sino la acumulación térmica diaria por encima de la temperatura base (Tb):</a:t>
-            </a:r>
+              <a:t>Terreno (Lote GPS + Ha) ➔ Plantación (Cultivo + Fecha Siembra) ➔ Monitoreo (Plaga + Umbral) ➔ Ciclos Térmicos.</a:t>
+            </a:r>
+          </a:p>
+          <a:p>
+            <a:pPr>
+              <a:defRPr sz="1050">
+                <a:solidFill>
+                  <a:srgbClr val="9EBAAB"/>
+                </a:solidFill>
+              </a:defRPr>
+            </a:pPr>
+            <a:r>
+              <a:t>• Vínculo Bioclimático: Coordenadas GPS exactas para conectar con estaciones meteorológicas locales y microclima.</a:t>
+            </a:r>
+          </a:p>
+          <a:p>
+            <a:pPr>
+              <a:defRPr sz="1050">
+                <a:solidFill>
+                  <a:srgbClr val="9EBAAB"/>
+                </a:solidFill>
+              </a:defRPr>
+            </a:pPr>
+            <a:r>
+              <a:t>• Fecha de Siembra: Cálculo de días transcurridos para correlacionar fenología del cultivo con estadios de plaga.</a:t>
+            </a:r>
+          </a:p>
+          <a:p>
+            <a:pPr>
+              <a:defRPr sz="1050">
+                <a:solidFill>
+                  <a:srgbClr val="9EBAAB"/>
+                </a:solidFill>
+              </a:defRPr>
+            </a:pPr>
+            <a:r>
+              <a:t>• Umbral Personalizado: El productor define a qué porcentaje de riesgo térmico desea recibir alertas.</a:t>
+            </a:r>
+          </a:p>
+          <a:p>
+            <a:pPr>
+              <a:defRPr sz="1050">
+                <a:solidFill>
+                  <a:srgbClr val="9EBAAB"/>
+                </a:solidFill>
+              </a:defRPr>
+            </a:pPr>
+            <a:r>
+              <a:t>• 100% Offline-First: Persistencia local con Room SQLite. Carga sin señal y sincroniza al volver a tener 4G.</a:t>
+            </a:r>
+          </a:p>
+          <a:p>
             <a:br/>
-            <a:br/>
-            <a:r>
-              <a:t>Fórmula GDD: GDD = ((T_max + T_min) / 2) - T_base</a:t>
-            </a:r>
-          </a:p>
-          <a:p>
-            <a:pPr>
-              <a:defRPr sz="1100">
-                <a:solidFill>
-                  <a:srgbClr val="9EBAAB"/>
-                </a:solidFill>
-              </a:defRPr>
-            </a:pPr>
-            <a:r>
-              <a:t>• Biofix (El Punto Cero): Fecha de primera captura en trampa de luz o avistamiento (ej: 03 sept).</a:t>
-            </a:r>
-          </a:p>
-          <a:p>
-            <a:pPr>
-              <a:defRPr sz="1100">
-                <a:solidFill>
-                  <a:srgbClr val="9EBAAB"/>
-                </a:solidFill>
-              </a:defRPr>
-            </a:pPr>
-            <a:r>
-              <a:t>• Calibración INTA Argentina: Para Anticarsia gemmatalis en soja, Tb = 10°C y 420 GDD de eclosión.</a:t>
-            </a:r>
-          </a:p>
-          <a:p>
-            <a:pPr>
-              <a:defRPr sz="1100">
-                <a:solidFill>
-                  <a:srgbClr val="9EBAAB"/>
-                </a:solidFill>
-              </a:defRPr>
-            </a:pPr>
-            <a:r>
-              <a:t>• Cruce del Umbral: Cuando la curva acumulada cruza 420 GDD, se predice la eclosión exacta.</a:t>
-            </a:r>
-          </a:p>
-          <a:p>
-            <a:pPr>
-              <a:defRPr sz="1100">
-                <a:solidFill>
-                  <a:srgbClr val="9EBAAB"/>
-                </a:solidFill>
-              </a:defRPr>
-            </a:pPr>
-            <a:r>
-              <a:t>• Semáforo Operativo: Clasificación de lotes en bajo control, moderado o alerta crítica.</a:t>
+            <a:pPr>
+              <a:defRPr sz="1000" i="1">
+                <a:solidFill>
+                  <a:srgbClr val="5CE698"/>
+                </a:solidFill>
+              </a:defRPr>
+            </a:pPr>
+            <a:r>
+              <a:t>🗣️ Qué decir al jurado: Configuramos los activos productivos: creamos un Terreno con delimitación GPS y hectáreas. ¿Por qué el GPS exacto? Porque nos conectamos con...</a:t>
             </a:r>
           </a:p>
         </p:txBody>
@@ -5265,7 +10744,7 @@
         <p:spPr>
           <a:xfrm>
             <a:off x="731520" y="365760"/>
-            <a:ext cx="2560320" cy="320040"/>
+            <a:ext cx="2926080" cy="320040"/>
           </a:xfrm>
           <a:prstGeom prst="roundRect">
             <a:avLst/>
@@ -5305,7 +10784,7 @@
               </a:defRPr>
             </a:pPr>
             <a:r>
-              <a:t>📡 Módulo 3 • Red Colaborativa</a:t>
+              <a:t>Perspectiva 1 • Scouting &amp; IA</a:t>
             </a:r>
           </a:p>
         </p:txBody>
@@ -5359,7 +10838,7 @@
               </a:defRPr>
             </a:pPr>
             <a:r>
-              <a:t>⏱️ 09:30 - 11:30</a:t>
+              <a:t>⏱️ 05:30 - 07:30</a:t>
             </a:r>
           </a:p>
         </p:txBody>
@@ -5394,7 +10873,7 @@
               </a:defRPr>
             </a:pPr>
             <a:r>
-              <a:t>'Lo Que Ve Tu Vecino Te Sirve'</a:t>
+              <a:t>Reporte a Campo &amp; Machine Learning Biofix</a:t>
             </a:r>
           </a:p>
         </p:txBody>
@@ -5446,7 +10925,7 @@
       </p:sp>
       <p:pic>
         <p:nvPicPr>
-          <p:cNvPr id="7" name="Picture 6" descr="03_alertas_comunitarias.png"/>
+          <p:cNvPr id="7" name="Picture 6" descr="08_nuevo_reporte.png"/>
           <p:cNvPicPr>
             <a:picLocks noChangeAspect="1"/>
           </p:cNvPicPr>
@@ -5517,7 +10996,7 @@
               </a:defRPr>
             </a:pPr>
             <a:r>
-              <a:t>Detección temprana comunitaria y defensa perimetral</a:t>
+              <a:t>Digitalización del scouting y predicción inteligente del punto de partida biológico</a:t>
             </a:r>
           </a:p>
           <a:p>
@@ -5530,7 +11009,7 @@
               </a:defRPr>
             </a:pPr>
             <a:r>
-              <a:t>🛡️ El Concepto de 'Defensa en Anillo' (20 km)</a:t>
+              <a:t>🤖 El Rol del Modelo de Machine Learning en el Biofix</a:t>
             </a:r>
           </a:p>
           <a:p>
@@ -5542,55 +11021,68 @@
               </a:defRPr>
             </a:pPr>
             <a:r>
-              <a:t>Las plagas no conocen alambrados ni límites catastrales. PLAG-OUT crea un anillo de vigilancia espacial alrededor de los lotes propios que alerta sobre focos en avance.</a:t>
-            </a:r>
-          </a:p>
-          <a:p>
-            <a:pPr>
-              <a:defRPr sz="1100">
+              <a:t>Analiza 60 días de temperaturas históricas, anomalías invernales y fotoperíodo para predecir la ventana de biofix hasta 14 días antes.</a:t>
+            </a:r>
+          </a:p>
+          <a:p>
+            <a:pPr>
+              <a:defRPr sz="1050">
                 <a:solidFill>
                   <a:srgbClr val="9EBAAB"/>
                 </a:solidFill>
               </a:defRPr>
             </a:pPr>
             <a:r>
-              <a:t>• Alerta Destacada: 'Chinche de la alfalfa - A 8.3 km de tus terrenos'.</a:t>
-            </a:r>
-          </a:p>
-          <a:p>
-            <a:pPr>
-              <a:defRPr sz="1100">
+              <a:t>• Scouting Digital: Registro de plaga, estadio biológico (ninfa/adulto), severidad, fotos georreferenciadas y notas.</a:t>
+            </a:r>
+          </a:p>
+          <a:p>
+            <a:pPr>
+              <a:defRPr sz="1050">
                 <a:solidFill>
                   <a:srgbClr val="9EBAAB"/>
                 </a:solidFill>
               </a:defRPr>
             </a:pPr>
             <a:r>
-              <a:t>• Efecto de Red Agronómico: +Usuarios ➔ +Reportes ➔ +Datos de campo ➔ Alertas más precisas.</a:t>
-            </a:r>
-          </a:p>
-          <a:p>
-            <a:pPr>
-              <a:defRPr sz="1100">
+              <a:t>• Bucle de Feedback Activo: La IA sugiere; el agrónomo confirma o refina la fecha en el lote. La retroalimentación recalibra el modelo.</a:t>
+            </a:r>
+          </a:p>
+          <a:p>
+            <a:pPr>
+              <a:defRPr sz="1050">
                 <a:solidFill>
                   <a:srgbClr val="9EBAAB"/>
                 </a:solidFill>
               </a:defRPr>
             </a:pPr>
             <a:r>
-              <a:t>• Privacidad Garantizada: Cumplimiento de Ley 25.326: reportes 100% anonimizados por radio geográfico.</a:t>
-            </a:r>
-          </a:p>
-          <a:p>
-            <a:pPr>
-              <a:defRPr sz="1100">
+              <a:t>• Activación Térmica: Al confirmar el biofix, se inicia la acumulación diaria de GDD hacia el umbral de eclosión.</a:t>
+            </a:r>
+          </a:p>
+          <a:p>
+            <a:pPr>
+              <a:defRPr sz="1050">
                 <a:solidFill>
                   <a:srgbClr val="9EBAAB"/>
                 </a:solidFill>
               </a:defRPr>
             </a:pPr>
             <a:r>
-              <a:t>• Planificación Proactiva: Permite inspeccionar el potrero antes de que la plaga cruce el alambrado.</a:t>
+              <a:t>• Disparo Comunitario: El reporte confirmado se propaga en la red para advertir a los vecinos del anillo.</a:t>
+            </a:r>
+          </a:p>
+          <a:p>
+            <a:br/>
+            <a:pPr>
+              <a:defRPr sz="1000" i="1">
+                <a:solidFill>
+                  <a:srgbClr val="5CE698"/>
+                </a:solidFill>
+              </a:defRPr>
+            </a:pPr>
+            <a:r>
+              <a:t>🗣️ Qué decir al jurado: Momento clave: el agrónomo camina el lote y genera un reporte. Pero acá interviene nuestro modelo de Machine Learning: analiza 60 días de cl...</a:t>
             </a:r>
           </a:p>
         </p:txBody>
@@ -5665,7 +11157,7 @@
         <p:spPr>
           <a:xfrm>
             <a:off x="731520" y="365760"/>
-            <a:ext cx="2560320" cy="320040"/>
+            <a:ext cx="2926080" cy="320040"/>
           </a:xfrm>
           <a:prstGeom prst="roundRect">
             <a:avLst/>
@@ -5705,7 +11197,7 @@
               </a:defRPr>
             </a:pPr>
             <a:r>
-              <a:t>🗺️ Módulo 4 • Espacio</a:t>
+              <a:t>Perspectiva 2 • Campo en Marcha</a:t>
             </a:r>
           </a:p>
         </p:txBody>
@@ -5759,7 +11251,7 @@
               </a:defRPr>
             </a:pPr>
             <a:r>
-              <a:t>⏱️ 11:30 - 13:30</a:t>
+              <a:t>⏱️ 07:30 - 09:00</a:t>
             </a:r>
           </a:p>
         </p:txBody>
@@ -5794,7 +11286,7 @@
               </a:defRPr>
             </a:pPr>
             <a:r>
-              <a:t>Mapa de Presión y Densidad por Zona</a:t>
+              <a:t>Alerta Comunitaria en Tiempo Real</a:t>
             </a:r>
           </a:p>
         </p:txBody>
@@ -5846,7 +11338,7 @@
       </p:sp>
       <p:pic>
         <p:nvPicPr>
-          <p:cNvPr id="7" name="Picture 6" descr="04_mapa_georreferenciado.png"/>
+          <p:cNvPr id="7" name="Picture 6" descr="03_alertas_comunitarias.png"/>
           <p:cNvPicPr>
             <a:picLocks noChangeAspect="1"/>
           </p:cNvPicPr>
@@ -5917,7 +11409,7 @@
               </a:defRPr>
             </a:pPr>
             <a:r>
-              <a:t>Clusterización espacial de focos sobre OpenStreetMap</a:t>
+              <a:t>Defensa en anillo de 20 km y efecto de red colaborativo entre vecinos</a:t>
             </a:r>
           </a:p>
           <a:p>
@@ -5930,7 +11422,7 @@
               </a:defRPr>
             </a:pPr>
             <a:r>
-              <a:t>🧭 Inteligencia Geoespacial a Campo</a:t>
+              <a:t>🛡️ Principio de Defensa en Anillo (20 km)</a:t>
             </a:r>
           </a:p>
           <a:p>
@@ -5942,55 +11434,68 @@
               </a:defRPr>
             </a:pPr>
             <a:r>
-              <a:t>Lectura visual espacial completa para asesores técnicos y administradores que gestionan campos distribuidos en varias zonas productivas.</a:t>
-            </a:r>
-          </a:p>
-          <a:p>
-            <a:pPr>
-              <a:defRPr sz="1100">
+              <a:t>Los insectos no respetan alambrados. Una detección a 8.3 km es el aviso anticipado de que la presión biológica zonal creció.</a:t>
+            </a:r>
+          </a:p>
+          <a:p>
+            <a:pPr>
+              <a:defRPr sz="1050">
                 <a:solidFill>
                   <a:srgbClr val="9EBAAB"/>
                 </a:solidFill>
               </a:defRPr>
             </a:pPr>
             <a:r>
-              <a:t>• Clustering Inteligente: Nodo crítico rojo agrupando 11 reportes activos en la región central.</a:t>
-            </a:r>
-          </a:p>
-          <a:p>
-            <a:pPr>
-              <a:defRPr sz="1100">
+              <a:t>• Notificación Push Inmediata: Despacho directo por Firebase Cloud Messaging ni bien el vecino confirma el avistamiento.</a:t>
+            </a:r>
+          </a:p>
+          <a:p>
+            <a:pPr>
+              <a:defRPr sz="1050">
                 <a:solidFill>
                   <a:srgbClr val="9EBAAB"/>
                 </a:solidFill>
               </a:defRPr>
             </a:pPr>
             <a:r>
-              <a:t>• Ubicación de Lotes Propios: Señalizado con el ícono de casa para medir distancias relativas de avance.</a:t>
-            </a:r>
-          </a:p>
-          <a:p>
-            <a:pPr>
-              <a:defRPr sz="1100">
+              <a:t>• Efecto de Red: +Productores monitoreando ➔ +Datos georreferenciados ➔ Alertas más precisas para toda la cuenca.</a:t>
+            </a:r>
+          </a:p>
+          <a:p>
+            <a:pPr>
+              <a:defRPr sz="1050">
                 <a:solidFill>
                   <a:srgbClr val="9EBAAB"/>
                 </a:solidFill>
               </a:defRPr>
             </a:pPr>
             <a:r>
-              <a:t>• Vistas Duales: Conmutación instantánea entre Puntos individuales y Mapa de Calor (Heatmap).</a:t>
-            </a:r>
-          </a:p>
-          <a:p>
-            <a:pPr>
-              <a:defRPr sz="1100">
+              <a:t>• Ley 25.326 de Protección: Anonimización estricta: se informa la distancia radial difusa, protegiendo el catastro del vecino.</a:t>
+            </a:r>
+          </a:p>
+          <a:p>
+            <a:pPr>
+              <a:defRPr sz="1050">
                 <a:solidFill>
                   <a:srgbClr val="9EBAAB"/>
                 </a:solidFill>
               </a:defRPr>
             </a:pPr>
             <a:r>
-              <a:t>• Corredores Biológicos: Identificación visual de vectores de avance empujados por vientos y clima.</a:t>
+              <a:t>• Coordinación Zonal: Permite alertar a contratistas y acopios antes de que la plaga cruce el alambrado propio.</a:t>
+            </a:r>
+          </a:p>
+          <a:p>
+            <a:br/>
+            <a:pPr>
+              <a:defRPr sz="1000" i="1">
+                <a:solidFill>
+                  <a:srgbClr val="5CE698"/>
+                </a:solidFill>
+              </a:defRPr>
+            </a:pPr>
+            <a:r>
+              <a:t>🗣️ Qué decir al jurado: Cambiamos a la segunda cuenta: un productor vecino en la misma región. En este instante su celular recibe una notificación push: 'Alerta Com...</a:t>
             </a:r>
           </a:p>
         </p:txBody>
@@ -6065,7 +11570,7 @@
         <p:spPr>
           <a:xfrm>
             <a:off x="731520" y="365760"/>
-            <a:ext cx="2560320" cy="320040"/>
+            <a:ext cx="2926080" cy="320040"/>
           </a:xfrm>
           <a:prstGeom prst="roundRect">
             <a:avLst/>
@@ -6105,7 +11610,7 @@
               </a:defRPr>
             </a:pPr>
             <a:r>
-              <a:t>📊 Tableros de Control • Lotes</a:t>
+              <a:t>Perspectiva 2 • Fisiología</a:t>
             </a:r>
           </a:p>
         </p:txBody>
@@ -6159,7 +11664,7 @@
               </a:defRPr>
             </a:pPr>
             <a:r>
-              <a:t>⏱️ 13:30 - 15:00</a:t>
+              <a:t>⏱️ 09:00 - 11:00</a:t>
             </a:r>
           </a:p>
         </p:txBody>
@@ -6194,7 +11699,7 @@
               </a:defRPr>
             </a:pPr>
             <a:r>
-              <a:t>Semáforo de Superficie en Riesgo</a:t>
+              <a:t>Valores Avanzados de GDD &amp; Motor Diario</a:t>
             </a:r>
           </a:p>
         </p:txBody>
@@ -6246,7 +11751,7 @@
       </p:sp>
       <p:pic>
         <p:nvPicPr>
-          <p:cNvPr id="7" name="Picture 6" descr="05_tablero_lotes.png"/>
+          <p:cNvPr id="7" name="Picture 6" descr="09_plantaciones_cultivos.png"/>
           <p:cNvPicPr>
             <a:picLocks noChangeAspect="1"/>
           </p:cNvPicPr>
@@ -6317,7 +11822,7 @@
               </a:defRPr>
             </a:pPr>
             <a:r>
-              <a:t>Priorización algorítmica por hectáreas y días desde siembra</a:t>
+              <a:t>El reloj biológico térmico lote por lote y el pipeline batch automatizado</a:t>
             </a:r>
           </a:p>
           <a:p>
@@ -6330,7 +11835,7 @@
               </a:defRPr>
             </a:pPr>
             <a:r>
-              <a:t>🚜 De Datos a Acciones Ejecutivas</a:t>
+              <a:t>🌡️ La Ecuación Fisiológica de Grados Día (GDD)</a:t>
             </a:r>
           </a:p>
           <a:p>
@@ -6342,55 +11847,68 @@
               </a:defRPr>
             </a:pPr>
             <a:r>
-              <a:t>En lugar de planillas interminables, el tablero resume la superficie productiva afectada y organiza el plan de trabajo diario.</a:t>
-            </a:r>
-          </a:p>
-          <a:p>
-            <a:pPr>
-              <a:defRPr sz="1100">
+              <a:t>GDD = ((Tmax + Tmin) / 2) - Tb | Calibrada para Argentina: Tb = 10°C (Anticarsia/Dalbulus), eclosión a 420 GDD.</a:t>
+            </a:r>
+          </a:p>
+          <a:p>
+            <a:pPr>
+              <a:defRPr sz="1050">
                 <a:solidFill>
                   <a:srgbClr val="9EBAAB"/>
                 </a:solidFill>
               </a:defRPr>
             </a:pPr>
             <a:r>
-              <a:t>• Semáforo de Superficie: 58 ha bajo seguimiento: discrimina área bajo control vs alerta crítica.</a:t>
-            </a:r>
-          </a:p>
-          <a:p>
-            <a:pPr>
-              <a:defRPr sz="1100">
+              <a:t>• Job Nocturno en Backend: Batch autónomo que ejecuta a las 03:00 AM: consulta Open-Meteo y SMN por coordenadas de cada lote.</a:t>
+            </a:r>
+          </a:p>
+          <a:p>
+            <a:pPr>
+              <a:defRPr sz="1050">
                 <a:solidFill>
                   <a:srgbClr val="9EBAAB"/>
                 </a:solidFill>
               </a:defRPr>
             </a:pPr>
             <a:r>
-              <a:t>• Prioridad de Acción: Ordena de forma algorítmica qué potrero visitar primero según urgencia.</a:t>
-            </a:r>
-          </a:p>
-          <a:p>
-            <a:pPr>
-              <a:defRPr sz="1100">
+              <a:t>• Integral Térmica Diaria: Suma los GDD acumulados y recalcula el Índice de Riesgo Ambiental (IRA) de cada monitoreo.</a:t>
+            </a:r>
+          </a:p>
+          <a:p>
+            <a:pPr>
+              <a:defRPr sz="1050">
                 <a:solidFill>
                   <a:srgbClr val="9EBAAB"/>
                 </a:solidFill>
               </a:defRPr>
             </a:pPr>
             <a:r>
-              <a:t>• Días desde la Siembra: 'Soja (87 días)': correlaciona la edad con la etapa reproductiva (R3-R5).</a:t>
-            </a:r>
-          </a:p>
-          <a:p>
-            <a:pPr>
-              <a:defRPr sz="1100">
+              <a:t>• Alertas Tempranas: Si el lote cruza el umbral definido por el agrónomo, despacha notificación push a primera hora.</a:t>
+            </a:r>
+          </a:p>
+          <a:p>
+            <a:pPr>
+              <a:defRPr sz="1050">
                 <a:solidFill>
                   <a:srgbClr val="9EBAAB"/>
                 </a:solidFill>
               </a:defRPr>
             </a:pPr>
             <a:r>
-              <a:t>• Control Poblacional: Indicador de supresión de plagas y prevención de reinfestaciones.</a:t>
+              <a:t>• Calibración INTA: Modelos ontogénicos validados con estaciones experimentales agropecuarias nacionales.</a:t>
+            </a:r>
+          </a:p>
+          <a:p>
+            <a:br/>
+            <a:pPr>
+              <a:defRPr sz="1000" i="1">
+                <a:solidFill>
+                  <a:srgbClr val="5CE698"/>
+                </a:solidFill>
+              </a:defRPr>
+            </a:pPr>
+            <a:r>
+              <a:t>🗣️ Qué decir al jurado: Entramos al detalle de monitoreo: acá vemos los Grados Día de Desarrollo. La plaga es ectotérmica; para Anticarsia la temperatura base es 10...</a:t>
             </a:r>
           </a:p>
         </p:txBody>
@@ -6465,7 +11983,7 @@
         <p:spPr>
           <a:xfrm>
             <a:off x="731520" y="365760"/>
-            <a:ext cx="2560320" cy="320040"/>
+            <a:ext cx="2926080" cy="320040"/>
           </a:xfrm>
           <a:prstGeom prst="roundRect">
             <a:avLst/>
@@ -6505,7 +12023,7 @@
               </a:defRPr>
             </a:pPr>
             <a:r>
-              <a:t>🎯 Tableros de Control • Control</a:t>
+              <a:t>Perspectiva 2 • Cartografía</a:t>
             </a:r>
           </a:p>
         </p:txBody>
@@ -6559,7 +12077,7 @@
               </a:defRPr>
             </a:pPr>
             <a:r>
-              <a:t>⏱️ 15:00 - 16:30</a:t>
+              <a:t>⏱️ 11:00 - 12:30</a:t>
             </a:r>
           </a:p>
         </p:txBody>
@@ -6594,7 +12112,7 @@
               </a:defRPr>
             </a:pPr>
             <a:r>
-              <a:t>Ventana Óptima de Aplicación</a:t>
+              <a:t>Mapa de Presión por Zona</a:t>
             </a:r>
           </a:p>
         </p:txBody>
@@ -6646,7 +12164,7 @@
       </p:sp>
       <p:pic>
         <p:nvPicPr>
-          <p:cNvPr id="7" name="Picture 6" descr="06_tablero_control.png"/>
+          <p:cNvPr id="7" name="Picture 6" descr="04_mapa_georreferenciado.png"/>
           <p:cNvPicPr>
             <a:picLocks noChangeAspect="1"/>
           </p:cNvPicPr>
@@ -6717,7 +12235,7 @@
               </a:defRPr>
             </a:pPr>
             <a:r>
-              <a:t>Sincronización fenológica para no errar el tratamiento</a:t>
+              <a:t>Cartografía espacial con clusterización de focos y mapa de calor de densidad</a:t>
             </a:r>
           </a:p>
           <a:p>
@@ -6730,7 +12248,7 @@
               </a:defRPr>
             </a:pPr>
             <a:r>
-              <a:t>📉 La Curva de Eficacia: 'Errar la ventana se paga caro'</a:t>
+              <a:t>🗺️ Detección de Focos de Calor Epidemiológicos</a:t>
             </a:r>
           </a:p>
           <a:p>
@@ -6742,63 +12260,68 @@
               </a:defRPr>
             </a:pPr>
             <a:r>
-              <a:t>1. Temprana (-12 a -6d): Eficacia 10-20%. Plaga en huevo, el químico se lava.</a:t>
-            </a:r>
+              <a:t>Clusterización nativa sobre OpenStreetMap (OSMDroid): agrupamiento dinámico que revela focos calientes en la cuenca agrícola.</a:t>
+            </a:r>
+          </a:p>
+          <a:p>
+            <a:pPr>
+              <a:defRPr sz="1050">
+                <a:solidFill>
+                  <a:srgbClr val="9EBAAB"/>
+                </a:solidFill>
+              </a:defRPr>
+            </a:pPr>
+            <a:r>
+              <a:t>• Cluster Zona Núcleo: Identificación instantánea de 11 reportes activos agrupados a corta distancia del establecimiento propio.</a:t>
+            </a:r>
+          </a:p>
+          <a:p>
+            <a:pPr>
+              <a:defRPr sz="1050">
+                <a:solidFill>
+                  <a:srgbClr val="9EBAAB"/>
+                </a:solidFill>
+              </a:defRPr>
+            </a:pPr>
+            <a:r>
+              <a:t>• Ubicación de Lote Propio: Marcador de referencia territorial para medir el gradiente de proximidad del frente de plaga.</a:t>
+            </a:r>
+          </a:p>
+          <a:p>
+            <a:pPr>
+              <a:defRPr sz="1050">
+                <a:solidFill>
+                  <a:srgbClr val="9EBAAB"/>
+                </a:solidFill>
+              </a:defRPr>
+            </a:pPr>
+            <a:r>
+              <a:t>• Puntos vs Mapa de Calor: Conmutación en un toque entre marcadores individuales de scouting y mapa continuo de densidad.</a:t>
+            </a:r>
+          </a:p>
+          <a:p>
+            <a:pPr>
+              <a:defRPr sz="1050">
+                <a:solidFill>
+                  <a:srgbClr val="9EBAAB"/>
+                </a:solidFill>
+              </a:defRPr>
+            </a:pPr>
+            <a:r>
+              <a:t>• Vector de Avance: Correlación visual entre focos comunitarios y condiciones meteorológicas de dispersión.</a:t>
+            </a:r>
+          </a:p>
+          <a:p>
             <a:br/>
-            <a:r>
-              <a:t>2. Ventana Útil (Eclosión a +3d, L1-L3): Eficacia 90%. Máxima susceptibilidad.</a:t>
-            </a:r>
-            <a:br/>
-            <a:r>
-              <a:t>3. Tardía (+6 a +12d): Eficacia 10-30%. Larva grande, daño ya consumado.</a:t>
-            </a:r>
-          </a:p>
-          <a:p>
-            <a:pPr>
-              <a:defRPr sz="1100">
-                <a:solidFill>
-                  <a:srgbClr val="9EBAAB"/>
-                </a:solidFill>
-              </a:defRPr>
-            </a:pPr>
-            <a:r>
-              <a:t>• Cartel Disuasorio Real: Badge 'INCUBACIÓN (ESPERA) - No pulverizar aún'. Evita gastar en huevos.</a:t>
-            </a:r>
-          </a:p>
-          <a:p>
-            <a:pPr>
-              <a:defRPr sz="1100">
-                <a:solidFill>
-                  <a:srgbClr val="9EBAAB"/>
-                </a:solidFill>
-              </a:defRPr>
-            </a:pPr>
-            <a:r>
-              <a:t>• Ahorro Directo: Ahorra entre USD 15 y 30 por hectárea evitando aplicaciones prematuras inútiles.</a:t>
-            </a:r>
-          </a:p>
-          <a:p>
-            <a:pPr>
-              <a:defRPr sz="1100">
-                <a:solidFill>
-                  <a:srgbClr val="9EBAAB"/>
-                </a:solidFill>
-              </a:defRPr>
-            </a:pPr>
-            <a:r>
-              <a:t>• Eficacia Auditada: Tasa del 100% en tratamientos que controlaron la población sin reinfestación.</a:t>
-            </a:r>
-          </a:p>
-          <a:p>
-            <a:pPr>
-              <a:defRPr sz="1100">
-                <a:solidFill>
-                  <a:srgbClr val="9EBAAB"/>
-                </a:solidFill>
-              </a:defRPr>
-            </a:pPr>
-            <a:r>
-              <a:t>• Sostenibilidad: Reduce la carga de agroquímicos y protege insectos benéficos.</a:t>
+            <a:pPr>
+              <a:defRPr sz="1000" i="1">
+                <a:solidFill>
+                  <a:srgbClr val="5CE698"/>
+                </a:solidFill>
+              </a:defRPr>
+            </a:pPr>
+            <a:r>
+              <a:t>🗣️ Qué decir al jurado: Pasamos al Mapa Georreferenciado sobre OpenStreetMap. Vemos clusters espaciales: un foco rojo con 11 reportes activos en zona núcleo y la ca...</a:t>
             </a:r>
           </a:p>
         </p:txBody>
@@ -6873,7 +12396,7 @@
         <p:spPr>
           <a:xfrm>
             <a:off x="731520" y="365760"/>
-            <a:ext cx="2560320" cy="320040"/>
+            <a:ext cx="2926080" cy="320040"/>
           </a:xfrm>
           <a:prstGeom prst="roundRect">
             <a:avLst/>
@@ -6913,7 +12436,7 @@
               </a:defRPr>
             </a:pPr>
             <a:r>
-              <a:t>📈 Tableros de Control • Campañas</a:t>
+              <a:t>Perspectiva 2 • Analítica</a:t>
             </a:r>
           </a:p>
         </p:txBody>
@@ -6967,7 +12490,7 @@
               </a:defRPr>
             </a:pPr>
             <a:r>
-              <a:t>⏱️ 16:30 - 17:30</a:t>
+              <a:t>⏱️ 12:30 - 15:00</a:t>
             </a:r>
           </a:p>
         </p:txBody>
@@ -7002,7 +12525,7 @@
               </a:defRPr>
             </a:pPr>
             <a:r>
-              <a:t>Histórico Consolidado y Prevalencia</a:t>
+              <a:t>Tableros de Control Ejecutivos</a:t>
             </a:r>
           </a:p>
         </p:txBody>
@@ -7054,7 +12577,7 @@
       </p:sp>
       <p:pic>
         <p:nvPicPr>
-          <p:cNvPr id="7" name="Picture 6" descr="07_tablero_campanas.png"/>
+          <p:cNvPr id="7" name="Picture 6" descr="06_tablero_control.png"/>
           <p:cNvPicPr>
             <a:picLocks noChangeAspect="1"/>
           </p:cNvPicPr>
@@ -7125,7 +12648,7 @@
               </a:defRPr>
             </a:pPr>
             <a:r>
-              <a:t>Inteligencia histórica interanual y rotación de insumos</a:t>
+              <a:t>Semáforo de superficie, la Curva de Eficacia fitosanitaria y memoria interanual</a:t>
             </a:r>
           </a:p>
           <a:p>
@@ -7138,7 +12661,7 @@
               </a:defRPr>
             </a:pPr>
             <a:r>
-              <a:t>🌾 Trazabilidad Estratégica Interanual</a:t>
+              <a:t>📉 "Errar la Ventana se Paga Caro" • Curva de Eficacia</a:t>
             </a:r>
           </a:p>
           <a:p>
@@ -7150,55 +12673,68 @@
               </a:defRPr>
             </a:pPr>
             <a:r>
-              <a:t>Auditoría histórica multicampaña (ciclos 2026/27, 2025, 2024...) para la toma de decisiones gerenciales y compras anticipadas.</a:t>
-            </a:r>
-          </a:p>
-          <a:p>
-            <a:pPr>
-              <a:defRPr sz="1100">
+              <a:t>Temprana (Huevo): 10-20% de eficacia (plata tirada) ➔ Ventana Útil (L1-L3): &gt;90% de eficacia ➔ Tardía: 20-30% de eficacia.</a:t>
+            </a:r>
+          </a:p>
+          <a:p>
+            <a:pPr>
+              <a:defRPr sz="1050">
                 <a:solidFill>
                   <a:srgbClr val="9EBAAB"/>
                 </a:solidFill>
               </a:defRPr>
             </a:pPr>
             <a:r>
-              <a:t>• Plaga Predominante: Cálculo autónomo: Oruga de las leguminosas (50% de incidencia).</a:t>
-            </a:r>
-          </a:p>
-          <a:p>
-            <a:pPr>
-              <a:defRPr sz="1100">
+              <a:t>• Solapa Lotes (Productor): Semáforo Donut (58 ha), ranking de criticidad y días desde siembra (ej. Soja 87 días).</a:t>
+            </a:r>
+          </a:p>
+          <a:p>
+            <a:pPr>
+              <a:defRPr sz="1050">
                 <a:solidFill>
                   <a:srgbClr val="9EBAAB"/>
                 </a:solidFill>
               </a:defRPr>
             </a:pPr>
             <a:r>
-              <a:t>• Prevalencia Comparativa: Gráfico de barras comparando Oruga vs Chicharrita del maíz.</a:t>
-            </a:r>
-          </a:p>
-          <a:p>
-            <a:pPr>
-              <a:defRPr sz="1100">
+              <a:t>• Badge Disuasorio: Cartel 'INCUBACIÓN - No pulverizar aún': evita aplicaciones a destiempo que destruyen margen.</a:t>
+            </a:r>
+          </a:p>
+          <a:p>
+            <a:pPr>
+              <a:defRPr sz="1050">
                 <a:solidFill>
                   <a:srgbClr val="9EBAAB"/>
                 </a:solidFill>
               </a:defRPr>
             </a:pPr>
             <a:r>
-              <a:t>• Planificación IRAC: Base de datos para rotar modos de acción y evitar resistencia biológica.</a:t>
-            </a:r>
-          </a:p>
-          <a:p>
-            <a:pPr>
-              <a:defRPr sz="1100">
+              <a:t>• Solapa Campañas (Histórico): Auditoría interanual 2026/27: Oruga predominante (50%). Planificación de compras tempranas con descuento.</a:t>
+            </a:r>
+          </a:p>
+          <a:p>
+            <a:pPr>
+              <a:defRPr sz="1050">
                 <a:solidFill>
                   <a:srgbClr val="9EBAAB"/>
                 </a:solidFill>
               </a:defRPr>
             </a:pPr>
             <a:r>
-              <a:t>• Compras Estratégicas: Negociación de insumos con meses de anticipación con precios de pre-campaña.</a:t>
+              <a:t>• Rotación IRAC: Datos objetivos para alternar modos de acción químicos y evitar la resistencia biológica en el lote.</a:t>
+            </a:r>
+          </a:p>
+          <a:p>
+            <a:br/>
+            <a:pPr>
+              <a:defRPr sz="1000" i="1">
+                <a:solidFill>
+                  <a:srgbClr val="5CE698"/>
+                </a:solidFill>
+              </a:defRPr>
+            </a:pPr>
+            <a:r>
+              <a:t>🗣️ Qué decir al jurado: Llegamos a los Tableros de Control. En Lotes, semáforo donut y ranking con días de siembra. En Control, la Curva de Eficacia: pulverizar en ...</a:t>
             </a:r>
           </a:p>
         </p:txBody>
@@ -7273,7 +12809,7 @@
         <p:spPr>
           <a:xfrm>
             <a:off x="731520" y="365760"/>
-            <a:ext cx="2560320" cy="320040"/>
+            <a:ext cx="2926080" cy="320040"/>
           </a:xfrm>
           <a:prstGeom prst="roundRect">
             <a:avLst/>
@@ -7313,7 +12849,7 @@
               </a:defRPr>
             </a:pPr>
             <a:r>
-              <a:t>🏆 Retorno &amp; Cierre</a:t>
+              <a:t>Perspectiva 2 • Gobernanza</a:t>
             </a:r>
           </a:p>
         </p:txBody>
@@ -7367,7 +12903,7 @@
               </a:defRPr>
             </a:pPr>
             <a:r>
-              <a:t>⏱️ 17:30 - 20:00</a:t>
+              <a:t>⏱️ 15:00 - 16:00</a:t>
             </a:r>
           </a:p>
         </p:txBody>
@@ -7402,7 +12938,7 @@
               </a:defRPr>
             </a:pPr>
             <a:r>
-              <a:t>PLAG-OUT: Nosotros Anticipamos</a:t>
+              <a:t>Perfil, Permisos y Consentimiento ML</a:t>
             </a:r>
           </a:p>
         </p:txBody>
@@ -7415,8 +12951,8 @@
         </p:nvSpPr>
         <p:spPr>
           <a:xfrm>
-            <a:off x="731520" y="1463040"/>
-            <a:ext cx="3383280" cy="2011680"/>
+            <a:off x="731520" y="1371600"/>
+            <a:ext cx="3291840" cy="5029200"/>
           </a:xfrm>
           <a:prstGeom prst="roundRect">
             <a:avLst/>
@@ -7424,7 +12960,7 @@
           <a:solidFill>
             <a:srgbClr val="14261D"/>
           </a:solidFill>
-          <a:ln>
+          <a:ln w="12700">
             <a:solidFill>
               <a:srgbClr val="284636"/>
             </a:solidFill>
@@ -7445,56 +12981,47 @@
           </a:fontRef>
         </p:style>
         <p:txBody>
-          <a:bodyPr rtlCol="0" anchor="ctr" wrap="square"/>
-          <a:lstStyle/>
-          <a:p>
-            <a:pPr algn="ctr">
-              <a:defRPr sz="2800" b="1">
-                <a:solidFill>
-                  <a:srgbClr val="F2B23E"/>
-                </a:solidFill>
-              </a:defRPr>
-            </a:pPr>
-            <a:r>
-              <a:t>Menos</a:t>
-            </a:r>
-          </a:p>
-          <a:p>
-            <a:pPr algn="ctr">
-              <a:defRPr sz="1300" b="1">
-                <a:solidFill>
-                  <a:srgbClr val="F3F8F5"/>
-                </a:solidFill>
-              </a:defRPr>
-            </a:pPr>
-            <a:r>
-              <a:t>Aplicaciones</a:t>
-            </a:r>
-          </a:p>
-          <a:p>
-            <a:pPr algn="ctr">
-              <a:defRPr sz="1000">
-                <a:solidFill>
-                  <a:srgbClr val="9EBAAB"/>
-                </a:solidFill>
-              </a:defRPr>
-            </a:pPr>
-            <a:r>
-              <a:t>-25% en costos de fitosanitarios al no aplicar en estadios invulnerables.</a:t>
-            </a:r>
-          </a:p>
-        </p:txBody>
-      </p:sp>
-      <p:sp>
-        <p:nvSpPr>
-          <p:cNvPr id="7" name="Rounded Rectangle 6"/>
+          <a:bodyPr rtlCol="0" anchor="ctr"/>
+          <a:lstStyle/>
+          <a:p>
+            <a:pPr algn="ctr"/>
+          </a:p>
+        </p:txBody>
+      </p:sp>
+      <p:pic>
+        <p:nvPicPr>
+          <p:cNvPr id="7" name="Picture 6" descr="01_gestion_terrenos.png"/>
+          <p:cNvPicPr>
+            <a:picLocks noChangeAspect="1"/>
+          </p:cNvPicPr>
+          <p:nvPr/>
+        </p:nvPicPr>
+        <p:blipFill>
+          <a:blip r:embed="rId2"/>
+          <a:stretch>
+            <a:fillRect/>
+          </a:stretch>
+        </p:blipFill>
+        <p:spPr>
+          <a:xfrm>
+            <a:off x="914400" y="1508760"/>
+            <a:ext cx="2926080" cy="6502400"/>
+          </a:xfrm>
+          <a:prstGeom prst="rect">
+            <a:avLst/>
+          </a:prstGeom>
+        </p:spPr>
+      </p:pic>
+      <p:sp>
+        <p:nvSpPr>
+          <p:cNvPr id="8" name="Rounded Rectangle 7"/>
           <p:cNvSpPr/>
           <p:nvPr/>
         </p:nvSpPr>
         <p:spPr>
           <a:xfrm>
-            <a:off x="4343400" y="1463040"/>
-            <a:ext cx="3383280" cy="2011680"/>
+            <a:off x="4297680" y="1371600"/>
+            <a:ext cx="7132320" cy="5029200"/>
           </a:xfrm>
           <a:prstGeom prst="roundRect">
             <a:avLst/>
@@ -7502,7 +13029,7 @@
           <a:solidFill>
             <a:srgbClr val="14261D"/>
           </a:solidFill>
-          <a:ln>
+          <a:ln w="12700">
             <a:solidFill>
               <a:srgbClr val="284636"/>
             </a:solidFill>
@@ -7527,199 +13054,100 @@
           <a:lstStyle/>
           <a:p>
             <a:pPr algn="ctr">
-              <a:defRPr sz="2800" b="1">
+              <a:defRPr sz="1400" b="1">
                 <a:solidFill>
                   <a:srgbClr val="5CE698"/>
                 </a:solidFill>
               </a:defRPr>
             </a:pPr>
             <a:r>
-              <a:t>+7 a 14</a:t>
-            </a:r>
-          </a:p>
-          <a:p>
-            <a:pPr algn="ctr">
+              <a:t>Control ético de datos, soberanía del productor y permisos de sistema</a:t>
+            </a:r>
+          </a:p>
+          <a:p>
+            <a:br/>
+            <a:pPr>
               <a:defRPr sz="1300" b="1">
                 <a:solidFill>
+                  <a:srgbClr val="F2B23E"/>
+                </a:solidFill>
+              </a:defRPr>
+            </a:pPr>
+            <a:r>
+              <a:t>🛡️ Transparencia y Consentimiento Informado</a:t>
+            </a:r>
+          </a:p>
+          <a:p>
+            <a:pPr>
+              <a:defRPr sz="1100">
+                <a:solidFill>
                   <a:srgbClr val="F3F8F5"/>
                 </a:solidFill>
               </a:defRPr>
             </a:pPr>
             <a:r>
-              <a:t>Días Anticipación</a:t>
-            </a:r>
-          </a:p>
-          <a:p>
-            <a:pPr algn="ctr">
-              <a:defRPr sz="1000">
+              <a:t>El productor es el único dueño de su información agronómica. No entrenamos algoritmos a sus espaldas.</a:t>
+            </a:r>
+          </a:p>
+          <a:p>
+            <a:pPr>
+              <a:defRPr sz="1050">
                 <a:solidFill>
                   <a:srgbClr val="9EBAAB"/>
                 </a:solidFill>
               </a:defRPr>
             </a:pPr>
             <a:r>
-              <a:t>Alerta bioclimática para coordinar contratistas y pulverizadoras sin urgencias.</a:t>
-            </a:r>
-          </a:p>
-        </p:txBody>
-      </p:sp>
-      <p:sp>
-        <p:nvSpPr>
-          <p:cNvPr id="8" name="Rounded Rectangle 7"/>
-          <p:cNvSpPr/>
-          <p:nvPr/>
-        </p:nvSpPr>
-        <p:spPr>
-          <a:xfrm>
-            <a:off x="7955280" y="1463040"/>
-            <a:ext cx="3383280" cy="2011680"/>
-          </a:xfrm>
-          <a:prstGeom prst="roundRect">
-            <a:avLst/>
-          </a:prstGeom>
-          <a:solidFill>
-            <a:srgbClr val="14261D"/>
-          </a:solidFill>
-          <a:ln>
-            <a:solidFill>
-              <a:srgbClr val="284636"/>
-            </a:solidFill>
-          </a:ln>
-        </p:spPr>
-        <p:style>
-          <a:lnRef idx="1">
-            <a:schemeClr val="accent1"/>
-          </a:lnRef>
-          <a:fillRef idx="3">
-            <a:schemeClr val="accent1"/>
-          </a:fillRef>
-          <a:effectRef idx="2">
-            <a:schemeClr val="accent1"/>
-          </a:effectRef>
-          <a:fontRef idx="minor">
-            <a:schemeClr val="lt1"/>
-          </a:fontRef>
-        </p:style>
-        <p:txBody>
-          <a:bodyPr rtlCol="0" anchor="ctr" wrap="square"/>
-          <a:lstStyle/>
-          <a:p>
-            <a:pPr algn="ctr">
-              <a:defRPr sz="2800" b="1">
-                <a:solidFill>
-                  <a:srgbClr val="6EB7FF"/>
-                </a:solidFill>
-              </a:defRPr>
-            </a:pPr>
-            <a:r>
-              <a:t>100%</a:t>
-            </a:r>
-          </a:p>
-          <a:p>
-            <a:pPr algn="ctr">
-              <a:defRPr sz="1300" b="1">
-                <a:solidFill>
-                  <a:srgbClr val="F3F8F5"/>
-                </a:solidFill>
-              </a:defRPr>
-            </a:pPr>
-            <a:r>
-              <a:t>Registro Trazable</a:t>
-            </a:r>
-          </a:p>
-          <a:p>
-            <a:pPr algn="ctr">
-              <a:defRPr sz="1000">
+              <a:t>• Control de Notificaciones: Switch nativo vinculado a Firebase Cloud Messaging para registrar o dar de baja el token FCM.</a:t>
+            </a:r>
+          </a:p>
+          <a:p>
+            <a:pPr>
+              <a:defRPr sz="1050">
                 <a:solidFill>
                   <a:srgbClr val="9EBAAB"/>
                 </a:solidFill>
               </a:defRPr>
             </a:pPr>
             <a:r>
-              <a:t>Digitalización completa para certificar Buenas Prácticas Agrícolas (BPA).</a:t>
-            </a:r>
-          </a:p>
-        </p:txBody>
-      </p:sp>
-      <p:sp>
-        <p:nvSpPr>
-          <p:cNvPr id="9" name="Rounded Rectangle 8"/>
-          <p:cNvSpPr/>
-          <p:nvPr/>
-        </p:nvSpPr>
-        <p:spPr>
-          <a:xfrm>
-            <a:off x="731520" y="3657600"/>
-            <a:ext cx="10607040" cy="2560320"/>
-          </a:xfrm>
-          <a:prstGeom prst="roundRect">
-            <a:avLst/>
-          </a:prstGeom>
-          <a:solidFill>
-            <a:srgbClr val="14261D"/>
-          </a:solidFill>
-          <a:ln>
-            <a:solidFill>
-              <a:srgbClr val="284636"/>
-            </a:solidFill>
-          </a:ln>
-        </p:spPr>
-        <p:style>
-          <a:lnRef idx="1">
-            <a:schemeClr val="accent1"/>
-          </a:lnRef>
-          <a:fillRef idx="3">
-            <a:schemeClr val="accent1"/>
-          </a:fillRef>
-          <a:effectRef idx="2">
-            <a:schemeClr val="accent1"/>
-          </a:effectRef>
-          <a:fontRef idx="minor">
-            <a:schemeClr val="lt1"/>
-          </a:fontRef>
-        </p:style>
-        <p:txBody>
-          <a:bodyPr rtlCol="0" anchor="ctr" wrap="square"/>
-          <a:lstStyle/>
-          <a:p>
-            <a:pPr algn="ctr">
-              <a:defRPr sz="1300" b="1">
-                <a:solidFill>
-                  <a:srgbClr val="F2B23E"/>
-                </a:solidFill>
-              </a:defRPr>
-            </a:pPr>
-            <a:r>
-              <a:t>🎯 DIFERENCIACIÓN FRENTE AL MERCADO (xarvio, Auravant, FieldView):</a:t>
-            </a:r>
-          </a:p>
-          <a:p>
-            <a:pPr>
-              <a:defRPr sz="1100">
-                <a:solidFill>
-                  <a:srgbClr val="F3F8F5"/>
-                </a:solidFill>
-              </a:defRPr>
-            </a:pPr>
-            <a:r>
-              <a:t>• Detección Predictiva: Calculamos el estadio biológico por GDD antes de que el satélite vea la hoja comida.</a:t>
-            </a:r>
+              <a:t>• Permiso de Ubicación: Monitoreo continuo de permisos de GPS en Android con revalidación y acceso directo a ajustes.</a:t>
+            </a:r>
+          </a:p>
+          <a:p>
+            <a:pPr>
+              <a:defRPr sz="1050">
+                <a:solidFill>
+                  <a:srgbClr val="9EBAAB"/>
+                </a:solidFill>
+              </a:defRPr>
+            </a:pPr>
+            <a:r>
+              <a:t>• Switch Consentimiento ML: Opt-in/Opt-out granular: el usuario autoriza o revoca el uso de sus reportes para calibrar modelos de IA.</a:t>
+            </a:r>
+          </a:p>
+          <a:p>
+            <a:pPr>
+              <a:defRPr sz="1050">
+                <a:solidFill>
+                  <a:srgbClr val="9EBAAB"/>
+                </a:solidFill>
+              </a:defRPr>
+            </a:pPr>
+            <a:r>
+              <a:t>• Seguridad de Sesión: Tokens JWT con cierre de sesión seguro y protección contra pérdida de credenciales.</a:t>
+            </a:r>
+          </a:p>
+          <a:p>
             <a:br/>
-            <a:r>
-              <a:t>• Calibración Nacional: Modelos térmicos basados en ensayos del INTA y universidades argentinas.</a:t>
-            </a:r>
-            <a:br/>
-            <a:r>
-              <a:t>• Red Colaborativa: Monitoreo comunitario en anillo de 20 km anonimizado según Ley 25.326.</a:t>
-            </a:r>
-            <a:br/>
-            <a:r>
-              <a:t>• Roadmap: Prototipo validado al 25/11/2026 ➔ Pilotos a campo 26/27 en NOA/NEA ➔ Expansión 2028 (Brasil y Paraguay).</a:t>
-            </a:r>
-            <a:br/>
-            <a:br/>
-            <a:r>
-              <a:t>✉️ Contacto: preguntas@plag-out.com.ar | ¡Muchas gracias y abrimos el espacio para preguntas!</a:t>
+            <a:pPr>
+              <a:defRPr sz="1000" i="1">
+                <a:solidFill>
+                  <a:srgbClr val="5CE698"/>
+                </a:solidFill>
+              </a:defRPr>
+            </a:pPr>
+            <a:r>
+              <a:t>🗣️ Qué decir al jurado: En Perfil y Ajustes gestionamos notificaciones nativas con FCM, permisos de ubicación GPS y el switch de Consentimiento ML. El productor dec...</a:t>
             </a:r>
           </a:p>
         </p:txBody>
